--- a/docs/lens-rfq-imx708.pptx
+++ b/docs/lens-rfq-imx708.pptx
@@ -13,9 +13,11 @@
     <p:sldId id="261" r:id="rId7"/>
     <p:sldId id="262" r:id="rId8"/>
     <p:sldId id="263" r:id="rId9"/>
+    <p:sldId id="264" r:id="rId10"/>
+    <p:sldId id="265" r:id="rId11"/>
   </p:sldIdLst>
   <p:notesMasterIdLst>
-    <p:notesMasterId r:id="rId10"/>
+    <p:notesMasterId r:id="rId12"/>
   </p:notesMasterIdLst>
   <p:sldSz cx="9144000" cy="5143500"/>
   <p:notesSz cx="5143500" cy="9144000"/>
@@ -114,28 +116,34 @@
   <p:extLst>
     <p:ext uri="{521415D9-36F7-43E2-AB2F-B90AF26B5E84}">
       <p14:sectionLst xmlns:p14="http://schemas.microsoft.com/office/powerpoint/2010/main">
-        <p14:section name="개요" id="{61b02c5b-d6fd-f131-c622-cae57dcb1321}">
+        <p14:section name="개요" id="{31ac6f4c-95f7-11e3-7e62-cbabf51b15ba}">
           <p14:sldIdLst>
             <p14:sldId id="256"/>
             <p14:sldId id="257"/>
           </p14:sldIdLst>
         </p14:section>
-        <p14:section name="참고 자료" id="{52dc9d36-afa2-3973-6b52-8dc4901d17b8}">
+        <p14:section name="참고 자료" id="{fe5cad44-4b1d-e7d8-30eb-28a5b61eb3ab}">
           <p14:sldIdLst>
             <p14:sldId id="258"/>
+            <p14:sldId id="259"/>
           </p14:sldIdLst>
         </p14:section>
-        <p14:section name="사양" id="{68014ec4-5868-f624-8e4e-14be21c824de}">
+        <p14:section name="개발 방식" id="{ae7fba96-fa76-61f0-1402-d92124bedaca}">
           <p14:sldIdLst>
-            <p14:sldId id="259"/>
             <p14:sldId id="260"/>
             <p14:sldId id="261"/>
             <p14:sldId id="262"/>
           </p14:sldIdLst>
         </p14:section>
-        <p14:section name="회신 요청" id="{fdcf5a7f-df14-caa1-9b13-838382dd7c13}">
+        <p14:section name="요구 사양" id="{da2d22a1-62ca-9ac3-fa7b-d8f029ff266c}">
           <p14:sldIdLst>
             <p14:sldId id="263"/>
+            <p14:sldId id="264"/>
+          </p14:sldIdLst>
+        </p14:section>
+        <p14:section name="회신 요청" id="{6b9a53c6-f7d5-20b6-a545-2261725f39a0}">
+          <p14:sldIdLst>
+            <p14:sldId id="265"/>
           </p14:sldIdLst>
         </p14:section>
       </p14:sectionLst>
@@ -584,6 +592,94 @@
 </p:notes>
 </file>
 
+<file path=ppt/notesSlides/notesSlide10.xml><?xml version="1.0" encoding="utf-8"?>
+<p:notes xmlns:a="http://schemas.openxmlformats.org/drawingml/2006/main" xmlns:r="http://schemas.openxmlformats.org/officeDocument/2006/relationships" xmlns:p="http://schemas.openxmlformats.org/presentationml/2006/main">
+  <p:cSld>
+    <p:spTree>
+      <p:nvGrpSpPr>
+        <p:cNvPr id="1" name=""/>
+        <p:cNvGrpSpPr/>
+        <p:nvPr/>
+      </p:nvGrpSpPr>
+      <p:grpSpPr>
+        <a:xfrm>
+          <a:off x="0" y="0"/>
+          <a:ext cx="0" cy="0"/>
+          <a:chOff x="0" y="0"/>
+          <a:chExt cx="0" cy="0"/>
+        </a:xfrm>
+      </p:grpSpPr>
+      <p:sp>
+        <p:nvSpPr>
+          <p:cNvPr id="2" name="Slide Image Placeholder 1"/>
+          <p:cNvSpPr>
+            <a:spLocks noGrp="1" noRot="1" noChangeAspect="1"/>
+          </p:cNvSpPr>
+          <p:nvPr>
+            <p:ph type="sldImg"/>
+          </p:nvPr>
+        </p:nvSpPr>
+        <p:spPr/>
+      </p:sp>
+      <p:sp>
+        <p:nvSpPr>
+          <p:cNvPr id="3" name="Notes Placeholder 2"/>
+          <p:cNvSpPr>
+            <a:spLocks noGrp="1"/>
+          </p:cNvSpPr>
+          <p:nvPr>
+            <p:ph type="body" idx="1"/>
+          </p:nvPr>
+        </p:nvSpPr>
+        <p:spPr/>
+        <p:txBody>
+          <a:bodyPr/>
+          <a:lstStyle/>
+          <a:p>
+            <a:r>
+              <a:rPr lang="en-US" dirty="0"/>
+              <a:t/>
+            </a:r>
+            <a:endParaRPr lang="en-US" dirty="0"/>
+          </a:p>
+        </p:txBody>
+      </p:sp>
+      <p:sp>
+        <p:nvSpPr>
+          <p:cNvPr id="4" name="Slide Number Placeholder 3"/>
+          <p:cNvSpPr>
+            <a:spLocks noGrp="1"/>
+          </p:cNvSpPr>
+          <p:nvPr>
+            <p:ph type="sldNum" sz="quarter" idx="10"/>
+          </p:nvPr>
+        </p:nvSpPr>
+        <p:spPr/>
+        <p:txBody>
+          <a:bodyPr/>
+          <a:lstStyle/>
+          <a:p>
+            <a:fld id="{F7021451-1387-4CA6-816F-3879F97B5CBC}" type="slidenum">
+              <a:rPr lang="en-US"/>
+              <a:t>10</a:t>
+            </a:fld>
+            <a:endParaRPr lang="en-US"/>
+          </a:p>
+        </p:txBody>
+      </p:sp>
+    </p:spTree>
+    <p:extLst>
+      <p:ext uri="{BB962C8B-B14F-4D97-AF65-F5344CB8AC3E}">
+        <p14:creationId xmlns:p14="http://schemas.microsoft.com/office/powerpoint/2010/main" val="1024086991"/>
+      </p:ext>
+    </p:extLst>
+  </p:cSld>
+  <p:clrMapOvr>
+    <a:masterClrMapping/>
+  </p:clrMapOvr>
+</p:notes>
+</file>
+
 <file path=ppt/notesSlides/notesSlide2.xml><?xml version="1.0" encoding="utf-8"?>
 <p:notes xmlns:a="http://schemas.openxmlformats.org/drawingml/2006/main" xmlns:r="http://schemas.openxmlformats.org/officeDocument/2006/relationships" xmlns:p="http://schemas.openxmlformats.org/presentationml/2006/main">
   <p:cSld>
@@ -1182,6 +1278,94 @@
             <a:fld id="{F7021451-1387-4CA6-816F-3879F97B5CBC}" type="slidenum">
               <a:rPr lang="en-US"/>
               <a:t>8</a:t>
+            </a:fld>
+            <a:endParaRPr lang="en-US"/>
+          </a:p>
+        </p:txBody>
+      </p:sp>
+    </p:spTree>
+    <p:extLst>
+      <p:ext uri="{BB962C8B-B14F-4D97-AF65-F5344CB8AC3E}">
+        <p14:creationId xmlns:p14="http://schemas.microsoft.com/office/powerpoint/2010/main" val="1024086991"/>
+      </p:ext>
+    </p:extLst>
+  </p:cSld>
+  <p:clrMapOvr>
+    <a:masterClrMapping/>
+  </p:clrMapOvr>
+</p:notes>
+</file>
+
+<file path=ppt/notesSlides/notesSlide9.xml><?xml version="1.0" encoding="utf-8"?>
+<p:notes xmlns:a="http://schemas.openxmlformats.org/drawingml/2006/main" xmlns:r="http://schemas.openxmlformats.org/officeDocument/2006/relationships" xmlns:p="http://schemas.openxmlformats.org/presentationml/2006/main">
+  <p:cSld>
+    <p:spTree>
+      <p:nvGrpSpPr>
+        <p:cNvPr id="1" name=""/>
+        <p:cNvGrpSpPr/>
+        <p:nvPr/>
+      </p:nvGrpSpPr>
+      <p:grpSpPr>
+        <a:xfrm>
+          <a:off x="0" y="0"/>
+          <a:ext cx="0" cy="0"/>
+          <a:chOff x="0" y="0"/>
+          <a:chExt cx="0" cy="0"/>
+        </a:xfrm>
+      </p:grpSpPr>
+      <p:sp>
+        <p:nvSpPr>
+          <p:cNvPr id="2" name="Slide Image Placeholder 1"/>
+          <p:cNvSpPr>
+            <a:spLocks noGrp="1" noRot="1" noChangeAspect="1"/>
+          </p:cNvSpPr>
+          <p:nvPr>
+            <p:ph type="sldImg"/>
+          </p:nvPr>
+        </p:nvSpPr>
+        <p:spPr/>
+      </p:sp>
+      <p:sp>
+        <p:nvSpPr>
+          <p:cNvPr id="3" name="Notes Placeholder 2"/>
+          <p:cNvSpPr>
+            <a:spLocks noGrp="1"/>
+          </p:cNvSpPr>
+          <p:nvPr>
+            <p:ph type="body" idx="1"/>
+          </p:nvPr>
+        </p:nvSpPr>
+        <p:spPr/>
+        <p:txBody>
+          <a:bodyPr/>
+          <a:lstStyle/>
+          <a:p>
+            <a:r>
+              <a:rPr lang="en-US" dirty="0"/>
+              <a:t/>
+            </a:r>
+            <a:endParaRPr lang="en-US" dirty="0"/>
+          </a:p>
+        </p:txBody>
+      </p:sp>
+      <p:sp>
+        <p:nvSpPr>
+          <p:cNvPr id="4" name="Slide Number Placeholder 3"/>
+          <p:cNvSpPr>
+            <a:spLocks noGrp="1"/>
+          </p:cNvSpPr>
+          <p:nvPr>
+            <p:ph type="sldNum" sz="quarter" idx="10"/>
+          </p:nvPr>
+        </p:nvSpPr>
+        <p:spPr/>
+        <p:txBody>
+          <a:bodyPr/>
+          <a:lstStyle/>
+          <a:p>
+            <a:fld id="{F7021451-1387-4CA6-816F-3879F97B5CBC}" type="slidenum">
+              <a:rPr lang="en-US"/>
+              <a:t>9</a:t>
             </a:fld>
             <a:endParaRPr lang="en-US"/>
           </a:p>
@@ -1937,7 +2121,7 @@
                   <a:schemeClr val="bg1"/>
                 </a:solidFill>
               </a:rPr>
-              <a:t>두피 스캐너용 접사 렌즈 제작 요청</a:t>
+              <a:t>두피 스캐너용 자동초점 접사 렌즈 제작 요청</a:t>
             </a:r>
             <a:endParaRPr lang="en-US" sz="3200" dirty="0"/>
           </a:p>
@@ -1975,7 +2159,7 @@
                   <a:schemeClr val="accent6"/>
                 </a:solidFill>
               </a:rPr>
-              <a:t>IMX708 센서 · 작업거리 20 mm</a:t>
+              <a:t>IMX708 센서 · 촬영 범위 6.0 × 6.0 mm</a:t>
             </a:r>
             <a:endParaRPr lang="en-US" sz="1600" dirty="0"/>
           </a:p>
@@ -1989,7 +2173,7 @@
                   <a:schemeClr val="accent6"/>
                 </a:solidFill>
               </a:rPr>
-              <a:t>촬영 범위 6.0 × 6.0 mm</a:t>
+              <a:t>A안 덧대기 / B안 렌즈 교체</a:t>
             </a:r>
             <a:endParaRPr lang="en-US" sz="1600" dirty="0"/>
           </a:p>
@@ -2093,6 +2277,271 @@
             <a:schemeClr val="accent3"/>
           </a:solidFill>
           <a:ln/>
+        </p:spPr>
+      </p:sp>
+    </p:spTree>
+  </p:cSld>
+  <p:clrMapOvr>
+    <a:masterClrMapping/>
+  </p:clrMapOvr>
+</p:sld>
+</file>
+
+<file path=ppt/slides/slide10.xml><?xml version="1.0" encoding="utf-8"?>
+<p:sld xmlns:a="http://schemas.openxmlformats.org/drawingml/2006/main" xmlns:r="http://schemas.openxmlformats.org/officeDocument/2006/relationships" xmlns:p="http://schemas.openxmlformats.org/presentationml/2006/main">
+  <p:cSld name="Slide 10">
+    <p:spTree>
+      <p:nvGrpSpPr>
+        <p:cNvPr id="1" name=""/>
+        <p:cNvGrpSpPr/>
+        <p:nvPr/>
+      </p:nvGrpSpPr>
+      <p:grpSpPr>
+        <a:xfrm>
+          <a:off x="0" y="0"/>
+          <a:ext cx="0" cy="0"/>
+          <a:chOff x="0" y="0"/>
+          <a:chExt cx="0" cy="0"/>
+        </a:xfrm>
+      </p:grpSpPr>
+      <p:sp>
+        <p:nvSpPr>
+          <p:cNvPr id="2" name="Text 0"/>
+          <p:cNvSpPr/>
+          <p:nvPr>
+            <p:ph idx="100" type="title" hasCustomPrompt="1"/>
+          </p:nvPr>
+        </p:nvSpPr>
+        <p:spPr>
+          <a:xfrm>
+            <a:off x="548640" y="457200"/>
+            <a:ext cx="8046720" cy="731520"/>
+          </a:xfrm>
+          <a:prstGeom prst="rect">
+            <a:avLst/>
+          </a:prstGeom>
+          <a:noFill/>
+          <a:ln/>
+        </p:spPr>
+        <p:txBody>
+          <a:bodyPr wrap="square" lIns="0" tIns="0" rIns="0" bIns="0" rtlCol="0" anchor="ctr"/>
+          <a:lstStyle/>
+          <a:p>
+            <a:pPr algn="l" indent="0" marL="0">
+              <a:buNone/>
+            </a:pPr>
+            <a:r>
+              <a:rPr lang="en-US" sz="3000" b="1" dirty="0">
+                <a:solidFill>
+                  <a:schemeClr val="bg1"/>
+                </a:solidFill>
+              </a:rPr>
+              <a:t>회신 요청 사항 (A·B안 각각)</a:t>
+            </a:r>
+            <a:endParaRPr lang="en-US" sz="3000" dirty="0"/>
+          </a:p>
+        </p:txBody>
+      </p:sp>
+      <p:sp>
+        <p:nvSpPr>
+          <p:cNvPr id="3" name="reply-list"/>
+          <p:cNvSpPr txBox="1"/>
+          <p:nvPr/>
+        </p:nvSpPr>
+        <p:spPr>
+          <a:xfrm>
+            <a:off x="548640" y="1371600"/>
+            <a:ext cx="6309360" cy="3108960"/>
+          </a:xfrm>
+          <a:prstGeom prst="rect">
+            <a:avLst/>
+          </a:prstGeom>
+          <a:noFill/>
+          <a:ln/>
+        </p:spPr>
+        <p:txBody>
+          <a:bodyPr wrap="square" lIns="0" tIns="0" rIns="0" bIns="0" rtlCol="0" anchor="t"/>
+          <a:lstStyle/>
+          <a:p>
+            <a:pPr marL="342900" indent="-342900">
+              <a:spcAft>
+                <a:spcPts val="1000"/>
+              </a:spcAft>
+              <a:buSzPct val="100000"/>
+              <a:buFont typeface="+mj-lt"/>
+              <a:buAutoNum type="arabicPeriod" startAt="1"/>
+            </a:pPr>
+            <a:r>
+              <a:rPr lang="en-US" sz="1600" dirty="0">
+                <a:solidFill>
+                  <a:schemeClr val="bg1"/>
+                </a:solidFill>
+              </a:rPr>
+              <a:t>설계 가능 여부와 제안 사양 (F값, MTF, 전장)</a:t>
+            </a:r>
+            <a:endParaRPr lang="en-US" sz="1600" dirty="0"/>
+          </a:p>
+          <a:p>
+            <a:pPr marL="342900" indent="-342900">
+              <a:spcAft>
+                <a:spcPts val="1000"/>
+              </a:spcAft>
+              <a:buSzPct val="100000"/>
+              <a:buFont typeface="+mj-lt"/>
+              <a:buAutoNum type="arabicPeriod" startAt="1"/>
+            </a:pPr>
+            <a:r>
+              <a:rPr lang="en-US" sz="1600" dirty="0">
+                <a:solidFill>
+                  <a:schemeClr val="bg1"/>
+                </a:solidFill>
+              </a:rPr>
+              <a:t>렌즈 데이터시트 및 도면</a:t>
+            </a:r>
+            <a:endParaRPr lang="en-US" sz="1600" dirty="0"/>
+          </a:p>
+          <a:p>
+            <a:pPr marL="342900" indent="-342900">
+              <a:spcAft>
+                <a:spcPts val="1000"/>
+              </a:spcAft>
+              <a:buSzPct val="100000"/>
+              <a:buFont typeface="+mj-lt"/>
+              <a:buAutoNum type="arabicPeriod" startAt="1"/>
+            </a:pPr>
+            <a:r>
+              <a:rPr lang="en-US" sz="1600" dirty="0">
+                <a:solidFill>
+                  <a:schemeClr val="bg1"/>
+                </a:solidFill>
+              </a:rPr>
+              <a:t>샘플: 수량 3–5개, 샘플 비용, 샘플 납기 (한국 배송 포함)</a:t>
+            </a:r>
+            <a:endParaRPr lang="en-US" sz="1600" dirty="0"/>
+          </a:p>
+          <a:p>
+            <a:pPr marL="342900" indent="-342900">
+              <a:spcAft>
+                <a:spcPts val="1000"/>
+              </a:spcAft>
+              <a:buSzPct val="100000"/>
+              <a:buFont typeface="+mj-lt"/>
+              <a:buAutoNum type="arabicPeriod" startAt="1"/>
+            </a:pPr>
+            <a:r>
+              <a:rPr lang="en-US" sz="1600" dirty="0">
+                <a:solidFill>
+                  <a:schemeClr val="bg1"/>
+                </a:solidFill>
+              </a:rPr>
+              <a:t>양산 단가 (1,000개 / 5,000개 기준)</a:t>
+            </a:r>
+            <a:endParaRPr lang="en-US" sz="1600" dirty="0"/>
+          </a:p>
+          <a:p>
+            <a:pPr marL="342900" indent="-342900">
+              <a:spcAft>
+                <a:spcPts val="1000"/>
+              </a:spcAft>
+              <a:buSzPct val="100000"/>
+              <a:buFont typeface="+mj-lt"/>
+              <a:buAutoNum type="arabicPeriod" startAt="1"/>
+            </a:pPr>
+            <a:r>
+              <a:rPr lang="en-US" sz="1600" dirty="0">
+                <a:solidFill>
+                  <a:schemeClr val="bg1"/>
+                </a:solidFill>
+              </a:rPr>
+              <a:t>개발 기간과 개발비 (B안은 VCM 카메라 모듈 포함)</a:t>
+            </a:r>
+            <a:endParaRPr lang="en-US" sz="1600" dirty="0"/>
+          </a:p>
+          <a:p>
+            <a:pPr marL="342900" indent="-342900">
+              <a:spcAft>
+                <a:spcPts val="1000"/>
+              </a:spcAft>
+              <a:buSzPct val="100000"/>
+              <a:buFont typeface="+mj-lt"/>
+              <a:buAutoNum type="arabicPeriod" startAt="1"/>
+            </a:pPr>
+            <a:r>
+              <a:rPr lang="en-US" sz="1600" dirty="0">
+                <a:solidFill>
+                  <a:schemeClr val="bg1"/>
+                </a:solidFill>
+              </a:rPr>
+              <a:t>귀사가 추천하는 방식과 그 이유</a:t>
+            </a:r>
+            <a:endParaRPr lang="en-US" sz="1600" dirty="0"/>
+          </a:p>
+        </p:txBody>
+      </p:sp>
+      <p:sp>
+        <p:nvSpPr>
+          <p:cNvPr id="4" name="end-ring0"/>
+          <p:cNvSpPr/>
+          <p:nvPr/>
+        </p:nvSpPr>
+        <p:spPr>
+          <a:xfrm>
+            <a:off x="7132320" y="2148840"/>
+            <a:ext cx="1554480" cy="1554480"/>
+          </a:xfrm>
+          <a:prstGeom prst="ellipse">
+            <a:avLst/>
+          </a:prstGeom>
+          <a:ln w="31750">
+            <a:solidFill>
+              <a:srgbClr val="BFD7DE"/>
+            </a:solidFill>
+            <a:prstDash val="solid"/>
+          </a:ln>
+        </p:spPr>
+      </p:sp>
+      <p:sp>
+        <p:nvSpPr>
+          <p:cNvPr id="5" name="end-ring1"/>
+          <p:cNvSpPr/>
+          <p:nvPr/>
+        </p:nvSpPr>
+        <p:spPr>
+          <a:xfrm>
+            <a:off x="7349947" y="2366467"/>
+            <a:ext cx="1119226" cy="1119226"/>
+          </a:xfrm>
+          <a:prstGeom prst="ellipse">
+            <a:avLst/>
+          </a:prstGeom>
+          <a:ln w="25400">
+            <a:solidFill>
+              <a:srgbClr val="BFD7DE"/>
+            </a:solidFill>
+            <a:prstDash val="solid"/>
+          </a:ln>
+        </p:spPr>
+      </p:sp>
+      <p:sp>
+        <p:nvSpPr>
+          <p:cNvPr id="6" name="end-ring2"/>
+          <p:cNvSpPr/>
+          <p:nvPr/>
+        </p:nvSpPr>
+        <p:spPr>
+          <a:xfrm>
+            <a:off x="7567574" y="2584094"/>
+            <a:ext cx="683971" cy="683971"/>
+          </a:xfrm>
+          <a:prstGeom prst="ellipse">
+            <a:avLst/>
+          </a:prstGeom>
+          <a:ln w="19050">
+            <a:solidFill>
+              <a:srgbClr val="BFD7DE"/>
+            </a:solidFill>
+            <a:prstDash val="solid"/>
+          </a:ln>
         </p:spPr>
       </p:sp>
     </p:spTree>
@@ -2166,12 +2615,12 @@
         </p:nvSpPr>
         <p:spPr>
           <a:xfrm>
-            <a:off x="457200" y="1143000"/>
-            <a:ext cx="2560320" cy="1737360"/>
+            <a:off x="457200" y="1051560"/>
+            <a:ext cx="2560320" cy="1554480"/>
           </a:xfrm>
           <a:prstGeom prst="roundRect">
             <a:avLst>
-              <a:gd name="adj" fmla="val 6316"/>
+              <a:gd name="adj" fmla="val 7059"/>
             </a:avLst>
           </a:prstGeom>
           <a:solidFill>
@@ -2188,8 +2637,8 @@
         </p:nvSpPr>
         <p:spPr>
           <a:xfrm>
-            <a:off x="640080" y="1325880"/>
-            <a:ext cx="2194560" cy="822960"/>
+            <a:off x="640080" y="1234440"/>
+            <a:ext cx="2194560" cy="731520"/>
           </a:xfrm>
           <a:prstGeom prst="rect">
             <a:avLst/>
@@ -2224,8 +2673,8 @@
         </p:nvSpPr>
         <p:spPr>
           <a:xfrm>
-            <a:off x="640080" y="2194560"/>
-            <a:ext cx="2194560" cy="502920"/>
+            <a:off x="640080" y="2011680"/>
+            <a:ext cx="2194560" cy="411480"/>
           </a:xfrm>
           <a:prstGeom prst="rect">
             <a:avLst/>
@@ -2260,12 +2709,12 @@
         </p:nvSpPr>
         <p:spPr>
           <a:xfrm>
-            <a:off x="3291840" y="1143000"/>
-            <a:ext cx="2560320" cy="1737360"/>
+            <a:off x="3291840" y="1051560"/>
+            <a:ext cx="2560320" cy="1554480"/>
           </a:xfrm>
           <a:prstGeom prst="roundRect">
             <a:avLst>
-              <a:gd name="adj" fmla="val 6316"/>
+              <a:gd name="adj" fmla="val 7059"/>
             </a:avLst>
           </a:prstGeom>
           <a:solidFill>
@@ -2282,8 +2731,8 @@
         </p:nvSpPr>
         <p:spPr>
           <a:xfrm>
-            <a:off x="3474720" y="1325880"/>
-            <a:ext cx="2194560" cy="822960"/>
+            <a:off x="3474720" y="1234440"/>
+            <a:ext cx="2194560" cy="731520"/>
           </a:xfrm>
           <a:prstGeom prst="rect">
             <a:avLst/>
@@ -2304,7 +2753,7 @@
                   <a:schemeClr val="tx2"/>
                 </a:solidFill>
               </a:rPr>
-              <a:t>20 mm</a:t>
+              <a:t>자동초점</a:t>
             </a:r>
             <a:endParaRPr lang="en-US" sz="2400" dirty="0"/>
           </a:p>
@@ -2318,8 +2767,8 @@
         </p:nvSpPr>
         <p:spPr>
           <a:xfrm>
-            <a:off x="3474720" y="2194560"/>
-            <a:ext cx="2194560" cy="502920"/>
+            <a:off x="3474720" y="2011680"/>
+            <a:ext cx="2194560" cy="411480"/>
           </a:xfrm>
           <a:prstGeom prst="rect">
             <a:avLst/>
@@ -2340,7 +2789,7 @@
                   <a:schemeClr val="accent5"/>
                 </a:solidFill>
               </a:rPr>
-              <a:t>작업거리 (렌즈~두피)</a:t>
+              <a:t>AF 필수 (두 방식 모두)</a:t>
             </a:r>
             <a:endParaRPr lang="en-US" sz="1300" dirty="0"/>
           </a:p>
@@ -2354,12 +2803,12 @@
         </p:nvSpPr>
         <p:spPr>
           <a:xfrm>
-            <a:off x="6126480" y="1143000"/>
-            <a:ext cx="2560320" cy="1737360"/>
+            <a:off x="6126480" y="1051560"/>
+            <a:ext cx="2560320" cy="1554480"/>
           </a:xfrm>
           <a:prstGeom prst="roundRect">
             <a:avLst>
-              <a:gd name="adj" fmla="val 6316"/>
+              <a:gd name="adj" fmla="val 7059"/>
             </a:avLst>
           </a:prstGeom>
           <a:solidFill>
@@ -2376,8 +2825,8 @@
         </p:nvSpPr>
         <p:spPr>
           <a:xfrm>
-            <a:off x="6309360" y="1325880"/>
-            <a:ext cx="2194560" cy="822960"/>
+            <a:off x="6309360" y="1234440"/>
+            <a:ext cx="2194560" cy="731520"/>
           </a:xfrm>
           <a:prstGeom prst="rect">
             <a:avLst/>
@@ -2412,8 +2861,8 @@
         </p:nvSpPr>
         <p:spPr>
           <a:xfrm>
-            <a:off x="6309360" y="2194560"/>
-            <a:ext cx="2194560" cy="502920"/>
+            <a:off x="6309360" y="2011680"/>
+            <a:ext cx="2194560" cy="411480"/>
           </a:xfrm>
           <a:prstGeom prst="rect">
             <a:avLst/>
@@ -2448,8 +2897,8 @@
         </p:nvSpPr>
         <p:spPr>
           <a:xfrm>
-            <a:off x="457200" y="3200400"/>
-            <a:ext cx="8229600" cy="1097280"/>
+            <a:off x="457200" y="2880360"/>
+            <a:ext cx="8229600" cy="1463040"/>
           </a:xfrm>
           <a:prstGeom prst="rect">
             <a:avLst/>
@@ -2458,12 +2907,12 @@
           <a:ln/>
         </p:spPr>
         <p:txBody>
-          <a:bodyPr wrap="square" lIns="0" tIns="0" rIns="0" bIns="0" rtlCol="0" anchor="ctr"/>
+          <a:bodyPr wrap="square" lIns="0" tIns="0" rIns="0" bIns="0" rtlCol="0" anchor="t"/>
           <a:lstStyle/>
           <a:p>
             <a:pPr indent="0" marL="0">
               <a:spcAft>
-                <a:spcPts val="600"/>
+                <a:spcPts val="800"/>
               </a:spcAft>
               <a:buNone/>
             </a:pPr>
@@ -2473,11 +2922,28 @@
                   <a:schemeClr val="tx1"/>
                 </a:solidFill>
               </a:rPr>
-              <a:t>방식: </a:t>
+              <a:t>두 가지 개발 방식으로 각각 검토와 견적을 요청드립니다.</a:t>
+            </a:r>
+            <a:endParaRPr lang="en-US" sz="1500" dirty="0"/>
+          </a:p>
+          <a:p>
+            <a:pPr indent="0" marL="0">
+              <a:spcAft>
+                <a:spcPts val="800"/>
+              </a:spcAft>
+              <a:buNone/>
+            </a:pPr>
+            <a:r>
+              <a:rPr lang="en-US" sz="1500" b="1" dirty="0">
+                <a:solidFill>
+                  <a:schemeClr val="accent2"/>
+                </a:solidFill>
+              </a:rPr>
+              <a:t>A안 덧대기: </a:t>
             </a:r>
             <a:pPr indent="0" marL="0">
               <a:spcAft>
-                <a:spcPts val="600"/>
+                <a:spcPts val="800"/>
               </a:spcAft>
               <a:buNone/>
             </a:pPr>
@@ -2487,28 +2953,28 @@
                   <a:schemeClr val="tx1"/>
                 </a:solidFill>
               </a:rPr>
-              <a:t>원래 렌즈를 대체해 센서에 직접 결상하는 교체형 접사 렌즈 (경쟁사 제품과 같은 방식)</a:t>
+              <a:t>기존 IMX708 AF 모듈 앞에 접사 렌즈를 덧대고, 모듈의 AF를 그대로 사용</a:t>
             </a:r>
             <a:endParaRPr lang="en-US" sz="1500" dirty="0"/>
           </a:p>
           <a:p>
             <a:pPr indent="0" marL="0">
               <a:spcAft>
-                <a:spcPts val="600"/>
+                <a:spcPts val="800"/>
               </a:spcAft>
               <a:buNone/>
             </a:pPr>
             <a:r>
               <a:rPr lang="en-US" sz="1500" b="1" dirty="0">
                 <a:solidFill>
-                  <a:schemeClr val="tx1"/>
+                  <a:schemeClr val="accent4"/>
                 </a:solidFill>
               </a:rPr>
-              <a:t>견적: </a:t>
+              <a:t>B안 렌즈 교체: </a:t>
             </a:r>
             <a:pPr indent="0" marL="0">
               <a:spcAft>
-                <a:spcPts val="600"/>
+                <a:spcPts val="800"/>
               </a:spcAft>
               <a:buNone/>
             </a:pPr>
@@ -2518,7 +2984,7 @@
                   <a:schemeClr val="tx1"/>
                 </a:solidFill>
               </a:rPr>
-              <a:t>① VCM 자동초점(AF) 포함  ② 고정 초점 — 두 가지 모두 요청</a:t>
+              <a:t>원래 렌즈를 빼고 맞춤 접사 렌즈 + VCM으로 카메라 모듈을 새로 구성</a:t>
             </a:r>
             <a:endParaRPr lang="en-US" sz="1500" dirty="0"/>
           </a:p>
@@ -3731,7 +4197,7 @@
                             <a:schemeClr val="tx2"/>
                           </a:solidFill>
                         </a:rPr>
-                        <a:t>참고 모듈</a:t>
+                        <a:t>A안 기준 모듈</a:t>
                       </a:r>
                       <a:endParaRPr lang="en-US" sz="1300" dirty="0"/>
                     </a:p>
@@ -3792,7 +4258,7 @@
                             <a:schemeClr val="tx1"/>
                           </a:solidFill>
                         </a:rPr>
-                        <a:t>Raspberry Pi Camera Module 3</a:t>
+                        <a:t>Camera Module 3 표준형 (75°)</a:t>
                       </a:r>
                       <a:endParaRPr lang="en-US" sz="1300" dirty="0"/>
                     </a:p>
@@ -3988,7 +4454,7 @@
         <p:spPr>
           <a:xfrm>
             <a:off x="5669280" y="3298432"/>
-            <a:ext cx="3017520" cy="822960"/>
+            <a:ext cx="3017520" cy="914400"/>
           </a:xfrm>
           <a:prstGeom prst="rect">
             <a:avLst/>
@@ -4009,7 +4475,7 @@
                   <a:schemeClr val="tx1"/>
                 </a:solidFill>
               </a:rPr>
-              <a:t>두피 6.0 × 6.0 mm가 센서 세로 3.63 mm에 맺히도록 설계하고, 가운데 정사각형을 잘라 사용</a:t>
+              <a:t>두피 6.0 × 6.0 mm가 센서 세로 3.63 mm에 맺히도록 설계하고, 가운데 정사각형을 잘라 사용 (A·B안 공통)</a:t>
             </a:r>
             <a:endParaRPr lang="en-US" sz="1200" dirty="0"/>
           </a:p>
@@ -4117,15 +4583,2420 @@
                   <a:schemeClr val="tx2"/>
                 </a:solidFill>
               </a:rPr>
-              <a:t>광학 배치와 계산값</a:t>
+              <a:t>두 가지 개발 방식 비교</a:t>
             </a:r>
             <a:endParaRPr lang="en-US" sz="2600" dirty="0"/>
           </a:p>
         </p:txBody>
       </p:sp>
-      <p:sp>
-        <p:nvSpPr>
-          <p:cNvPr id="3" name="scalp"/>
+      <p:graphicFrame>
+        <p:nvGraphicFramePr>
+          <p:cNvPr id="6" name="compare-table"/>
+          <p:cNvGraphicFramePr>
+            <a:graphicFrameLocks noGrp="1"/>
+          </p:cNvGraphicFramePr>
+          <p:nvPr>
+            <p:extLst>
+              <p:ext uri="{D42A27DB-BD31-4B8C-83A1-F6EECF244321}">
+                <p14:modId xmlns:p14="http://schemas.microsoft.com/office/powerpoint/2010/main" val="1579011935"/>
+              </p:ext>
+            </p:extLst>
+          </p:nvPr>
+        </p:nvGraphicFramePr>
+        <p:xfrm>
+          <a:off x="457200" y="960120"/>
+          <a:ext cx="8229600" cy="914400"/>
+        </p:xfrm>
+        <a:graphic>
+          <a:graphicData uri="http://schemas.openxmlformats.org/drawingml/2006/table">
+            <a:tbl>
+              <a:tblPr/>
+              <a:tblGrid>
+                <a:gridCol w="2011680"/>
+                <a:gridCol w="3108960"/>
+                <a:gridCol w="3108960"/>
+              </a:tblGrid>
+              <a:tr h="402336">
+                <a:tc>
+                  <a:txBody>
+                    <a:bodyPr/>
+                    <a:lstStyle/>
+                    <a:p>
+                      <a:pPr indent="0" marL="0">
+                        <a:buNone/>
+                      </a:pPr>
+                      <a:endParaRPr lang="en-US" sz="1300" dirty="0"/>
+                    </a:p>
+                  </a:txBody>
+                  <a:tcPr marL="91440" marR="91440" marT="45720" marB="45720" anchor="ctr">
+                    <a:lnL w="9525" cap="flat" cmpd="sng" algn="ctr">
+                      <a:solidFill>
+                        <a:srgbClr val="BFD7DE"/>
+                      </a:solidFill>
+                      <a:prstDash val="solid"/>
+                      <a:round/>
+                      <a:headEnd type="none" w="med" len="med"/>
+                      <a:tailEnd type="none" w="med" len="med"/>
+                    </a:lnL>
+                    <a:lnR w="9525" cap="flat" cmpd="sng" algn="ctr">
+                      <a:solidFill>
+                        <a:srgbClr val="BFD7DE"/>
+                      </a:solidFill>
+                      <a:prstDash val="solid"/>
+                      <a:round/>
+                      <a:headEnd type="none" w="med" len="med"/>
+                      <a:tailEnd type="none" w="med" len="med"/>
+                    </a:lnR>
+                    <a:lnT w="9525" cap="flat" cmpd="sng" algn="ctr">
+                      <a:solidFill>
+                        <a:srgbClr val="BFD7DE"/>
+                      </a:solidFill>
+                      <a:prstDash val="solid"/>
+                      <a:round/>
+                      <a:headEnd type="none" w="med" len="med"/>
+                      <a:tailEnd type="none" w="med" len="med"/>
+                    </a:lnT>
+                    <a:lnB w="9525" cap="flat" cmpd="sng" algn="ctr">
+                      <a:solidFill>
+                        <a:srgbClr val="BFD7DE"/>
+                      </a:solidFill>
+                      <a:prstDash val="solid"/>
+                      <a:round/>
+                      <a:headEnd type="none" w="med" len="med"/>
+                      <a:tailEnd type="none" w="med" len="med"/>
+                    </a:lnB>
+                    <a:solidFill>
+                      <a:schemeClr val="bg1"/>
+                    </a:solidFill>
+                  </a:tcPr>
+                </a:tc>
+                <a:tc>
+                  <a:txBody>
+                    <a:bodyPr/>
+                    <a:lstStyle/>
+                    <a:p>
+                      <a:pPr algn="ctr" indent="0" marL="0">
+                        <a:buNone/>
+                      </a:pPr>
+                      <a:r>
+                        <a:rPr lang="en-US" sz="1300" b="1" dirty="0">
+                          <a:solidFill>
+                            <a:schemeClr val="bg1"/>
+                          </a:solidFill>
+                        </a:rPr>
+                        <a:t>A안 덧대기</a:t>
+                      </a:r>
+                      <a:endParaRPr lang="en-US" sz="1300" dirty="0"/>
+                    </a:p>
+                  </a:txBody>
+                  <a:tcPr marL="91440" marR="91440" marT="45720" marB="45720" anchor="ctr">
+                    <a:lnL w="9525" cap="flat" cmpd="sng" algn="ctr">
+                      <a:solidFill>
+                        <a:srgbClr val="BFD7DE"/>
+                      </a:solidFill>
+                      <a:prstDash val="solid"/>
+                      <a:round/>
+                      <a:headEnd type="none" w="med" len="med"/>
+                      <a:tailEnd type="none" w="med" len="med"/>
+                    </a:lnL>
+                    <a:lnR w="9525" cap="flat" cmpd="sng" algn="ctr">
+                      <a:solidFill>
+                        <a:srgbClr val="BFD7DE"/>
+                      </a:solidFill>
+                      <a:prstDash val="solid"/>
+                      <a:round/>
+                      <a:headEnd type="none" w="med" len="med"/>
+                      <a:tailEnd type="none" w="med" len="med"/>
+                    </a:lnR>
+                    <a:lnT w="9525" cap="flat" cmpd="sng" algn="ctr">
+                      <a:solidFill>
+                        <a:srgbClr val="BFD7DE"/>
+                      </a:solidFill>
+                      <a:prstDash val="solid"/>
+                      <a:round/>
+                      <a:headEnd type="none" w="med" len="med"/>
+                      <a:tailEnd type="none" w="med" len="med"/>
+                    </a:lnT>
+                    <a:lnB w="9525" cap="flat" cmpd="sng" algn="ctr">
+                      <a:solidFill>
+                        <a:srgbClr val="BFD7DE"/>
+                      </a:solidFill>
+                      <a:prstDash val="solid"/>
+                      <a:round/>
+                      <a:headEnd type="none" w="med" len="med"/>
+                      <a:tailEnd type="none" w="med" len="med"/>
+                    </a:lnB>
+                    <a:solidFill>
+                      <a:schemeClr val="accent2"/>
+                    </a:solidFill>
+                  </a:tcPr>
+                </a:tc>
+                <a:tc>
+                  <a:txBody>
+                    <a:bodyPr/>
+                    <a:lstStyle/>
+                    <a:p>
+                      <a:pPr algn="ctr" indent="0" marL="0">
+                        <a:buNone/>
+                      </a:pPr>
+                      <a:r>
+                        <a:rPr lang="en-US" sz="1300" b="1" dirty="0">
+                          <a:solidFill>
+                            <a:schemeClr val="bg1"/>
+                          </a:solidFill>
+                        </a:rPr>
+                        <a:t>B안 렌즈 교체</a:t>
+                      </a:r>
+                      <a:endParaRPr lang="en-US" sz="1300" dirty="0"/>
+                    </a:p>
+                  </a:txBody>
+                  <a:tcPr marL="91440" marR="91440" marT="45720" marB="45720" anchor="ctr">
+                    <a:lnL w="9525" cap="flat" cmpd="sng" algn="ctr">
+                      <a:solidFill>
+                        <a:srgbClr val="BFD7DE"/>
+                      </a:solidFill>
+                      <a:prstDash val="solid"/>
+                      <a:round/>
+                      <a:headEnd type="none" w="med" len="med"/>
+                      <a:tailEnd type="none" w="med" len="med"/>
+                    </a:lnL>
+                    <a:lnR w="9525" cap="flat" cmpd="sng" algn="ctr">
+                      <a:solidFill>
+                        <a:srgbClr val="BFD7DE"/>
+                      </a:solidFill>
+                      <a:prstDash val="solid"/>
+                      <a:round/>
+                      <a:headEnd type="none" w="med" len="med"/>
+                      <a:tailEnd type="none" w="med" len="med"/>
+                    </a:lnR>
+                    <a:lnT w="9525" cap="flat" cmpd="sng" algn="ctr">
+                      <a:solidFill>
+                        <a:srgbClr val="BFD7DE"/>
+                      </a:solidFill>
+                      <a:prstDash val="solid"/>
+                      <a:round/>
+                      <a:headEnd type="none" w="med" len="med"/>
+                      <a:tailEnd type="none" w="med" len="med"/>
+                    </a:lnT>
+                    <a:lnB w="9525" cap="flat" cmpd="sng" algn="ctr">
+                      <a:solidFill>
+                        <a:srgbClr val="BFD7DE"/>
+                      </a:solidFill>
+                      <a:prstDash val="solid"/>
+                      <a:round/>
+                      <a:headEnd type="none" w="med" len="med"/>
+                      <a:tailEnd type="none" w="med" len="med"/>
+                    </a:lnB>
+                    <a:solidFill>
+                      <a:schemeClr val="accent4"/>
+                    </a:solidFill>
+                  </a:tcPr>
+                </a:tc>
+              </a:tr>
+              <a:tr h="402336">
+                <a:tc>
+                  <a:txBody>
+                    <a:bodyPr/>
+                    <a:lstStyle/>
+                    <a:p>
+                      <a:pPr indent="0" marL="0">
+                        <a:buNone/>
+                      </a:pPr>
+                      <a:r>
+                        <a:rPr lang="en-US" sz="1300" b="1" dirty="0">
+                          <a:solidFill>
+                            <a:schemeClr val="tx2"/>
+                          </a:solidFill>
+                        </a:rPr>
+                        <a:t>구성</a:t>
+                      </a:r>
+                      <a:endParaRPr lang="en-US" sz="1300" dirty="0"/>
+                    </a:p>
+                  </a:txBody>
+                  <a:tcPr marL="91440" marR="91440" marT="45720" marB="45720" anchor="ctr">
+                    <a:lnL w="9525" cap="flat" cmpd="sng" algn="ctr">
+                      <a:solidFill>
+                        <a:srgbClr val="BFD7DE"/>
+                      </a:solidFill>
+                      <a:prstDash val="solid"/>
+                      <a:round/>
+                      <a:headEnd type="none" w="med" len="med"/>
+                      <a:tailEnd type="none" w="med" len="med"/>
+                    </a:lnL>
+                    <a:lnR w="9525" cap="flat" cmpd="sng" algn="ctr">
+                      <a:solidFill>
+                        <a:srgbClr val="BFD7DE"/>
+                      </a:solidFill>
+                      <a:prstDash val="solid"/>
+                      <a:round/>
+                      <a:headEnd type="none" w="med" len="med"/>
+                      <a:tailEnd type="none" w="med" len="med"/>
+                    </a:lnR>
+                    <a:lnT w="9525" cap="flat" cmpd="sng" algn="ctr">
+                      <a:solidFill>
+                        <a:srgbClr val="BFD7DE"/>
+                      </a:solidFill>
+                      <a:prstDash val="solid"/>
+                      <a:round/>
+                      <a:headEnd type="none" w="med" len="med"/>
+                      <a:tailEnd type="none" w="med" len="med"/>
+                    </a:lnT>
+                    <a:lnB w="9525" cap="flat" cmpd="sng" algn="ctr">
+                      <a:solidFill>
+                        <a:srgbClr val="BFD7DE"/>
+                      </a:solidFill>
+                      <a:prstDash val="solid"/>
+                      <a:round/>
+                      <a:headEnd type="none" w="med" len="med"/>
+                      <a:tailEnd type="none" w="med" len="med"/>
+                    </a:lnB>
+                    <a:solidFill>
+                      <a:schemeClr val="bg2"/>
+                    </a:solidFill>
+                  </a:tcPr>
+                </a:tc>
+                <a:tc>
+                  <a:txBody>
+                    <a:bodyPr/>
+                    <a:lstStyle/>
+                    <a:p>
+                      <a:pPr indent="0" marL="0">
+                        <a:buNone/>
+                      </a:pPr>
+                      <a:r>
+                        <a:rPr lang="en-US" sz="1300" dirty="0">
+                          <a:solidFill>
+                            <a:schemeClr val="tx1"/>
+                          </a:solidFill>
+                        </a:rPr>
+                        <a:t>IMX708 AF 모듈 + 덧대는 접사 렌즈</a:t>
+                      </a:r>
+                      <a:endParaRPr lang="en-US" sz="1300" dirty="0"/>
+                    </a:p>
+                  </a:txBody>
+                  <a:tcPr marL="91440" marR="91440" marT="45720" marB="45720" anchor="ctr">
+                    <a:lnL w="9525" cap="flat" cmpd="sng" algn="ctr">
+                      <a:solidFill>
+                        <a:srgbClr val="BFD7DE"/>
+                      </a:solidFill>
+                      <a:prstDash val="solid"/>
+                      <a:round/>
+                      <a:headEnd type="none" w="med" len="med"/>
+                      <a:tailEnd type="none" w="med" len="med"/>
+                    </a:lnL>
+                    <a:lnR w="9525" cap="flat" cmpd="sng" algn="ctr">
+                      <a:solidFill>
+                        <a:srgbClr val="BFD7DE"/>
+                      </a:solidFill>
+                      <a:prstDash val="solid"/>
+                      <a:round/>
+                      <a:headEnd type="none" w="med" len="med"/>
+                      <a:tailEnd type="none" w="med" len="med"/>
+                    </a:lnR>
+                    <a:lnT w="9525" cap="flat" cmpd="sng" algn="ctr">
+                      <a:solidFill>
+                        <a:srgbClr val="BFD7DE"/>
+                      </a:solidFill>
+                      <a:prstDash val="solid"/>
+                      <a:round/>
+                      <a:headEnd type="none" w="med" len="med"/>
+                      <a:tailEnd type="none" w="med" len="med"/>
+                    </a:lnT>
+                    <a:lnB w="9525" cap="flat" cmpd="sng" algn="ctr">
+                      <a:solidFill>
+                        <a:srgbClr val="BFD7DE"/>
+                      </a:solidFill>
+                      <a:prstDash val="solid"/>
+                      <a:round/>
+                      <a:headEnd type="none" w="med" len="med"/>
+                      <a:tailEnd type="none" w="med" len="med"/>
+                    </a:lnB>
+                  </a:tcPr>
+                </a:tc>
+                <a:tc>
+                  <a:txBody>
+                    <a:bodyPr/>
+                    <a:lstStyle/>
+                    <a:p>
+                      <a:pPr indent="0" marL="0">
+                        <a:buNone/>
+                      </a:pPr>
+                      <a:r>
+                        <a:rPr lang="en-US" sz="1300" dirty="0">
+                          <a:solidFill>
+                            <a:schemeClr val="tx1"/>
+                          </a:solidFill>
+                        </a:rPr>
+                        <a:t>IMX708 + VCM + 맞춤 접사 렌즈</a:t>
+                      </a:r>
+                      <a:endParaRPr lang="en-US" sz="1300" dirty="0"/>
+                    </a:p>
+                  </a:txBody>
+                  <a:tcPr marL="91440" marR="91440" marT="45720" marB="45720" anchor="ctr">
+                    <a:lnL w="9525" cap="flat" cmpd="sng" algn="ctr">
+                      <a:solidFill>
+                        <a:srgbClr val="BFD7DE"/>
+                      </a:solidFill>
+                      <a:prstDash val="solid"/>
+                      <a:round/>
+                      <a:headEnd type="none" w="med" len="med"/>
+                      <a:tailEnd type="none" w="med" len="med"/>
+                    </a:lnL>
+                    <a:lnR w="9525" cap="flat" cmpd="sng" algn="ctr">
+                      <a:solidFill>
+                        <a:srgbClr val="BFD7DE"/>
+                      </a:solidFill>
+                      <a:prstDash val="solid"/>
+                      <a:round/>
+                      <a:headEnd type="none" w="med" len="med"/>
+                      <a:tailEnd type="none" w="med" len="med"/>
+                    </a:lnR>
+                    <a:lnT w="9525" cap="flat" cmpd="sng" algn="ctr">
+                      <a:solidFill>
+                        <a:srgbClr val="BFD7DE"/>
+                      </a:solidFill>
+                      <a:prstDash val="solid"/>
+                      <a:round/>
+                      <a:headEnd type="none" w="med" len="med"/>
+                      <a:tailEnd type="none" w="med" len="med"/>
+                    </a:lnT>
+                    <a:lnB w="9525" cap="flat" cmpd="sng" algn="ctr">
+                      <a:solidFill>
+                        <a:srgbClr val="BFD7DE"/>
+                      </a:solidFill>
+                      <a:prstDash val="solid"/>
+                      <a:round/>
+                      <a:headEnd type="none" w="med" len="med"/>
+                      <a:tailEnd type="none" w="med" len="med"/>
+                    </a:lnB>
+                  </a:tcPr>
+                </a:tc>
+              </a:tr>
+              <a:tr h="402336">
+                <a:tc>
+                  <a:txBody>
+                    <a:bodyPr/>
+                    <a:lstStyle/>
+                    <a:p>
+                      <a:pPr indent="0" marL="0">
+                        <a:buNone/>
+                      </a:pPr>
+                      <a:r>
+                        <a:rPr lang="en-US" sz="1300" b="1" dirty="0">
+                          <a:solidFill>
+                            <a:schemeClr val="tx2"/>
+                          </a:solidFill>
+                        </a:rPr>
+                        <a:t>자동초점</a:t>
+                      </a:r>
+                      <a:endParaRPr lang="en-US" sz="1300" dirty="0"/>
+                    </a:p>
+                  </a:txBody>
+                  <a:tcPr marL="91440" marR="91440" marT="45720" marB="45720" anchor="ctr">
+                    <a:lnL w="9525" cap="flat" cmpd="sng" algn="ctr">
+                      <a:solidFill>
+                        <a:srgbClr val="BFD7DE"/>
+                      </a:solidFill>
+                      <a:prstDash val="solid"/>
+                      <a:round/>
+                      <a:headEnd type="none" w="med" len="med"/>
+                      <a:tailEnd type="none" w="med" len="med"/>
+                    </a:lnL>
+                    <a:lnR w="9525" cap="flat" cmpd="sng" algn="ctr">
+                      <a:solidFill>
+                        <a:srgbClr val="BFD7DE"/>
+                      </a:solidFill>
+                      <a:prstDash val="solid"/>
+                      <a:round/>
+                      <a:headEnd type="none" w="med" len="med"/>
+                      <a:tailEnd type="none" w="med" len="med"/>
+                    </a:lnR>
+                    <a:lnT w="9525" cap="flat" cmpd="sng" algn="ctr">
+                      <a:solidFill>
+                        <a:srgbClr val="BFD7DE"/>
+                      </a:solidFill>
+                      <a:prstDash val="solid"/>
+                      <a:round/>
+                      <a:headEnd type="none" w="med" len="med"/>
+                      <a:tailEnd type="none" w="med" len="med"/>
+                    </a:lnT>
+                    <a:lnB w="9525" cap="flat" cmpd="sng" algn="ctr">
+                      <a:solidFill>
+                        <a:srgbClr val="BFD7DE"/>
+                      </a:solidFill>
+                      <a:prstDash val="solid"/>
+                      <a:round/>
+                      <a:headEnd type="none" w="med" len="med"/>
+                      <a:tailEnd type="none" w="med" len="med"/>
+                    </a:lnB>
+                    <a:solidFill>
+                      <a:schemeClr val="bg2"/>
+                    </a:solidFill>
+                  </a:tcPr>
+                </a:tc>
+                <a:tc>
+                  <a:txBody>
+                    <a:bodyPr/>
+                    <a:lstStyle/>
+                    <a:p>
+                      <a:pPr indent="0" marL="0">
+                        <a:buNone/>
+                      </a:pPr>
+                      <a:r>
+                        <a:rPr lang="en-US" sz="1300" dirty="0">
+                          <a:solidFill>
+                            <a:schemeClr val="tx1"/>
+                          </a:solidFill>
+                        </a:rPr>
+                        <a:t>기존 모듈의 VCM AF 그대로 사용</a:t>
+                      </a:r>
+                      <a:endParaRPr lang="en-US" sz="1300" dirty="0"/>
+                    </a:p>
+                  </a:txBody>
+                  <a:tcPr marL="91440" marR="91440" marT="45720" marB="45720" anchor="ctr">
+                    <a:lnL w="9525" cap="flat" cmpd="sng" algn="ctr">
+                      <a:solidFill>
+                        <a:srgbClr val="BFD7DE"/>
+                      </a:solidFill>
+                      <a:prstDash val="solid"/>
+                      <a:round/>
+                      <a:headEnd type="none" w="med" len="med"/>
+                      <a:tailEnd type="none" w="med" len="med"/>
+                    </a:lnL>
+                    <a:lnR w="9525" cap="flat" cmpd="sng" algn="ctr">
+                      <a:solidFill>
+                        <a:srgbClr val="BFD7DE"/>
+                      </a:solidFill>
+                      <a:prstDash val="solid"/>
+                      <a:round/>
+                      <a:headEnd type="none" w="med" len="med"/>
+                      <a:tailEnd type="none" w="med" len="med"/>
+                    </a:lnR>
+                    <a:lnT w="9525" cap="flat" cmpd="sng" algn="ctr">
+                      <a:solidFill>
+                        <a:srgbClr val="BFD7DE"/>
+                      </a:solidFill>
+                      <a:prstDash val="solid"/>
+                      <a:round/>
+                      <a:headEnd type="none" w="med" len="med"/>
+                      <a:tailEnd type="none" w="med" len="med"/>
+                    </a:lnT>
+                    <a:lnB w="9525" cap="flat" cmpd="sng" algn="ctr">
+                      <a:solidFill>
+                        <a:srgbClr val="BFD7DE"/>
+                      </a:solidFill>
+                      <a:prstDash val="solid"/>
+                      <a:round/>
+                      <a:headEnd type="none" w="med" len="med"/>
+                      <a:tailEnd type="none" w="med" len="med"/>
+                    </a:lnB>
+                  </a:tcPr>
+                </a:tc>
+                <a:tc>
+                  <a:txBody>
+                    <a:bodyPr/>
+                    <a:lstStyle/>
+                    <a:p>
+                      <a:pPr indent="0" marL="0">
+                        <a:buNone/>
+                      </a:pPr>
+                      <a:r>
+                        <a:rPr lang="en-US" sz="1300" dirty="0">
+                          <a:solidFill>
+                            <a:schemeClr val="tx1"/>
+                          </a:solidFill>
+                        </a:rPr>
+                        <a:t>새 VCM으로 AF (0.3 mm 이상)</a:t>
+                      </a:r>
+                      <a:endParaRPr lang="en-US" sz="1300" dirty="0"/>
+                    </a:p>
+                  </a:txBody>
+                  <a:tcPr marL="91440" marR="91440" marT="45720" marB="45720" anchor="ctr">
+                    <a:lnL w="9525" cap="flat" cmpd="sng" algn="ctr">
+                      <a:solidFill>
+                        <a:srgbClr val="BFD7DE"/>
+                      </a:solidFill>
+                      <a:prstDash val="solid"/>
+                      <a:round/>
+                      <a:headEnd type="none" w="med" len="med"/>
+                      <a:tailEnd type="none" w="med" len="med"/>
+                    </a:lnL>
+                    <a:lnR w="9525" cap="flat" cmpd="sng" algn="ctr">
+                      <a:solidFill>
+                        <a:srgbClr val="BFD7DE"/>
+                      </a:solidFill>
+                      <a:prstDash val="solid"/>
+                      <a:round/>
+                      <a:headEnd type="none" w="med" len="med"/>
+                      <a:tailEnd type="none" w="med" len="med"/>
+                    </a:lnR>
+                    <a:lnT w="9525" cap="flat" cmpd="sng" algn="ctr">
+                      <a:solidFill>
+                        <a:srgbClr val="BFD7DE"/>
+                      </a:solidFill>
+                      <a:prstDash val="solid"/>
+                      <a:round/>
+                      <a:headEnd type="none" w="med" len="med"/>
+                      <a:tailEnd type="none" w="med" len="med"/>
+                    </a:lnT>
+                    <a:lnB w="9525" cap="flat" cmpd="sng" algn="ctr">
+                      <a:solidFill>
+                        <a:srgbClr val="BFD7DE"/>
+                      </a:solidFill>
+                      <a:prstDash val="solid"/>
+                      <a:round/>
+                      <a:headEnd type="none" w="med" len="med"/>
+                      <a:tailEnd type="none" w="med" len="med"/>
+                    </a:lnB>
+                  </a:tcPr>
+                </a:tc>
+              </a:tr>
+              <a:tr h="402336">
+                <a:tc>
+                  <a:txBody>
+                    <a:bodyPr/>
+                    <a:lstStyle/>
+                    <a:p>
+                      <a:pPr indent="0" marL="0">
+                        <a:buNone/>
+                      </a:pPr>
+                      <a:r>
+                        <a:rPr lang="en-US" sz="1300" b="1" dirty="0">
+                          <a:solidFill>
+                            <a:schemeClr val="tx2"/>
+                          </a:solidFill>
+                        </a:rPr>
+                        <a:t>작업거리</a:t>
+                      </a:r>
+                      <a:endParaRPr lang="en-US" sz="1300" dirty="0"/>
+                    </a:p>
+                  </a:txBody>
+                  <a:tcPr marL="91440" marR="91440" marT="45720" marB="45720" anchor="ctr">
+                    <a:lnL w="9525" cap="flat" cmpd="sng" algn="ctr">
+                      <a:solidFill>
+                        <a:srgbClr val="BFD7DE"/>
+                      </a:solidFill>
+                      <a:prstDash val="solid"/>
+                      <a:round/>
+                      <a:headEnd type="none" w="med" len="med"/>
+                      <a:tailEnd type="none" w="med" len="med"/>
+                    </a:lnL>
+                    <a:lnR w="9525" cap="flat" cmpd="sng" algn="ctr">
+                      <a:solidFill>
+                        <a:srgbClr val="BFD7DE"/>
+                      </a:solidFill>
+                      <a:prstDash val="solid"/>
+                      <a:round/>
+                      <a:headEnd type="none" w="med" len="med"/>
+                      <a:tailEnd type="none" w="med" len="med"/>
+                    </a:lnR>
+                    <a:lnT w="9525" cap="flat" cmpd="sng" algn="ctr">
+                      <a:solidFill>
+                        <a:srgbClr val="BFD7DE"/>
+                      </a:solidFill>
+                      <a:prstDash val="solid"/>
+                      <a:round/>
+                      <a:headEnd type="none" w="med" len="med"/>
+                      <a:tailEnd type="none" w="med" len="med"/>
+                    </a:lnT>
+                    <a:lnB w="9525" cap="flat" cmpd="sng" algn="ctr">
+                      <a:solidFill>
+                        <a:srgbClr val="BFD7DE"/>
+                      </a:solidFill>
+                      <a:prstDash val="solid"/>
+                      <a:round/>
+                      <a:headEnd type="none" w="med" len="med"/>
+                      <a:tailEnd type="none" w="med" len="med"/>
+                    </a:lnB>
+                    <a:solidFill>
+                      <a:schemeClr val="bg2"/>
+                    </a:solidFill>
+                  </a:tcPr>
+                </a:tc>
+                <a:tc>
+                  <a:txBody>
+                    <a:bodyPr/>
+                    <a:lstStyle/>
+                    <a:p>
+                      <a:pPr indent="0" marL="0">
+                        <a:buNone/>
+                      </a:pPr>
+                      <a:r>
+                        <a:rPr lang="en-US" sz="1300" dirty="0">
+                          <a:solidFill>
+                            <a:schemeClr val="tx1"/>
+                          </a:solidFill>
+                        </a:rPr>
+                        <a:t>약 7–8 mm</a:t>
+                      </a:r>
+                      <a:endParaRPr lang="en-US" sz="1300" dirty="0"/>
+                    </a:p>
+                  </a:txBody>
+                  <a:tcPr marL="91440" marR="91440" marT="45720" marB="45720" anchor="ctr">
+                    <a:lnL w="9525" cap="flat" cmpd="sng" algn="ctr">
+                      <a:solidFill>
+                        <a:srgbClr val="BFD7DE"/>
+                      </a:solidFill>
+                      <a:prstDash val="solid"/>
+                      <a:round/>
+                      <a:headEnd type="none" w="med" len="med"/>
+                      <a:tailEnd type="none" w="med" len="med"/>
+                    </a:lnL>
+                    <a:lnR w="9525" cap="flat" cmpd="sng" algn="ctr">
+                      <a:solidFill>
+                        <a:srgbClr val="BFD7DE"/>
+                      </a:solidFill>
+                      <a:prstDash val="solid"/>
+                      <a:round/>
+                      <a:headEnd type="none" w="med" len="med"/>
+                      <a:tailEnd type="none" w="med" len="med"/>
+                    </a:lnR>
+                    <a:lnT w="9525" cap="flat" cmpd="sng" algn="ctr">
+                      <a:solidFill>
+                        <a:srgbClr val="BFD7DE"/>
+                      </a:solidFill>
+                      <a:prstDash val="solid"/>
+                      <a:round/>
+                      <a:headEnd type="none" w="med" len="med"/>
+                      <a:tailEnd type="none" w="med" len="med"/>
+                    </a:lnT>
+                    <a:lnB w="9525" cap="flat" cmpd="sng" algn="ctr">
+                      <a:solidFill>
+                        <a:srgbClr val="BFD7DE"/>
+                      </a:solidFill>
+                      <a:prstDash val="solid"/>
+                      <a:round/>
+                      <a:headEnd type="none" w="med" len="med"/>
+                      <a:tailEnd type="none" w="med" len="med"/>
+                    </a:lnB>
+                  </a:tcPr>
+                </a:tc>
+                <a:tc>
+                  <a:txBody>
+                    <a:bodyPr/>
+                    <a:lstStyle/>
+                    <a:p>
+                      <a:pPr indent="0" marL="0">
+                        <a:buNone/>
+                      </a:pPr>
+                      <a:r>
+                        <a:rPr lang="en-US" sz="1300" dirty="0">
+                          <a:solidFill>
+                            <a:schemeClr val="tx1"/>
+                          </a:solidFill>
+                        </a:rPr>
+                        <a:t>20 mm</a:t>
+                      </a:r>
+                      <a:endParaRPr lang="en-US" sz="1300" dirty="0"/>
+                    </a:p>
+                  </a:txBody>
+                  <a:tcPr marL="91440" marR="91440" marT="45720" marB="45720" anchor="ctr">
+                    <a:lnL w="9525" cap="flat" cmpd="sng" algn="ctr">
+                      <a:solidFill>
+                        <a:srgbClr val="BFD7DE"/>
+                      </a:solidFill>
+                      <a:prstDash val="solid"/>
+                      <a:round/>
+                      <a:headEnd type="none" w="med" len="med"/>
+                      <a:tailEnd type="none" w="med" len="med"/>
+                    </a:lnL>
+                    <a:lnR w="9525" cap="flat" cmpd="sng" algn="ctr">
+                      <a:solidFill>
+                        <a:srgbClr val="BFD7DE"/>
+                      </a:solidFill>
+                      <a:prstDash val="solid"/>
+                      <a:round/>
+                      <a:headEnd type="none" w="med" len="med"/>
+                      <a:tailEnd type="none" w="med" len="med"/>
+                    </a:lnR>
+                    <a:lnT w="9525" cap="flat" cmpd="sng" algn="ctr">
+                      <a:solidFill>
+                        <a:srgbClr val="BFD7DE"/>
+                      </a:solidFill>
+                      <a:prstDash val="solid"/>
+                      <a:round/>
+                      <a:headEnd type="none" w="med" len="med"/>
+                      <a:tailEnd type="none" w="med" len="med"/>
+                    </a:lnT>
+                    <a:lnB w="9525" cap="flat" cmpd="sng" algn="ctr">
+                      <a:solidFill>
+                        <a:srgbClr val="BFD7DE"/>
+                      </a:solidFill>
+                      <a:prstDash val="solid"/>
+                      <a:round/>
+                      <a:headEnd type="none" w="med" len="med"/>
+                      <a:tailEnd type="none" w="med" len="med"/>
+                    </a:lnB>
+                  </a:tcPr>
+                </a:tc>
+              </a:tr>
+              <a:tr h="402336">
+                <a:tc>
+                  <a:txBody>
+                    <a:bodyPr/>
+                    <a:lstStyle/>
+                    <a:p>
+                      <a:pPr indent="0" marL="0">
+                        <a:buNone/>
+                      </a:pPr>
+                      <a:r>
+                        <a:rPr lang="en-US" sz="1300" b="1" dirty="0">
+                          <a:solidFill>
+                            <a:schemeClr val="tx2"/>
+                          </a:solidFill>
+                        </a:rPr>
+                        <a:t>렌즈 초점거리(추정)</a:t>
+                      </a:r>
+                      <a:endParaRPr lang="en-US" sz="1300" dirty="0"/>
+                    </a:p>
+                  </a:txBody>
+                  <a:tcPr marL="91440" marR="91440" marT="45720" marB="45720" anchor="ctr">
+                    <a:lnL w="9525" cap="flat" cmpd="sng" algn="ctr">
+                      <a:solidFill>
+                        <a:srgbClr val="BFD7DE"/>
+                      </a:solidFill>
+                      <a:prstDash val="solid"/>
+                      <a:round/>
+                      <a:headEnd type="none" w="med" len="med"/>
+                      <a:tailEnd type="none" w="med" len="med"/>
+                    </a:lnL>
+                    <a:lnR w="9525" cap="flat" cmpd="sng" algn="ctr">
+                      <a:solidFill>
+                        <a:srgbClr val="BFD7DE"/>
+                      </a:solidFill>
+                      <a:prstDash val="solid"/>
+                      <a:round/>
+                      <a:headEnd type="none" w="med" len="med"/>
+                      <a:tailEnd type="none" w="med" len="med"/>
+                    </a:lnR>
+                    <a:lnT w="9525" cap="flat" cmpd="sng" algn="ctr">
+                      <a:solidFill>
+                        <a:srgbClr val="BFD7DE"/>
+                      </a:solidFill>
+                      <a:prstDash val="solid"/>
+                      <a:round/>
+                      <a:headEnd type="none" w="med" len="med"/>
+                      <a:tailEnd type="none" w="med" len="med"/>
+                    </a:lnT>
+                    <a:lnB w="9525" cap="flat" cmpd="sng" algn="ctr">
+                      <a:solidFill>
+                        <a:srgbClr val="BFD7DE"/>
+                      </a:solidFill>
+                      <a:prstDash val="solid"/>
+                      <a:round/>
+                      <a:headEnd type="none" w="med" len="med"/>
+                      <a:tailEnd type="none" w="med" len="med"/>
+                    </a:lnB>
+                    <a:solidFill>
+                      <a:schemeClr val="bg2"/>
+                    </a:solidFill>
+                  </a:tcPr>
+                </a:tc>
+                <a:tc>
+                  <a:txBody>
+                    <a:bodyPr/>
+                    <a:lstStyle/>
+                    <a:p>
+                      <a:pPr indent="0" marL="0">
+                        <a:buNone/>
+                      </a:pPr>
+                      <a:r>
+                        <a:rPr lang="en-US" sz="1300" dirty="0">
+                          <a:solidFill>
+                            <a:schemeClr val="tx1"/>
+                          </a:solidFill>
+                        </a:rPr>
+                        <a:t>약 7.8 mm (덧대는 렌즈)</a:t>
+                      </a:r>
+                      <a:endParaRPr lang="en-US" sz="1300" dirty="0"/>
+                    </a:p>
+                  </a:txBody>
+                  <a:tcPr marL="91440" marR="91440" marT="45720" marB="45720" anchor="ctr">
+                    <a:lnL w="9525" cap="flat" cmpd="sng" algn="ctr">
+                      <a:solidFill>
+                        <a:srgbClr val="BFD7DE"/>
+                      </a:solidFill>
+                      <a:prstDash val="solid"/>
+                      <a:round/>
+                      <a:headEnd type="none" w="med" len="med"/>
+                      <a:tailEnd type="none" w="med" len="med"/>
+                    </a:lnL>
+                    <a:lnR w="9525" cap="flat" cmpd="sng" algn="ctr">
+                      <a:solidFill>
+                        <a:srgbClr val="BFD7DE"/>
+                      </a:solidFill>
+                      <a:prstDash val="solid"/>
+                      <a:round/>
+                      <a:headEnd type="none" w="med" len="med"/>
+                      <a:tailEnd type="none" w="med" len="med"/>
+                    </a:lnR>
+                    <a:lnT w="9525" cap="flat" cmpd="sng" algn="ctr">
+                      <a:solidFill>
+                        <a:srgbClr val="BFD7DE"/>
+                      </a:solidFill>
+                      <a:prstDash val="solid"/>
+                      <a:round/>
+                      <a:headEnd type="none" w="med" len="med"/>
+                      <a:tailEnd type="none" w="med" len="med"/>
+                    </a:lnT>
+                    <a:lnB w="9525" cap="flat" cmpd="sng" algn="ctr">
+                      <a:solidFill>
+                        <a:srgbClr val="BFD7DE"/>
+                      </a:solidFill>
+                      <a:prstDash val="solid"/>
+                      <a:round/>
+                      <a:headEnd type="none" w="med" len="med"/>
+                      <a:tailEnd type="none" w="med" len="med"/>
+                    </a:lnB>
+                  </a:tcPr>
+                </a:tc>
+                <a:tc>
+                  <a:txBody>
+                    <a:bodyPr/>
+                    <a:lstStyle/>
+                    <a:p>
+                      <a:pPr indent="0" marL="0">
+                        <a:buNone/>
+                      </a:pPr>
+                      <a:r>
+                        <a:rPr lang="en-US" sz="1300" dirty="0">
+                          <a:solidFill>
+                            <a:schemeClr val="tx1"/>
+                          </a:solidFill>
+                        </a:rPr>
+                        <a:t>약 7.5 mm</a:t>
+                      </a:r>
+                      <a:endParaRPr lang="en-US" sz="1300" dirty="0"/>
+                    </a:p>
+                  </a:txBody>
+                  <a:tcPr marL="91440" marR="91440" marT="45720" marB="45720" anchor="ctr">
+                    <a:lnL w="9525" cap="flat" cmpd="sng" algn="ctr">
+                      <a:solidFill>
+                        <a:srgbClr val="BFD7DE"/>
+                      </a:solidFill>
+                      <a:prstDash val="solid"/>
+                      <a:round/>
+                      <a:headEnd type="none" w="med" len="med"/>
+                      <a:tailEnd type="none" w="med" len="med"/>
+                    </a:lnL>
+                    <a:lnR w="9525" cap="flat" cmpd="sng" algn="ctr">
+                      <a:solidFill>
+                        <a:srgbClr val="BFD7DE"/>
+                      </a:solidFill>
+                      <a:prstDash val="solid"/>
+                      <a:round/>
+                      <a:headEnd type="none" w="med" len="med"/>
+                      <a:tailEnd type="none" w="med" len="med"/>
+                    </a:lnR>
+                    <a:lnT w="9525" cap="flat" cmpd="sng" algn="ctr">
+                      <a:solidFill>
+                        <a:srgbClr val="BFD7DE"/>
+                      </a:solidFill>
+                      <a:prstDash val="solid"/>
+                      <a:round/>
+                      <a:headEnd type="none" w="med" len="med"/>
+                      <a:tailEnd type="none" w="med" len="med"/>
+                    </a:lnT>
+                    <a:lnB w="9525" cap="flat" cmpd="sng" algn="ctr">
+                      <a:solidFill>
+                        <a:srgbClr val="BFD7DE"/>
+                      </a:solidFill>
+                      <a:prstDash val="solid"/>
+                      <a:round/>
+                      <a:headEnd type="none" w="med" len="med"/>
+                      <a:tailEnd type="none" w="med" len="med"/>
+                    </a:lnB>
+                  </a:tcPr>
+                </a:tc>
+              </a:tr>
+              <a:tr h="402336">
+                <a:tc>
+                  <a:txBody>
+                    <a:bodyPr/>
+                    <a:lstStyle/>
+                    <a:p>
+                      <a:pPr indent="0" marL="0">
+                        <a:buNone/>
+                      </a:pPr>
+                      <a:r>
+                        <a:rPr lang="en-US" sz="1300" b="1" dirty="0">
+                          <a:solidFill>
+                            <a:schemeClr val="tx2"/>
+                          </a:solidFill>
+                        </a:rPr>
+                        <a:t>장점</a:t>
+                      </a:r>
+                      <a:endParaRPr lang="en-US" sz="1300" dirty="0"/>
+                    </a:p>
+                  </a:txBody>
+                  <a:tcPr marL="91440" marR="91440" marT="45720" marB="45720" anchor="ctr">
+                    <a:lnL w="9525" cap="flat" cmpd="sng" algn="ctr">
+                      <a:solidFill>
+                        <a:srgbClr val="BFD7DE"/>
+                      </a:solidFill>
+                      <a:prstDash val="solid"/>
+                      <a:round/>
+                      <a:headEnd type="none" w="med" len="med"/>
+                      <a:tailEnd type="none" w="med" len="med"/>
+                    </a:lnL>
+                    <a:lnR w="9525" cap="flat" cmpd="sng" algn="ctr">
+                      <a:solidFill>
+                        <a:srgbClr val="BFD7DE"/>
+                      </a:solidFill>
+                      <a:prstDash val="solid"/>
+                      <a:round/>
+                      <a:headEnd type="none" w="med" len="med"/>
+                      <a:tailEnd type="none" w="med" len="med"/>
+                    </a:lnR>
+                    <a:lnT w="9525" cap="flat" cmpd="sng" algn="ctr">
+                      <a:solidFill>
+                        <a:srgbClr val="BFD7DE"/>
+                      </a:solidFill>
+                      <a:prstDash val="solid"/>
+                      <a:round/>
+                      <a:headEnd type="none" w="med" len="med"/>
+                      <a:tailEnd type="none" w="med" len="med"/>
+                    </a:lnT>
+                    <a:lnB w="9525" cap="flat" cmpd="sng" algn="ctr">
+                      <a:solidFill>
+                        <a:srgbClr val="BFD7DE"/>
+                      </a:solidFill>
+                      <a:prstDash val="solid"/>
+                      <a:round/>
+                      <a:headEnd type="none" w="med" len="med"/>
+                      <a:tailEnd type="none" w="med" len="med"/>
+                    </a:lnB>
+                    <a:solidFill>
+                      <a:schemeClr val="bg2"/>
+                    </a:solidFill>
+                  </a:tcPr>
+                </a:tc>
+                <a:tc>
+                  <a:txBody>
+                    <a:bodyPr/>
+                    <a:lstStyle/>
+                    <a:p>
+                      <a:pPr indent="0" marL="0">
+                        <a:buNone/>
+                      </a:pPr>
+                      <a:r>
+                        <a:rPr lang="en-US" sz="1300" dirty="0">
+                          <a:solidFill>
+                            <a:schemeClr val="tx1"/>
+                          </a:solidFill>
+                        </a:rPr>
+                        <a:t>기존 모듈 사용, 개발 빠름</a:t>
+                      </a:r>
+                      <a:endParaRPr lang="en-US" sz="1300" dirty="0"/>
+                    </a:p>
+                  </a:txBody>
+                  <a:tcPr marL="91440" marR="91440" marT="45720" marB="45720" anchor="ctr">
+                    <a:lnL w="9525" cap="flat" cmpd="sng" algn="ctr">
+                      <a:solidFill>
+                        <a:srgbClr val="BFD7DE"/>
+                      </a:solidFill>
+                      <a:prstDash val="solid"/>
+                      <a:round/>
+                      <a:headEnd type="none" w="med" len="med"/>
+                      <a:tailEnd type="none" w="med" len="med"/>
+                    </a:lnL>
+                    <a:lnR w="9525" cap="flat" cmpd="sng" algn="ctr">
+                      <a:solidFill>
+                        <a:srgbClr val="BFD7DE"/>
+                      </a:solidFill>
+                      <a:prstDash val="solid"/>
+                      <a:round/>
+                      <a:headEnd type="none" w="med" len="med"/>
+                      <a:tailEnd type="none" w="med" len="med"/>
+                    </a:lnR>
+                    <a:lnT w="9525" cap="flat" cmpd="sng" algn="ctr">
+                      <a:solidFill>
+                        <a:srgbClr val="BFD7DE"/>
+                      </a:solidFill>
+                      <a:prstDash val="solid"/>
+                      <a:round/>
+                      <a:headEnd type="none" w="med" len="med"/>
+                      <a:tailEnd type="none" w="med" len="med"/>
+                    </a:lnT>
+                    <a:lnB w="9525" cap="flat" cmpd="sng" algn="ctr">
+                      <a:solidFill>
+                        <a:srgbClr val="BFD7DE"/>
+                      </a:solidFill>
+                      <a:prstDash val="solid"/>
+                      <a:round/>
+                      <a:headEnd type="none" w="med" len="med"/>
+                      <a:tailEnd type="none" w="med" len="med"/>
+                    </a:lnB>
+                  </a:tcPr>
+                </a:tc>
+                <a:tc>
+                  <a:txBody>
+                    <a:bodyPr/>
+                    <a:lstStyle/>
+                    <a:p>
+                      <a:pPr indent="0" marL="0">
+                        <a:buNone/>
+                      </a:pPr>
+                      <a:r>
+                        <a:rPr lang="en-US" sz="1300" dirty="0">
+                          <a:solidFill>
+                            <a:schemeClr val="tx1"/>
+                          </a:solidFill>
+                        </a:rPr>
+                        <a:t>작업거리 길어 조명 배치 쉬움</a:t>
+                      </a:r>
+                      <a:endParaRPr lang="en-US" sz="1300" dirty="0"/>
+                    </a:p>
+                  </a:txBody>
+                  <a:tcPr marL="91440" marR="91440" marT="45720" marB="45720" anchor="ctr">
+                    <a:lnL w="9525" cap="flat" cmpd="sng" algn="ctr">
+                      <a:solidFill>
+                        <a:srgbClr val="BFD7DE"/>
+                      </a:solidFill>
+                      <a:prstDash val="solid"/>
+                      <a:round/>
+                      <a:headEnd type="none" w="med" len="med"/>
+                      <a:tailEnd type="none" w="med" len="med"/>
+                    </a:lnL>
+                    <a:lnR w="9525" cap="flat" cmpd="sng" algn="ctr">
+                      <a:solidFill>
+                        <a:srgbClr val="BFD7DE"/>
+                      </a:solidFill>
+                      <a:prstDash val="solid"/>
+                      <a:round/>
+                      <a:headEnd type="none" w="med" len="med"/>
+                      <a:tailEnd type="none" w="med" len="med"/>
+                    </a:lnR>
+                    <a:lnT w="9525" cap="flat" cmpd="sng" algn="ctr">
+                      <a:solidFill>
+                        <a:srgbClr val="BFD7DE"/>
+                      </a:solidFill>
+                      <a:prstDash val="solid"/>
+                      <a:round/>
+                      <a:headEnd type="none" w="med" len="med"/>
+                      <a:tailEnd type="none" w="med" len="med"/>
+                    </a:lnT>
+                    <a:lnB w="9525" cap="flat" cmpd="sng" algn="ctr">
+                      <a:solidFill>
+                        <a:srgbClr val="BFD7DE"/>
+                      </a:solidFill>
+                      <a:prstDash val="solid"/>
+                      <a:round/>
+                      <a:headEnd type="none" w="med" len="med"/>
+                      <a:tailEnd type="none" w="med" len="med"/>
+                    </a:lnB>
+                  </a:tcPr>
+                </a:tc>
+              </a:tr>
+              <a:tr h="402336">
+                <a:tc>
+                  <a:txBody>
+                    <a:bodyPr/>
+                    <a:lstStyle/>
+                    <a:p>
+                      <a:pPr indent="0" marL="0">
+                        <a:buNone/>
+                      </a:pPr>
+                      <a:r>
+                        <a:rPr lang="en-US" sz="1300" b="1" dirty="0">
+                          <a:solidFill>
+                            <a:schemeClr val="tx2"/>
+                          </a:solidFill>
+                        </a:rPr>
+                        <a:t>과제</a:t>
+                      </a:r>
+                      <a:endParaRPr lang="en-US" sz="1300" dirty="0"/>
+                    </a:p>
+                  </a:txBody>
+                  <a:tcPr marL="91440" marR="91440" marT="45720" marB="45720" anchor="ctr">
+                    <a:lnL w="9525" cap="flat" cmpd="sng" algn="ctr">
+                      <a:solidFill>
+                        <a:srgbClr val="BFD7DE"/>
+                      </a:solidFill>
+                      <a:prstDash val="solid"/>
+                      <a:round/>
+                      <a:headEnd type="none" w="med" len="med"/>
+                      <a:tailEnd type="none" w="med" len="med"/>
+                    </a:lnL>
+                    <a:lnR w="9525" cap="flat" cmpd="sng" algn="ctr">
+                      <a:solidFill>
+                        <a:srgbClr val="BFD7DE"/>
+                      </a:solidFill>
+                      <a:prstDash val="solid"/>
+                      <a:round/>
+                      <a:headEnd type="none" w="med" len="med"/>
+                      <a:tailEnd type="none" w="med" len="med"/>
+                    </a:lnR>
+                    <a:lnT w="9525" cap="flat" cmpd="sng" algn="ctr">
+                      <a:solidFill>
+                        <a:srgbClr val="BFD7DE"/>
+                      </a:solidFill>
+                      <a:prstDash val="solid"/>
+                      <a:round/>
+                      <a:headEnd type="none" w="med" len="med"/>
+                      <a:tailEnd type="none" w="med" len="med"/>
+                    </a:lnT>
+                    <a:lnB w="9525" cap="flat" cmpd="sng" algn="ctr">
+                      <a:solidFill>
+                        <a:srgbClr val="BFD7DE"/>
+                      </a:solidFill>
+                      <a:prstDash val="solid"/>
+                      <a:round/>
+                      <a:headEnd type="none" w="med" len="med"/>
+                      <a:tailEnd type="none" w="med" len="med"/>
+                    </a:lnB>
+                    <a:solidFill>
+                      <a:schemeClr val="bg2"/>
+                    </a:solidFill>
+                  </a:tcPr>
+                </a:tc>
+                <a:tc>
+                  <a:txBody>
+                    <a:bodyPr/>
+                    <a:lstStyle/>
+                    <a:p>
+                      <a:pPr indent="0" marL="0">
+                        <a:buNone/>
+                      </a:pPr>
+                      <a:r>
+                        <a:rPr lang="en-US" sz="1300" dirty="0">
+                          <a:solidFill>
+                            <a:schemeClr val="tx1"/>
+                          </a:solidFill>
+                        </a:rPr>
+                        <a:t>작업거리 짧아 조명 공간 좁음</a:t>
+                      </a:r>
+                      <a:endParaRPr lang="en-US" sz="1300" dirty="0"/>
+                    </a:p>
+                  </a:txBody>
+                  <a:tcPr marL="91440" marR="91440" marT="45720" marB="45720" anchor="ctr">
+                    <a:lnL w="9525" cap="flat" cmpd="sng" algn="ctr">
+                      <a:solidFill>
+                        <a:srgbClr val="BFD7DE"/>
+                      </a:solidFill>
+                      <a:prstDash val="solid"/>
+                      <a:round/>
+                      <a:headEnd type="none" w="med" len="med"/>
+                      <a:tailEnd type="none" w="med" len="med"/>
+                    </a:lnL>
+                    <a:lnR w="9525" cap="flat" cmpd="sng" algn="ctr">
+                      <a:solidFill>
+                        <a:srgbClr val="BFD7DE"/>
+                      </a:solidFill>
+                      <a:prstDash val="solid"/>
+                      <a:round/>
+                      <a:headEnd type="none" w="med" len="med"/>
+                      <a:tailEnd type="none" w="med" len="med"/>
+                    </a:lnR>
+                    <a:lnT w="9525" cap="flat" cmpd="sng" algn="ctr">
+                      <a:solidFill>
+                        <a:srgbClr val="BFD7DE"/>
+                      </a:solidFill>
+                      <a:prstDash val="solid"/>
+                      <a:round/>
+                      <a:headEnd type="none" w="med" len="med"/>
+                      <a:tailEnd type="none" w="med" len="med"/>
+                    </a:lnT>
+                    <a:lnB w="9525" cap="flat" cmpd="sng" algn="ctr">
+                      <a:solidFill>
+                        <a:srgbClr val="BFD7DE"/>
+                      </a:solidFill>
+                      <a:prstDash val="solid"/>
+                      <a:round/>
+                      <a:headEnd type="none" w="med" len="med"/>
+                      <a:tailEnd type="none" w="med" len="med"/>
+                    </a:lnB>
+                  </a:tcPr>
+                </a:tc>
+                <a:tc>
+                  <a:txBody>
+                    <a:bodyPr/>
+                    <a:lstStyle/>
+                    <a:p>
+                      <a:pPr indent="0" marL="0">
+                        <a:buNone/>
+                      </a:pPr>
+                      <a:r>
+                        <a:rPr lang="en-US" sz="1300" dirty="0">
+                          <a:solidFill>
+                            <a:schemeClr val="tx1"/>
+                          </a:solidFill>
+                        </a:rPr>
+                        <a:t>카메라 모듈 신규 개발</a:t>
+                      </a:r>
+                      <a:endParaRPr lang="en-US" sz="1300" dirty="0"/>
+                    </a:p>
+                  </a:txBody>
+                  <a:tcPr marL="91440" marR="91440" marT="45720" marB="45720" anchor="ctr">
+                    <a:lnL w="9525" cap="flat" cmpd="sng" algn="ctr">
+                      <a:solidFill>
+                        <a:srgbClr val="BFD7DE"/>
+                      </a:solidFill>
+                      <a:prstDash val="solid"/>
+                      <a:round/>
+                      <a:headEnd type="none" w="med" len="med"/>
+                      <a:tailEnd type="none" w="med" len="med"/>
+                    </a:lnL>
+                    <a:lnR w="9525" cap="flat" cmpd="sng" algn="ctr">
+                      <a:solidFill>
+                        <a:srgbClr val="BFD7DE"/>
+                      </a:solidFill>
+                      <a:prstDash val="solid"/>
+                      <a:round/>
+                      <a:headEnd type="none" w="med" len="med"/>
+                      <a:tailEnd type="none" w="med" len="med"/>
+                    </a:lnR>
+                    <a:lnT w="9525" cap="flat" cmpd="sng" algn="ctr">
+                      <a:solidFill>
+                        <a:srgbClr val="BFD7DE"/>
+                      </a:solidFill>
+                      <a:prstDash val="solid"/>
+                      <a:round/>
+                      <a:headEnd type="none" w="med" len="med"/>
+                      <a:tailEnd type="none" w="med" len="med"/>
+                    </a:lnT>
+                    <a:lnB w="9525" cap="flat" cmpd="sng" algn="ctr">
+                      <a:solidFill>
+                        <a:srgbClr val="BFD7DE"/>
+                      </a:solidFill>
+                      <a:prstDash val="solid"/>
+                      <a:round/>
+                      <a:headEnd type="none" w="med" len="med"/>
+                      <a:tailEnd type="none" w="med" len="med"/>
+                    </a:lnB>
+                  </a:tcPr>
+                </a:tc>
+              </a:tr>
+            </a:tbl>
+          </a:graphicData>
+        </a:graphic>
+      </p:graphicFrame>
+      <p:sp>
+        <p:nvSpPr>
+          <p:cNvPr id="4" name="compare-note"/>
+          <p:cNvSpPr txBox="1"/>
+          <p:nvPr/>
+        </p:nvSpPr>
+        <p:spPr>
+          <a:xfrm>
+            <a:off x="457200" y="4206240"/>
+            <a:ext cx="8229600" cy="411480"/>
+          </a:xfrm>
+          <a:prstGeom prst="rect">
+            <a:avLst/>
+          </a:prstGeom>
+          <a:noFill/>
+          <a:ln/>
+        </p:spPr>
+        <p:txBody>
+          <a:bodyPr wrap="square" lIns="0" tIns="0" rIns="0" bIns="0" rtlCol="0" anchor="t"/>
+          <a:lstStyle/>
+          <a:p>
+            <a:pPr indent="0" marL="0">
+              <a:buNone/>
+            </a:pPr>
+            <a:r>
+              <a:rPr lang="en-US" sz="1100" dirty="0">
+                <a:solidFill>
+                  <a:schemeClr val="accent5"/>
+                </a:solidFill>
+              </a:rPr>
+              <a:t>※ A안은 Camera Module 3 표준형(75°) 기준입니다. Wide(120°)형은 작업거리가 약 4 mm로 짧아져 적합하지 않습니다.</a:t>
+            </a:r>
+            <a:endParaRPr lang="en-US" sz="1100" dirty="0"/>
+          </a:p>
+        </p:txBody>
+      </p:sp>
+      <p:sp>
+        <p:nvSpPr>
+          <p:cNvPr id="25" name="Slide Number Placeholder 0"/>
+          <p:cNvSpPr>
+            <a:spLocks noGrp="1"/>
+          </p:cNvSpPr>
+          <p:nvPr>
+            <p:ph type="sldNum" sz="quarter" idx="4294967295"/>
+          </p:nvPr>
+        </p:nvSpPr>
+        <p:spPr>
+          <a:xfrm>
+            <a:off x="8229600" y="4754880"/>
+            <a:ext cx="457200" cy="228600"/>
+          </a:xfrm>
+          <a:prstGeom prst="rect">
+            <a:avLst/>
+          </a:prstGeom>
+          <a:extLst>
+            <a:ext uri="{C572A759-6A51-4108-AA02-DFA0A04FC94B}">
+              <ma14:wrappingTextBoxFlag xmlns:ma14="http://schemas.microsoft.com/office/mac/drawingml/2011/main" val="0"/>
+            </a:ext>
+          </a:extLst>
+        </p:spPr>
+        <p:txBody>
+          <a:bodyPr/>
+          <a:lstStyle>
+            <a:lvl1pPr>
+              <a:defRPr sz="900">
+                <a:solidFill>
+                  <a:schemeClr val="accent5"/>
+                </a:solidFill>
+              </a:defRPr>
+            </a:lvl1pPr>
+          </a:lstStyle>
+          <a:p>
+            <a:pPr algn="r"/>
+            <a:fld id="{F7021451-1387-4CA6-816F-3879F97B5CBC}" type="slidenum">
+              <a:rPr b="0" lang="en-US"/>
+              <a:t>5</a:t>
+            </a:fld>
+            <a:endParaRPr lang="en-US"/>
+          </a:p>
+        </p:txBody>
+      </p:sp>
+    </p:spTree>
+  </p:cSld>
+  <p:clrMapOvr>
+    <a:masterClrMapping/>
+  </p:clrMapOvr>
+</p:sld>
+</file>
+
+<file path=ppt/slides/slide6.xml><?xml version="1.0" encoding="utf-8"?>
+<p:sld xmlns:a="http://schemas.openxmlformats.org/drawingml/2006/main" xmlns:r="http://schemas.openxmlformats.org/officeDocument/2006/relationships" xmlns:p="http://schemas.openxmlformats.org/presentationml/2006/main">
+  <p:cSld name="Slide 6">
+    <p:spTree>
+      <p:nvGrpSpPr>
+        <p:cNvPr id="1" name=""/>
+        <p:cNvGrpSpPr/>
+        <p:nvPr/>
+      </p:nvGrpSpPr>
+      <p:grpSpPr>
+        <a:xfrm>
+          <a:off x="0" y="0"/>
+          <a:ext cx="0" cy="0"/>
+          <a:chOff x="0" y="0"/>
+          <a:chExt cx="0" cy="0"/>
+        </a:xfrm>
+      </p:grpSpPr>
+      <p:sp>
+        <p:nvSpPr>
+          <p:cNvPr id="2" name="Text 0"/>
+          <p:cNvSpPr/>
+          <p:nvPr>
+            <p:ph idx="100" type="title" hasCustomPrompt="1"/>
+          </p:nvPr>
+        </p:nvSpPr>
+        <p:spPr>
+          <a:xfrm>
+            <a:off x="457200" y="274320"/>
+            <a:ext cx="8229600" cy="548640"/>
+          </a:xfrm>
+          <a:prstGeom prst="rect">
+            <a:avLst/>
+          </a:prstGeom>
+          <a:noFill/>
+          <a:ln/>
+        </p:spPr>
+        <p:txBody>
+          <a:bodyPr wrap="square" lIns="0" tIns="0" rIns="0" bIns="0" rtlCol="0" anchor="ctr"/>
+          <a:lstStyle/>
+          <a:p>
+            <a:pPr algn="l" indent="0" marL="0">
+              <a:buNone/>
+            </a:pPr>
+            <a:r>
+              <a:rPr lang="en-US" sz="2600" b="1" dirty="0">
+                <a:solidFill>
+                  <a:schemeClr val="tx2"/>
+                </a:solidFill>
+              </a:rPr>
+              <a:t>A안 덧대기: 광학 배치와 계산값</a:t>
+            </a:r>
+            <a:endParaRPr lang="en-US" sz="2600" dirty="0"/>
+          </a:p>
+        </p:txBody>
+      </p:sp>
+      <p:sp>
+        <p:nvSpPr>
+          <p:cNvPr id="3" name="a-scalp"/>
+          <p:cNvSpPr/>
+          <p:nvPr/>
+        </p:nvSpPr>
+        <p:spPr>
+          <a:xfrm>
+            <a:off x="1097280" y="1005840"/>
+            <a:ext cx="0" cy="1188720"/>
+          </a:xfrm>
+          <a:prstGeom prst="line">
+            <a:avLst/>
+          </a:prstGeom>
+          <a:noFill/>
+          <a:ln w="50800">
+            <a:solidFill>
+              <a:schemeClr val="accent4"/>
+            </a:solidFill>
+            <a:prstDash val="solid"/>
+          </a:ln>
+        </p:spPr>
+      </p:sp>
+      <p:sp>
+        <p:nvSpPr>
+          <p:cNvPr id="4" name="a-scalp-label"/>
+          <p:cNvSpPr txBox="1"/>
+          <p:nvPr/>
+        </p:nvSpPr>
+        <p:spPr>
+          <a:xfrm>
+            <a:off x="731520" y="2240280"/>
+            <a:ext cx="731520" cy="274320"/>
+          </a:xfrm>
+          <a:prstGeom prst="rect">
+            <a:avLst/>
+          </a:prstGeom>
+          <a:noFill/>
+          <a:ln/>
+        </p:spPr>
+        <p:txBody>
+          <a:bodyPr wrap="square" lIns="0" tIns="0" rIns="0" bIns="0" rtlCol="0" anchor="ctr"/>
+          <a:lstStyle/>
+          <a:p>
+            <a:pPr algn="ctr" indent="0" marL="0">
+              <a:buNone/>
+            </a:pPr>
+            <a:r>
+              <a:rPr lang="en-US" sz="1200" b="1" dirty="0">
+                <a:solidFill>
+                  <a:schemeClr val="accent4"/>
+                </a:solidFill>
+              </a:rPr>
+              <a:t>두피</a:t>
+            </a:r>
+            <a:endParaRPr lang="en-US" sz="1200" dirty="0"/>
+          </a:p>
+        </p:txBody>
+      </p:sp>
+      <p:sp>
+        <p:nvSpPr>
+          <p:cNvPr id="5" name="a-addon"/>
+          <p:cNvSpPr/>
+          <p:nvPr/>
+        </p:nvSpPr>
+        <p:spPr>
+          <a:xfrm>
+            <a:off x="4206240" y="1051560"/>
+            <a:ext cx="329184" cy="1097280"/>
+          </a:xfrm>
+          <a:prstGeom prst="ellipse">
+            <a:avLst/>
+          </a:prstGeom>
+          <a:solidFill>
+            <a:schemeClr val="accent3">
+              <a:alpha val="60000"/>
+            </a:schemeClr>
+          </a:solidFill>
+          <a:ln w="19050">
+            <a:solidFill>
+              <a:schemeClr val="accent3"/>
+            </a:solidFill>
+            <a:prstDash val="solid"/>
+          </a:ln>
+        </p:spPr>
+      </p:sp>
+      <p:sp>
+        <p:nvSpPr>
+          <p:cNvPr id="6" name="a-addon-label"/>
+          <p:cNvSpPr txBox="1"/>
+          <p:nvPr/>
+        </p:nvSpPr>
+        <p:spPr>
+          <a:xfrm>
+            <a:off x="3685032" y="2240280"/>
+            <a:ext cx="1371600" cy="274320"/>
+          </a:xfrm>
+          <a:prstGeom prst="rect">
+            <a:avLst/>
+          </a:prstGeom>
+          <a:noFill/>
+          <a:ln/>
+        </p:spPr>
+        <p:txBody>
+          <a:bodyPr wrap="square" lIns="0" tIns="0" rIns="0" bIns="0" rtlCol="0" anchor="ctr"/>
+          <a:lstStyle/>
+          <a:p>
+            <a:pPr algn="ctr" indent="0" marL="0">
+              <a:buNone/>
+            </a:pPr>
+            <a:r>
+              <a:rPr lang="en-US" sz="1200" b="1" dirty="0">
+                <a:solidFill>
+                  <a:schemeClr val="tx1"/>
+                </a:solidFill>
+              </a:rPr>
+              <a:t>덧대는 렌즈</a:t>
+            </a:r>
+            <a:endParaRPr lang="en-US" sz="1200" dirty="0"/>
+          </a:p>
+        </p:txBody>
+      </p:sp>
+      <p:sp>
+        <p:nvSpPr>
+          <p:cNvPr id="7" name="a-module"/>
+          <p:cNvSpPr/>
+          <p:nvPr/>
+        </p:nvSpPr>
+        <p:spPr>
+          <a:xfrm>
+            <a:off x="5669280" y="960120"/>
+            <a:ext cx="2377440" cy="1280160"/>
+          </a:xfrm>
+          <a:prstGeom prst="roundRect">
+            <a:avLst>
+              <a:gd name="adj" fmla="val 7143"/>
+            </a:avLst>
+          </a:prstGeom>
+          <a:solidFill>
+            <a:schemeClr val="bg2"/>
+          </a:solidFill>
+          <a:ln w="19050">
+            <a:solidFill>
+              <a:schemeClr val="accent2"/>
+            </a:solidFill>
+            <a:prstDash val="solid"/>
+          </a:ln>
+        </p:spPr>
+      </p:sp>
+      <p:sp>
+        <p:nvSpPr>
+          <p:cNvPr id="8" name="a-module-label"/>
+          <p:cNvSpPr txBox="1"/>
+          <p:nvPr/>
+        </p:nvSpPr>
+        <p:spPr>
+          <a:xfrm>
+            <a:off x="5669280" y="960120"/>
+            <a:ext cx="2377440" cy="1280160"/>
+          </a:xfrm>
+          <a:prstGeom prst="rect">
+            <a:avLst/>
+          </a:prstGeom>
+          <a:noFill/>
+          <a:ln/>
+        </p:spPr>
+        <p:txBody>
+          <a:bodyPr wrap="square" lIns="0" tIns="0" rIns="0" bIns="0" rtlCol="0" anchor="ctr"/>
+          <a:lstStyle/>
+          <a:p>
+            <a:pPr algn="ctr" indent="0" marL="0">
+              <a:buNone/>
+            </a:pPr>
+            <a:r>
+              <a:rPr lang="en-US" sz="1300" b="1" dirty="0">
+                <a:solidFill>
+                  <a:schemeClr val="accent2"/>
+                </a:solidFill>
+              </a:rPr>
+              <a:t>IMX708 AF 모듈</a:t>
+            </a:r>
+            <a:endParaRPr lang="en-US" sz="1300" dirty="0"/>
+          </a:p>
+          <a:p>
+            <a:pPr algn="ctr" indent="0" marL="0">
+              <a:buNone/>
+            </a:pPr>
+            <a:r>
+              <a:rPr lang="en-US" sz="1300" b="1" dirty="0">
+                <a:solidFill>
+                  <a:schemeClr val="accent2"/>
+                </a:solidFill>
+              </a:rPr>
+              <a:t>(기존 렌즈 + VCM)</a:t>
+            </a:r>
+            <a:endParaRPr lang="en-US" sz="1300" dirty="0"/>
+          </a:p>
+        </p:txBody>
+      </p:sp>
+      <p:sp>
+        <p:nvSpPr>
+          <p:cNvPr id="9" name="a-wd"/>
+          <p:cNvSpPr/>
+          <p:nvPr/>
+        </p:nvSpPr>
+        <p:spPr>
+          <a:xfrm>
+            <a:off x="1143000" y="1600200"/>
+            <a:ext cx="3035808" cy="0"/>
+          </a:xfrm>
+          <a:prstGeom prst="line">
+            <a:avLst/>
+          </a:prstGeom>
+          <a:noFill/>
+          <a:ln w="15875">
+            <a:solidFill>
+              <a:schemeClr val="accent5"/>
+            </a:solidFill>
+            <a:prstDash val="solid"/>
+            <a:headEnd type="triangle"/>
+            <a:tailEnd type="triangle"/>
+          </a:ln>
+        </p:spPr>
+      </p:sp>
+      <p:sp>
+        <p:nvSpPr>
+          <p:cNvPr id="10" name="a-wd-label"/>
+          <p:cNvSpPr txBox="1"/>
+          <p:nvPr/>
+        </p:nvSpPr>
+        <p:spPr>
+          <a:xfrm>
+            <a:off x="868680" y="1216152"/>
+            <a:ext cx="3584448" cy="292608"/>
+          </a:xfrm>
+          <a:prstGeom prst="rect">
+            <a:avLst/>
+          </a:prstGeom>
+          <a:noFill/>
+          <a:ln/>
+        </p:spPr>
+        <p:txBody>
+          <a:bodyPr wrap="square" lIns="0" tIns="0" rIns="0" bIns="0" rtlCol="0" anchor="ctr"/>
+          <a:lstStyle/>
+          <a:p>
+            <a:pPr algn="ctr" indent="0" marL="0">
+              <a:buNone/>
+            </a:pPr>
+            <a:r>
+              <a:rPr lang="en-US" sz="1300" b="1" dirty="0">
+                <a:solidFill>
+                  <a:schemeClr val="tx1"/>
+                </a:solidFill>
+              </a:rPr>
+              <a:t>작업거리 약 7–8 mm</a:t>
+            </a:r>
+            <a:endParaRPr lang="en-US" sz="1300" dirty="0"/>
+          </a:p>
+        </p:txBody>
+      </p:sp>
+      <p:sp>
+        <p:nvSpPr>
+          <p:cNvPr id="11" name="a-gap"/>
+          <p:cNvSpPr/>
+          <p:nvPr/>
+        </p:nvSpPr>
+        <p:spPr>
+          <a:xfrm>
+            <a:off x="4562856" y="1600200"/>
+            <a:ext cx="1078992" cy="0"/>
+          </a:xfrm>
+          <a:prstGeom prst="line">
+            <a:avLst/>
+          </a:prstGeom>
+          <a:noFill/>
+          <a:ln w="15875">
+            <a:solidFill>
+              <a:schemeClr val="accent5"/>
+            </a:solidFill>
+            <a:prstDash val="solid"/>
+            <a:headEnd type="triangle"/>
+            <a:tailEnd type="triangle"/>
+          </a:ln>
+        </p:spPr>
+      </p:sp>
+      <p:sp>
+        <p:nvSpPr>
+          <p:cNvPr id="12" name="a-gap-label"/>
+          <p:cNvSpPr txBox="1"/>
+          <p:nvPr/>
+        </p:nvSpPr>
+        <p:spPr>
+          <a:xfrm>
+            <a:off x="4288536" y="1216152"/>
+            <a:ext cx="1627632" cy="292608"/>
+          </a:xfrm>
+          <a:prstGeom prst="rect">
+            <a:avLst/>
+          </a:prstGeom>
+          <a:noFill/>
+          <a:ln/>
+        </p:spPr>
+        <p:txBody>
+          <a:bodyPr wrap="square" lIns="0" tIns="0" rIns="0" bIns="0" rtlCol="0" anchor="ctr"/>
+          <a:lstStyle/>
+          <a:p>
+            <a:pPr algn="ctr" indent="0" marL="0">
+              <a:buNone/>
+            </a:pPr>
+            <a:r>
+              <a:rPr lang="en-US" sz="1300" b="1" dirty="0">
+                <a:solidFill>
+                  <a:schemeClr val="tx1"/>
+                </a:solidFill>
+              </a:rPr>
+              <a:t>1–2 mm</a:t>
+            </a:r>
+            <a:endParaRPr lang="en-US" sz="1300" dirty="0"/>
+          </a:p>
+        </p:txBody>
+      </p:sp>
+      <p:graphicFrame>
+        <p:nvGraphicFramePr>
+          <p:cNvPr id="7" name="a-table"/>
+          <p:cNvGraphicFramePr>
+            <a:graphicFrameLocks noGrp="1"/>
+          </p:cNvGraphicFramePr>
+          <p:nvPr>
+            <p:extLst>
+              <p:ext uri="{D42A27DB-BD31-4B8C-83A1-F6EECF244321}">
+                <p14:modId xmlns:p14="http://schemas.microsoft.com/office/powerpoint/2010/main" val="1579011935"/>
+              </p:ext>
+            </p:extLst>
+          </p:nvPr>
+        </p:nvGraphicFramePr>
+        <p:xfrm>
+          <a:off x="457200" y="2697480"/>
+          <a:ext cx="8229600" cy="914400"/>
+        </p:xfrm>
+        <a:graphic>
+          <a:graphicData uri="http://schemas.openxmlformats.org/drawingml/2006/table">
+            <a:tbl>
+              <a:tblPr/>
+              <a:tblGrid>
+                <a:gridCol w="2377440"/>
+                <a:gridCol w="5852160"/>
+              </a:tblGrid>
+              <a:tr h="365760">
+                <a:tc>
+                  <a:txBody>
+                    <a:bodyPr/>
+                    <a:lstStyle/>
+                    <a:p>
+                      <a:pPr indent="0" marL="0">
+                        <a:buNone/>
+                      </a:pPr>
+                      <a:r>
+                        <a:rPr lang="en-US" sz="1300" b="1" dirty="0">
+                          <a:solidFill>
+                            <a:schemeClr val="tx2"/>
+                          </a:solidFill>
+                        </a:rPr>
+                        <a:t>덧대는 렌즈 초점거리</a:t>
+                      </a:r>
+                      <a:endParaRPr lang="en-US" sz="1300" dirty="0"/>
+                    </a:p>
+                  </a:txBody>
+                  <a:tcPr marL="91440" marR="91440" marT="45720" marB="45720" anchor="ctr">
+                    <a:lnL w="9525" cap="flat" cmpd="sng" algn="ctr">
+                      <a:solidFill>
+                        <a:srgbClr val="BFD7DE"/>
+                      </a:solidFill>
+                      <a:prstDash val="solid"/>
+                      <a:round/>
+                      <a:headEnd type="none" w="med" len="med"/>
+                      <a:tailEnd type="none" w="med" len="med"/>
+                    </a:lnL>
+                    <a:lnR w="9525" cap="flat" cmpd="sng" algn="ctr">
+                      <a:solidFill>
+                        <a:srgbClr val="BFD7DE"/>
+                      </a:solidFill>
+                      <a:prstDash val="solid"/>
+                      <a:round/>
+                      <a:headEnd type="none" w="med" len="med"/>
+                      <a:tailEnd type="none" w="med" len="med"/>
+                    </a:lnR>
+                    <a:lnT w="9525" cap="flat" cmpd="sng" algn="ctr">
+                      <a:solidFill>
+                        <a:srgbClr val="BFD7DE"/>
+                      </a:solidFill>
+                      <a:prstDash val="solid"/>
+                      <a:round/>
+                      <a:headEnd type="none" w="med" len="med"/>
+                      <a:tailEnd type="none" w="med" len="med"/>
+                    </a:lnT>
+                    <a:lnB w="9525" cap="flat" cmpd="sng" algn="ctr">
+                      <a:solidFill>
+                        <a:srgbClr val="BFD7DE"/>
+                      </a:solidFill>
+                      <a:prstDash val="solid"/>
+                      <a:round/>
+                      <a:headEnd type="none" w="med" len="med"/>
+                      <a:tailEnd type="none" w="med" len="med"/>
+                    </a:lnB>
+                    <a:solidFill>
+                      <a:schemeClr val="bg2"/>
+                    </a:solidFill>
+                  </a:tcPr>
+                </a:tc>
+                <a:tc>
+                  <a:txBody>
+                    <a:bodyPr/>
+                    <a:lstStyle/>
+                    <a:p>
+                      <a:pPr indent="0" marL="0">
+                        <a:buNone/>
+                      </a:pPr>
+                      <a:r>
+                        <a:rPr lang="en-US" sz="1300" dirty="0">
+                          <a:solidFill>
+                            <a:schemeClr val="tx1"/>
+                          </a:solidFill>
+                        </a:rPr>
+                        <a:t>약 7.8 mm (기존 렌즈 초점거리 4.74 mm 기준)</a:t>
+                      </a:r>
+                      <a:endParaRPr lang="en-US" sz="1300" dirty="0"/>
+                    </a:p>
+                  </a:txBody>
+                  <a:tcPr marL="91440" marR="91440" marT="45720" marB="45720" anchor="ctr">
+                    <a:lnL w="9525" cap="flat" cmpd="sng" algn="ctr">
+                      <a:solidFill>
+                        <a:srgbClr val="BFD7DE"/>
+                      </a:solidFill>
+                      <a:prstDash val="solid"/>
+                      <a:round/>
+                      <a:headEnd type="none" w="med" len="med"/>
+                      <a:tailEnd type="none" w="med" len="med"/>
+                    </a:lnL>
+                    <a:lnR w="9525" cap="flat" cmpd="sng" algn="ctr">
+                      <a:solidFill>
+                        <a:srgbClr val="BFD7DE"/>
+                      </a:solidFill>
+                      <a:prstDash val="solid"/>
+                      <a:round/>
+                      <a:headEnd type="none" w="med" len="med"/>
+                      <a:tailEnd type="none" w="med" len="med"/>
+                    </a:lnR>
+                    <a:lnT w="9525" cap="flat" cmpd="sng" algn="ctr">
+                      <a:solidFill>
+                        <a:srgbClr val="BFD7DE"/>
+                      </a:solidFill>
+                      <a:prstDash val="solid"/>
+                      <a:round/>
+                      <a:headEnd type="none" w="med" len="med"/>
+                      <a:tailEnd type="none" w="med" len="med"/>
+                    </a:lnT>
+                    <a:lnB w="9525" cap="flat" cmpd="sng" algn="ctr">
+                      <a:solidFill>
+                        <a:srgbClr val="BFD7DE"/>
+                      </a:solidFill>
+                      <a:prstDash val="solid"/>
+                      <a:round/>
+                      <a:headEnd type="none" w="med" len="med"/>
+                      <a:tailEnd type="none" w="med" len="med"/>
+                    </a:lnB>
+                  </a:tcPr>
+                </a:tc>
+              </a:tr>
+              <a:tr h="365760">
+                <a:tc>
+                  <a:txBody>
+                    <a:bodyPr/>
+                    <a:lstStyle/>
+                    <a:p>
+                      <a:pPr indent="0" marL="0">
+                        <a:buNone/>
+                      </a:pPr>
+                      <a:r>
+                        <a:rPr lang="en-US" sz="1300" b="1" dirty="0">
+                          <a:solidFill>
+                            <a:schemeClr val="tx2"/>
+                          </a:solidFill>
+                        </a:rPr>
+                        <a:t>덧대는 렌즈 지름</a:t>
+                      </a:r>
+                      <a:endParaRPr lang="en-US" sz="1300" dirty="0"/>
+                    </a:p>
+                  </a:txBody>
+                  <a:tcPr marL="91440" marR="91440" marT="45720" marB="45720" anchor="ctr">
+                    <a:lnL w="9525" cap="flat" cmpd="sng" algn="ctr">
+                      <a:solidFill>
+                        <a:srgbClr val="BFD7DE"/>
+                      </a:solidFill>
+                      <a:prstDash val="solid"/>
+                      <a:round/>
+                      <a:headEnd type="none" w="med" len="med"/>
+                      <a:tailEnd type="none" w="med" len="med"/>
+                    </a:lnL>
+                    <a:lnR w="9525" cap="flat" cmpd="sng" algn="ctr">
+                      <a:solidFill>
+                        <a:srgbClr val="BFD7DE"/>
+                      </a:solidFill>
+                      <a:prstDash val="solid"/>
+                      <a:round/>
+                      <a:headEnd type="none" w="med" len="med"/>
+                      <a:tailEnd type="none" w="med" len="med"/>
+                    </a:lnR>
+                    <a:lnT w="9525" cap="flat" cmpd="sng" algn="ctr">
+                      <a:solidFill>
+                        <a:srgbClr val="BFD7DE"/>
+                      </a:solidFill>
+                      <a:prstDash val="solid"/>
+                      <a:round/>
+                      <a:headEnd type="none" w="med" len="med"/>
+                      <a:tailEnd type="none" w="med" len="med"/>
+                    </a:lnT>
+                    <a:lnB w="9525" cap="flat" cmpd="sng" algn="ctr">
+                      <a:solidFill>
+                        <a:srgbClr val="BFD7DE"/>
+                      </a:solidFill>
+                      <a:prstDash val="solid"/>
+                      <a:round/>
+                      <a:headEnd type="none" w="med" len="med"/>
+                      <a:tailEnd type="none" w="med" len="med"/>
+                    </a:lnB>
+                    <a:solidFill>
+                      <a:schemeClr val="bg2"/>
+                    </a:solidFill>
+                  </a:tcPr>
+                </a:tc>
+                <a:tc>
+                  <a:txBody>
+                    <a:bodyPr/>
+                    <a:lstStyle/>
+                    <a:p>
+                      <a:pPr indent="0" marL="0">
+                        <a:buNone/>
+                      </a:pPr>
+                      <a:r>
+                        <a:rPr lang="en-US" sz="1300" dirty="0">
+                          <a:solidFill>
+                            <a:schemeClr val="tx1"/>
+                          </a:solidFill>
+                        </a:rPr>
+                        <a:t>6 mm 이상 (기존 렌즈 화각 광선이 잘리지 않도록)</a:t>
+                      </a:r>
+                      <a:endParaRPr lang="en-US" sz="1300" dirty="0"/>
+                    </a:p>
+                  </a:txBody>
+                  <a:tcPr marL="91440" marR="91440" marT="45720" marB="45720" anchor="ctr">
+                    <a:lnL w="9525" cap="flat" cmpd="sng" algn="ctr">
+                      <a:solidFill>
+                        <a:srgbClr val="BFD7DE"/>
+                      </a:solidFill>
+                      <a:prstDash val="solid"/>
+                      <a:round/>
+                      <a:headEnd type="none" w="med" len="med"/>
+                      <a:tailEnd type="none" w="med" len="med"/>
+                    </a:lnL>
+                    <a:lnR w="9525" cap="flat" cmpd="sng" algn="ctr">
+                      <a:solidFill>
+                        <a:srgbClr val="BFD7DE"/>
+                      </a:solidFill>
+                      <a:prstDash val="solid"/>
+                      <a:round/>
+                      <a:headEnd type="none" w="med" len="med"/>
+                      <a:tailEnd type="none" w="med" len="med"/>
+                    </a:lnR>
+                    <a:lnT w="9525" cap="flat" cmpd="sng" algn="ctr">
+                      <a:solidFill>
+                        <a:srgbClr val="BFD7DE"/>
+                      </a:solidFill>
+                      <a:prstDash val="solid"/>
+                      <a:round/>
+                      <a:headEnd type="none" w="med" len="med"/>
+                      <a:tailEnd type="none" w="med" len="med"/>
+                    </a:lnT>
+                    <a:lnB w="9525" cap="flat" cmpd="sng" algn="ctr">
+                      <a:solidFill>
+                        <a:srgbClr val="BFD7DE"/>
+                      </a:solidFill>
+                      <a:prstDash val="solid"/>
+                      <a:round/>
+                      <a:headEnd type="none" w="med" len="med"/>
+                      <a:tailEnd type="none" w="med" len="med"/>
+                    </a:lnB>
+                  </a:tcPr>
+                </a:tc>
+              </a:tr>
+              <a:tr h="365760">
+                <a:tc>
+                  <a:txBody>
+                    <a:bodyPr/>
+                    <a:lstStyle/>
+                    <a:p>
+                      <a:pPr indent="0" marL="0">
+                        <a:buNone/>
+                      </a:pPr>
+                      <a:r>
+                        <a:rPr lang="en-US" sz="1300" b="1" dirty="0">
+                          <a:solidFill>
+                            <a:schemeClr val="tx2"/>
+                          </a:solidFill>
+                        </a:rPr>
+                        <a:t>AF 보정 범위</a:t>
+                      </a:r>
+                      <a:endParaRPr lang="en-US" sz="1300" dirty="0"/>
+                    </a:p>
+                  </a:txBody>
+                  <a:tcPr marL="91440" marR="91440" marT="45720" marB="45720" anchor="ctr">
+                    <a:lnL w="9525" cap="flat" cmpd="sng" algn="ctr">
+                      <a:solidFill>
+                        <a:srgbClr val="BFD7DE"/>
+                      </a:solidFill>
+                      <a:prstDash val="solid"/>
+                      <a:round/>
+                      <a:headEnd type="none" w="med" len="med"/>
+                      <a:tailEnd type="none" w="med" len="med"/>
+                    </a:lnL>
+                    <a:lnR w="9525" cap="flat" cmpd="sng" algn="ctr">
+                      <a:solidFill>
+                        <a:srgbClr val="BFD7DE"/>
+                      </a:solidFill>
+                      <a:prstDash val="solid"/>
+                      <a:round/>
+                      <a:headEnd type="none" w="med" len="med"/>
+                      <a:tailEnd type="none" w="med" len="med"/>
+                    </a:lnR>
+                    <a:lnT w="9525" cap="flat" cmpd="sng" algn="ctr">
+                      <a:solidFill>
+                        <a:srgbClr val="BFD7DE"/>
+                      </a:solidFill>
+                      <a:prstDash val="solid"/>
+                      <a:round/>
+                      <a:headEnd type="none" w="med" len="med"/>
+                      <a:tailEnd type="none" w="med" len="med"/>
+                    </a:lnT>
+                    <a:lnB w="9525" cap="flat" cmpd="sng" algn="ctr">
+                      <a:solidFill>
+                        <a:srgbClr val="BFD7DE"/>
+                      </a:solidFill>
+                      <a:prstDash val="solid"/>
+                      <a:round/>
+                      <a:headEnd type="none" w="med" len="med"/>
+                      <a:tailEnd type="none" w="med" len="med"/>
+                    </a:lnB>
+                    <a:solidFill>
+                      <a:schemeClr val="bg2"/>
+                    </a:solidFill>
+                  </a:tcPr>
+                </a:tc>
+                <a:tc>
+                  <a:txBody>
+                    <a:bodyPr/>
+                    <a:lstStyle/>
+                    <a:p>
+                      <a:pPr indent="0" marL="0">
+                        <a:buNone/>
+                      </a:pPr>
+                      <a:r>
+                        <a:rPr lang="en-US" sz="1300" dirty="0">
+                          <a:solidFill>
+                            <a:schemeClr val="tx1"/>
+                          </a:solidFill>
+                        </a:rPr>
+                        <a:t>기존 AF 10 cm~∞ → 두피 거리 약 0.6 mm 보정</a:t>
+                      </a:r>
+                      <a:endParaRPr lang="en-US" sz="1300" dirty="0"/>
+                    </a:p>
+                  </a:txBody>
+                  <a:tcPr marL="91440" marR="91440" marT="45720" marB="45720" anchor="ctr">
+                    <a:lnL w="9525" cap="flat" cmpd="sng" algn="ctr">
+                      <a:solidFill>
+                        <a:srgbClr val="BFD7DE"/>
+                      </a:solidFill>
+                      <a:prstDash val="solid"/>
+                      <a:round/>
+                      <a:headEnd type="none" w="med" len="med"/>
+                      <a:tailEnd type="none" w="med" len="med"/>
+                    </a:lnL>
+                    <a:lnR w="9525" cap="flat" cmpd="sng" algn="ctr">
+                      <a:solidFill>
+                        <a:srgbClr val="BFD7DE"/>
+                      </a:solidFill>
+                      <a:prstDash val="solid"/>
+                      <a:round/>
+                      <a:headEnd type="none" w="med" len="med"/>
+                      <a:tailEnd type="none" w="med" len="med"/>
+                    </a:lnR>
+                    <a:lnT w="9525" cap="flat" cmpd="sng" algn="ctr">
+                      <a:solidFill>
+                        <a:srgbClr val="BFD7DE"/>
+                      </a:solidFill>
+                      <a:prstDash val="solid"/>
+                      <a:round/>
+                      <a:headEnd type="none" w="med" len="med"/>
+                      <a:tailEnd type="none" w="med" len="med"/>
+                    </a:lnT>
+                    <a:lnB w="9525" cap="flat" cmpd="sng" algn="ctr">
+                      <a:solidFill>
+                        <a:srgbClr val="BFD7DE"/>
+                      </a:solidFill>
+                      <a:prstDash val="solid"/>
+                      <a:round/>
+                      <a:headEnd type="none" w="med" len="med"/>
+                      <a:tailEnd type="none" w="med" len="med"/>
+                    </a:lnB>
+                  </a:tcPr>
+                </a:tc>
+              </a:tr>
+              <a:tr h="365760">
+                <a:tc>
+                  <a:txBody>
+                    <a:bodyPr/>
+                    <a:lstStyle/>
+                    <a:p>
+                      <a:pPr indent="0" marL="0">
+                        <a:buNone/>
+                      </a:pPr>
+                      <a:r>
+                        <a:rPr lang="en-US" sz="1300" b="1" dirty="0">
+                          <a:solidFill>
+                            <a:schemeClr val="tx2"/>
+                          </a:solidFill>
+                        </a:rPr>
+                        <a:t>전체 촬영 범위</a:t>
+                      </a:r>
+                      <a:endParaRPr lang="en-US" sz="1300" dirty="0"/>
+                    </a:p>
+                  </a:txBody>
+                  <a:tcPr marL="91440" marR="91440" marT="45720" marB="45720" anchor="ctr">
+                    <a:lnL w="9525" cap="flat" cmpd="sng" algn="ctr">
+                      <a:solidFill>
+                        <a:srgbClr val="BFD7DE"/>
+                      </a:solidFill>
+                      <a:prstDash val="solid"/>
+                      <a:round/>
+                      <a:headEnd type="none" w="med" len="med"/>
+                      <a:tailEnd type="none" w="med" len="med"/>
+                    </a:lnL>
+                    <a:lnR w="9525" cap="flat" cmpd="sng" algn="ctr">
+                      <a:solidFill>
+                        <a:srgbClr val="BFD7DE"/>
+                      </a:solidFill>
+                      <a:prstDash val="solid"/>
+                      <a:round/>
+                      <a:headEnd type="none" w="med" len="med"/>
+                      <a:tailEnd type="none" w="med" len="med"/>
+                    </a:lnR>
+                    <a:lnT w="9525" cap="flat" cmpd="sng" algn="ctr">
+                      <a:solidFill>
+                        <a:srgbClr val="BFD7DE"/>
+                      </a:solidFill>
+                      <a:prstDash val="solid"/>
+                      <a:round/>
+                      <a:headEnd type="none" w="med" len="med"/>
+                      <a:tailEnd type="none" w="med" len="med"/>
+                    </a:lnT>
+                    <a:lnB w="9525" cap="flat" cmpd="sng" algn="ctr">
+                      <a:solidFill>
+                        <a:srgbClr val="BFD7DE"/>
+                      </a:solidFill>
+                      <a:prstDash val="solid"/>
+                      <a:round/>
+                      <a:headEnd type="none" w="med" len="med"/>
+                      <a:tailEnd type="none" w="med" len="med"/>
+                    </a:lnB>
+                    <a:solidFill>
+                      <a:schemeClr val="bg2"/>
+                    </a:solidFill>
+                  </a:tcPr>
+                </a:tc>
+                <a:tc>
+                  <a:txBody>
+                    <a:bodyPr/>
+                    <a:lstStyle/>
+                    <a:p>
+                      <a:pPr indent="0" marL="0">
+                        <a:buNone/>
+                      </a:pPr>
+                      <a:r>
+                        <a:rPr lang="en-US" sz="1300" dirty="0">
+                          <a:solidFill>
+                            <a:schemeClr val="tx1"/>
+                          </a:solidFill>
+                        </a:rPr>
+                        <a:t>10.6 × 6.0 mm → 가운데 6.0 × 6.0 mm 사용</a:t>
+                      </a:r>
+                      <a:endParaRPr lang="en-US" sz="1300" dirty="0"/>
+                    </a:p>
+                  </a:txBody>
+                  <a:tcPr marL="91440" marR="91440" marT="45720" marB="45720" anchor="ctr">
+                    <a:lnL w="9525" cap="flat" cmpd="sng" algn="ctr">
+                      <a:solidFill>
+                        <a:srgbClr val="BFD7DE"/>
+                      </a:solidFill>
+                      <a:prstDash val="solid"/>
+                      <a:round/>
+                      <a:headEnd type="none" w="med" len="med"/>
+                      <a:tailEnd type="none" w="med" len="med"/>
+                    </a:lnL>
+                    <a:lnR w="9525" cap="flat" cmpd="sng" algn="ctr">
+                      <a:solidFill>
+                        <a:srgbClr val="BFD7DE"/>
+                      </a:solidFill>
+                      <a:prstDash val="solid"/>
+                      <a:round/>
+                      <a:headEnd type="none" w="med" len="med"/>
+                      <a:tailEnd type="none" w="med" len="med"/>
+                    </a:lnR>
+                    <a:lnT w="9525" cap="flat" cmpd="sng" algn="ctr">
+                      <a:solidFill>
+                        <a:srgbClr val="BFD7DE"/>
+                      </a:solidFill>
+                      <a:prstDash val="solid"/>
+                      <a:round/>
+                      <a:headEnd type="none" w="med" len="med"/>
+                      <a:tailEnd type="none" w="med" len="med"/>
+                    </a:lnT>
+                    <a:lnB w="9525" cap="flat" cmpd="sng" algn="ctr">
+                      <a:solidFill>
+                        <a:srgbClr val="BFD7DE"/>
+                      </a:solidFill>
+                      <a:prstDash val="solid"/>
+                      <a:round/>
+                      <a:headEnd type="none" w="med" len="med"/>
+                      <a:tailEnd type="none" w="med" len="med"/>
+                    </a:lnB>
+                  </a:tcPr>
+                </a:tc>
+              </a:tr>
+            </a:tbl>
+          </a:graphicData>
+        </a:graphic>
+      </p:graphicFrame>
+      <p:sp>
+        <p:nvSpPr>
+          <p:cNvPr id="14" name="a-note"/>
+          <p:cNvSpPr txBox="1"/>
+          <p:nvPr/>
+        </p:nvSpPr>
+        <p:spPr>
+          <a:xfrm>
+            <a:off x="457200" y="4297680"/>
+            <a:ext cx="8229600" cy="274320"/>
+          </a:xfrm>
+          <a:prstGeom prst="rect">
+            <a:avLst/>
+          </a:prstGeom>
+          <a:noFill/>
+          <a:ln/>
+        </p:spPr>
+        <p:txBody>
+          <a:bodyPr wrap="square" lIns="0" tIns="0" rIns="0" bIns="0" rtlCol="0" anchor="ctr"/>
+          <a:lstStyle/>
+          <a:p>
+            <a:pPr indent="0" marL="0">
+              <a:buNone/>
+            </a:pPr>
+            <a:r>
+              <a:rPr lang="en-US" sz="1000" dirty="0">
+                <a:solidFill>
+                  <a:schemeClr val="accent5"/>
+                </a:solidFill>
+              </a:rPr>
+              <a:t>※ 얇은 렌즈 근사값입니다. 덧대는 렌즈를 모듈에 고정하는 홀더도 함께 제안 바랍니다.</a:t>
+            </a:r>
+            <a:endParaRPr lang="en-US" sz="1000" dirty="0"/>
+          </a:p>
+        </p:txBody>
+      </p:sp>
+      <p:sp>
+        <p:nvSpPr>
+          <p:cNvPr id="25" name="Slide Number Placeholder 0"/>
+          <p:cNvSpPr>
+            <a:spLocks noGrp="1"/>
+          </p:cNvSpPr>
+          <p:nvPr>
+            <p:ph type="sldNum" sz="quarter" idx="4294967295"/>
+          </p:nvPr>
+        </p:nvSpPr>
+        <p:spPr>
+          <a:xfrm>
+            <a:off x="8229600" y="4754880"/>
+            <a:ext cx="457200" cy="228600"/>
+          </a:xfrm>
+          <a:prstGeom prst="rect">
+            <a:avLst/>
+          </a:prstGeom>
+          <a:extLst>
+            <a:ext uri="{C572A759-6A51-4108-AA02-DFA0A04FC94B}">
+              <ma14:wrappingTextBoxFlag xmlns:ma14="http://schemas.microsoft.com/office/mac/drawingml/2011/main" val="0"/>
+            </a:ext>
+          </a:extLst>
+        </p:spPr>
+        <p:txBody>
+          <a:bodyPr/>
+          <a:lstStyle>
+            <a:lvl1pPr>
+              <a:defRPr sz="900">
+                <a:solidFill>
+                  <a:schemeClr val="accent5"/>
+                </a:solidFill>
+              </a:defRPr>
+            </a:lvl1pPr>
+          </a:lstStyle>
+          <a:p>
+            <a:pPr algn="r"/>
+            <a:fld id="{F7021451-1387-4CA6-816F-3879F97B5CBC}" type="slidenum">
+              <a:rPr b="0" lang="en-US"/>
+              <a:t>6</a:t>
+            </a:fld>
+            <a:endParaRPr lang="en-US"/>
+          </a:p>
+        </p:txBody>
+      </p:sp>
+    </p:spTree>
+  </p:cSld>
+  <p:clrMapOvr>
+    <a:masterClrMapping/>
+  </p:clrMapOvr>
+</p:sld>
+</file>
+
+<file path=ppt/slides/slide7.xml><?xml version="1.0" encoding="utf-8"?>
+<p:sld xmlns:a="http://schemas.openxmlformats.org/drawingml/2006/main" xmlns:r="http://schemas.openxmlformats.org/officeDocument/2006/relationships" xmlns:p="http://schemas.openxmlformats.org/presentationml/2006/main">
+  <p:cSld name="Slide 7">
+    <p:spTree>
+      <p:nvGrpSpPr>
+        <p:cNvPr id="1" name=""/>
+        <p:cNvGrpSpPr/>
+        <p:nvPr/>
+      </p:nvGrpSpPr>
+      <p:grpSpPr>
+        <a:xfrm>
+          <a:off x="0" y="0"/>
+          <a:ext cx="0" cy="0"/>
+          <a:chOff x="0" y="0"/>
+          <a:chExt cx="0" cy="0"/>
+        </a:xfrm>
+      </p:grpSpPr>
+      <p:sp>
+        <p:nvSpPr>
+          <p:cNvPr id="2" name="Text 0"/>
+          <p:cNvSpPr/>
+          <p:nvPr>
+            <p:ph idx="100" type="title" hasCustomPrompt="1"/>
+          </p:nvPr>
+        </p:nvSpPr>
+        <p:spPr>
+          <a:xfrm>
+            <a:off x="457200" y="274320"/>
+            <a:ext cx="8229600" cy="548640"/>
+          </a:xfrm>
+          <a:prstGeom prst="rect">
+            <a:avLst/>
+          </a:prstGeom>
+          <a:noFill/>
+          <a:ln/>
+        </p:spPr>
+        <p:txBody>
+          <a:bodyPr wrap="square" lIns="0" tIns="0" rIns="0" bIns="0" rtlCol="0" anchor="ctr"/>
+          <a:lstStyle/>
+          <a:p>
+            <a:pPr algn="l" indent="0" marL="0">
+              <a:buNone/>
+            </a:pPr>
+            <a:r>
+              <a:rPr lang="en-US" sz="2600" b="1" dirty="0">
+                <a:solidFill>
+                  <a:schemeClr val="tx2"/>
+                </a:solidFill>
+              </a:rPr>
+              <a:t>B안 렌즈 교체: 광학 배치와 계산값</a:t>
+            </a:r>
+            <a:endParaRPr lang="en-US" sz="2600" dirty="0"/>
+          </a:p>
+        </p:txBody>
+      </p:sp>
+      <p:sp>
+        <p:nvSpPr>
+          <p:cNvPr id="3" name="b-scalp"/>
           <p:cNvSpPr/>
           <p:nvPr/>
         </p:nvSpPr>
@@ -4148,7 +7019,7 @@
       </p:sp>
       <p:sp>
         <p:nvSpPr>
-          <p:cNvPr id="4" name="scalp-label"/>
+          <p:cNvPr id="4" name="b-scalp-label"/>
           <p:cNvSpPr txBox="1"/>
           <p:nvPr/>
         </p:nvSpPr>
@@ -4184,14 +7055,39 @@
       </p:sp>
       <p:sp>
         <p:nvSpPr>
-          <p:cNvPr id="5" name="lens"/>
+          <p:cNvPr id="5" name="b-vcm"/>
           <p:cNvSpPr/>
           <p:nvPr/>
         </p:nvSpPr>
         <p:spPr>
           <a:xfrm>
-            <a:off x="4343400" y="1005840"/>
-            <a:ext cx="365760" cy="1188720"/>
+            <a:off x="4160520" y="914400"/>
+            <a:ext cx="731520" cy="1371600"/>
+          </a:xfrm>
+          <a:prstGeom prst="rect">
+            <a:avLst/>
+          </a:prstGeom>
+          <a:solidFill>
+            <a:schemeClr val="bg2"/>
+          </a:solidFill>
+          <a:ln w="12700">
+            <a:solidFill>
+              <a:schemeClr val="accent5"/>
+            </a:solidFill>
+            <a:prstDash val="dash"/>
+          </a:ln>
+        </p:spPr>
+      </p:sp>
+      <p:sp>
+        <p:nvSpPr>
+          <p:cNvPr id="6" name="b-lens"/>
+          <p:cNvSpPr/>
+          <p:nvPr/>
+        </p:nvSpPr>
+        <p:spPr>
+          <a:xfrm>
+            <a:off x="4343400" y="1051560"/>
+            <a:ext cx="365760" cy="1097280"/>
           </a:xfrm>
           <a:prstGeom prst="ellipse">
             <a:avLst/>
@@ -4209,14 +7105,14 @@
       </p:sp>
       <p:sp>
         <p:nvSpPr>
-          <p:cNvPr id="6" name="lens-label"/>
+          <p:cNvPr id="7" name="b-lens-label"/>
           <p:cNvSpPr txBox="1"/>
           <p:nvPr/>
         </p:nvSpPr>
         <p:spPr>
           <a:xfrm>
-            <a:off x="4160520" y="2240280"/>
-            <a:ext cx="731520" cy="274320"/>
+            <a:off x="3840480" y="2377440"/>
+            <a:ext cx="1371600" cy="274320"/>
           </a:xfrm>
           <a:prstGeom prst="rect">
             <a:avLst/>
@@ -4237,7 +7133,7 @@
                   <a:schemeClr val="accent2"/>
                 </a:solidFill>
               </a:rPr>
-              <a:t>렌즈</a:t>
+              <a:t>렌즈 + VCM</a:t>
             </a:r>
             <a:endParaRPr lang="en-US" sz="1200" dirty="0"/>
           </a:p>
@@ -4245,7 +7141,7 @@
       </p:sp>
       <p:sp>
         <p:nvSpPr>
-          <p:cNvPr id="7" name="sensor"/>
+          <p:cNvPr id="8" name="b-sensor"/>
           <p:cNvSpPr/>
           <p:nvPr/>
         </p:nvSpPr>
@@ -4265,7 +7161,7 @@
       </p:sp>
       <p:sp>
         <p:nvSpPr>
-          <p:cNvPr id="8" name="sensor-label2"/>
+          <p:cNvPr id="9" name="b-sensor-label"/>
           <p:cNvSpPr txBox="1"/>
           <p:nvPr/>
         </p:nvSpPr>
@@ -4301,14 +7197,14 @@
       </p:sp>
       <p:sp>
         <p:nvSpPr>
-          <p:cNvPr id="9" name="wd-arrow"/>
+          <p:cNvPr id="10" name="b-wd"/>
           <p:cNvSpPr/>
           <p:nvPr/>
         </p:nvSpPr>
         <p:spPr>
           <a:xfrm>
             <a:off x="868680" y="1600200"/>
-            <a:ext cx="3447288" cy="0"/>
+            <a:ext cx="3264408" cy="0"/>
           </a:xfrm>
           <a:prstGeom prst="line">
             <a:avLst/>
@@ -4326,14 +7222,14 @@
       </p:sp>
       <p:sp>
         <p:nvSpPr>
-          <p:cNvPr id="10" name="wd-arrow-label"/>
+          <p:cNvPr id="11" name="b-wd-label"/>
           <p:cNvSpPr txBox="1"/>
           <p:nvPr/>
         </p:nvSpPr>
         <p:spPr>
           <a:xfrm>
-            <a:off x="868680" y="1216152"/>
-            <a:ext cx="3447288" cy="292608"/>
+            <a:off x="594360" y="1216152"/>
+            <a:ext cx="3813048" cy="292608"/>
           </a:xfrm>
           <a:prstGeom prst="rect">
             <a:avLst/>
@@ -4362,14 +7258,14 @@
       </p:sp>
       <p:sp>
         <p:nvSpPr>
-          <p:cNvPr id="11" name="bf-arrow"/>
+          <p:cNvPr id="12" name="b-bf"/>
           <p:cNvSpPr/>
           <p:nvPr/>
         </p:nvSpPr>
         <p:spPr>
           <a:xfrm>
-            <a:off x="4736592" y="1600200"/>
-            <a:ext cx="2185416" cy="0"/>
+            <a:off x="4919472" y="1600200"/>
+            <a:ext cx="2002536" cy="0"/>
           </a:xfrm>
           <a:prstGeom prst="line">
             <a:avLst/>
@@ -4387,14 +7283,14 @@
       </p:sp>
       <p:sp>
         <p:nvSpPr>
-          <p:cNvPr id="12" name="bf-arrow-label"/>
+          <p:cNvPr id="13" name="b-bf-label"/>
           <p:cNvSpPr txBox="1"/>
           <p:nvPr/>
         </p:nvSpPr>
         <p:spPr>
           <a:xfrm>
-            <a:off x="4736592" y="1216152"/>
-            <a:ext cx="2185416" cy="292608"/>
+            <a:off x="4645152" y="1216152"/>
+            <a:ext cx="2551176" cy="292608"/>
           </a:xfrm>
           <a:prstGeom prst="rect">
             <a:avLst/>
@@ -4423,7 +7319,7 @@
       </p:sp>
       <p:graphicFrame>
         <p:nvGraphicFramePr>
-          <p:cNvPr id="6" name="calc-table"/>
+          <p:cNvPr id="8" name="b-table"/>
           <p:cNvGraphicFramePr>
             <a:graphicFrameLocks noGrp="1"/>
           </p:cNvGraphicFramePr>
@@ -4704,6 +7600,127 @@
                             <a:schemeClr val="tx2"/>
                           </a:solidFill>
                         </a:rPr>
+                        <a:t>AF 보정 범위</a:t>
+                      </a:r>
+                      <a:endParaRPr lang="en-US" sz="1300" dirty="0"/>
+                    </a:p>
+                  </a:txBody>
+                  <a:tcPr marL="91440" marR="91440" marT="45720" marB="45720" anchor="ctr">
+                    <a:lnL w="9525" cap="flat" cmpd="sng" algn="ctr">
+                      <a:solidFill>
+                        <a:srgbClr val="BFD7DE"/>
+                      </a:solidFill>
+                      <a:prstDash val="solid"/>
+                      <a:round/>
+                      <a:headEnd type="none" w="med" len="med"/>
+                      <a:tailEnd type="none" w="med" len="med"/>
+                    </a:lnL>
+                    <a:lnR w="9525" cap="flat" cmpd="sng" algn="ctr">
+                      <a:solidFill>
+                        <a:srgbClr val="BFD7DE"/>
+                      </a:solidFill>
+                      <a:prstDash val="solid"/>
+                      <a:round/>
+                      <a:headEnd type="none" w="med" len="med"/>
+                      <a:tailEnd type="none" w="med" len="med"/>
+                    </a:lnR>
+                    <a:lnT w="9525" cap="flat" cmpd="sng" algn="ctr">
+                      <a:solidFill>
+                        <a:srgbClr val="BFD7DE"/>
+                      </a:solidFill>
+                      <a:prstDash val="solid"/>
+                      <a:round/>
+                      <a:headEnd type="none" w="med" len="med"/>
+                      <a:tailEnd type="none" w="med" len="med"/>
+                    </a:lnT>
+                    <a:lnB w="9525" cap="flat" cmpd="sng" algn="ctr">
+                      <a:solidFill>
+                        <a:srgbClr val="BFD7DE"/>
+                      </a:solidFill>
+                      <a:prstDash val="solid"/>
+                      <a:round/>
+                      <a:headEnd type="none" w="med" len="med"/>
+                      <a:tailEnd type="none" w="med" len="med"/>
+                    </a:lnB>
+                    <a:solidFill>
+                      <a:schemeClr val="bg2"/>
+                    </a:solidFill>
+                  </a:tcPr>
+                </a:tc>
+                <a:tc>
+                  <a:txBody>
+                    <a:bodyPr/>
+                    <a:lstStyle/>
+                    <a:p>
+                      <a:pPr indent="0" marL="0">
+                        <a:buNone/>
+                      </a:pPr>
+                      <a:r>
+                        <a:rPr lang="en-US" sz="1300" dirty="0">
+                          <a:solidFill>
+                            <a:schemeClr val="tx1"/>
+                          </a:solidFill>
+                        </a:rPr>
+                        <a:t>VCM 스트로크 0.3 mm → 두피 거리 약 ±0.4 mm 보정</a:t>
+                      </a:r>
+                      <a:endParaRPr lang="en-US" sz="1300" dirty="0"/>
+                    </a:p>
+                  </a:txBody>
+                  <a:tcPr marL="91440" marR="91440" marT="45720" marB="45720" anchor="ctr">
+                    <a:lnL w="9525" cap="flat" cmpd="sng" algn="ctr">
+                      <a:solidFill>
+                        <a:srgbClr val="BFD7DE"/>
+                      </a:solidFill>
+                      <a:prstDash val="solid"/>
+                      <a:round/>
+                      <a:headEnd type="none" w="med" len="med"/>
+                      <a:tailEnd type="none" w="med" len="med"/>
+                    </a:lnL>
+                    <a:lnR w="9525" cap="flat" cmpd="sng" algn="ctr">
+                      <a:solidFill>
+                        <a:srgbClr val="BFD7DE"/>
+                      </a:solidFill>
+                      <a:prstDash val="solid"/>
+                      <a:round/>
+                      <a:headEnd type="none" w="med" len="med"/>
+                      <a:tailEnd type="none" w="med" len="med"/>
+                    </a:lnR>
+                    <a:lnT w="9525" cap="flat" cmpd="sng" algn="ctr">
+                      <a:solidFill>
+                        <a:srgbClr val="BFD7DE"/>
+                      </a:solidFill>
+                      <a:prstDash val="solid"/>
+                      <a:round/>
+                      <a:headEnd type="none" w="med" len="med"/>
+                      <a:tailEnd type="none" w="med" len="med"/>
+                    </a:lnT>
+                    <a:lnB w="9525" cap="flat" cmpd="sng" algn="ctr">
+                      <a:solidFill>
+                        <a:srgbClr val="BFD7DE"/>
+                      </a:solidFill>
+                      <a:prstDash val="solid"/>
+                      <a:round/>
+                      <a:headEnd type="none" w="med" len="med"/>
+                      <a:tailEnd type="none" w="med" len="med"/>
+                    </a:lnB>
+                  </a:tcPr>
+                </a:tc>
+              </a:tr>
+              <a:tr h="365760">
+                <a:tc>
+                  <a:txBody>
+                    <a:bodyPr/>
+                    <a:lstStyle/>
+                    <a:p>
+                      <a:pPr indent="0" marL="0">
+                        <a:buNone/>
+                      </a:pPr>
+                      <a:r>
+                        <a:rPr lang="en-US" sz="1300" b="1" dirty="0">
+                          <a:solidFill>
+                            <a:schemeClr val="tx2"/>
+                          </a:solidFill>
+                        </a:rPr>
                         <a:t>두피 ~ 센서 총 거리</a:t>
                       </a:r>
                       <a:endParaRPr lang="en-US" sz="1300" dirty="0"/>
@@ -4810,134 +7827,13 @@
                   </a:tcPr>
                 </a:tc>
               </a:tr>
-              <a:tr h="365760">
-                <a:tc>
-                  <a:txBody>
-                    <a:bodyPr/>
-                    <a:lstStyle/>
-                    <a:p>
-                      <a:pPr indent="0" marL="0">
-                        <a:buNone/>
-                      </a:pPr>
-                      <a:r>
-                        <a:rPr lang="en-US" sz="1300" b="1" dirty="0">
-                          <a:solidFill>
-                            <a:schemeClr val="tx2"/>
-                          </a:solidFill>
-                        </a:rPr>
-                        <a:t>전체 촬영 범위</a:t>
-                      </a:r>
-                      <a:endParaRPr lang="en-US" sz="1300" dirty="0"/>
-                    </a:p>
-                  </a:txBody>
-                  <a:tcPr marL="91440" marR="91440" marT="45720" marB="45720" anchor="ctr">
-                    <a:lnL w="9525" cap="flat" cmpd="sng" algn="ctr">
-                      <a:solidFill>
-                        <a:srgbClr val="BFD7DE"/>
-                      </a:solidFill>
-                      <a:prstDash val="solid"/>
-                      <a:round/>
-                      <a:headEnd type="none" w="med" len="med"/>
-                      <a:tailEnd type="none" w="med" len="med"/>
-                    </a:lnL>
-                    <a:lnR w="9525" cap="flat" cmpd="sng" algn="ctr">
-                      <a:solidFill>
-                        <a:srgbClr val="BFD7DE"/>
-                      </a:solidFill>
-                      <a:prstDash val="solid"/>
-                      <a:round/>
-                      <a:headEnd type="none" w="med" len="med"/>
-                      <a:tailEnd type="none" w="med" len="med"/>
-                    </a:lnR>
-                    <a:lnT w="9525" cap="flat" cmpd="sng" algn="ctr">
-                      <a:solidFill>
-                        <a:srgbClr val="BFD7DE"/>
-                      </a:solidFill>
-                      <a:prstDash val="solid"/>
-                      <a:round/>
-                      <a:headEnd type="none" w="med" len="med"/>
-                      <a:tailEnd type="none" w="med" len="med"/>
-                    </a:lnT>
-                    <a:lnB w="9525" cap="flat" cmpd="sng" algn="ctr">
-                      <a:solidFill>
-                        <a:srgbClr val="BFD7DE"/>
-                      </a:solidFill>
-                      <a:prstDash val="solid"/>
-                      <a:round/>
-                      <a:headEnd type="none" w="med" len="med"/>
-                      <a:tailEnd type="none" w="med" len="med"/>
-                    </a:lnB>
-                    <a:solidFill>
-                      <a:schemeClr val="bg2"/>
-                    </a:solidFill>
-                  </a:tcPr>
-                </a:tc>
-                <a:tc>
-                  <a:txBody>
-                    <a:bodyPr/>
-                    <a:lstStyle/>
-                    <a:p>
-                      <a:pPr indent="0" marL="0">
-                        <a:buNone/>
-                      </a:pPr>
-                      <a:r>
-                        <a:rPr lang="en-US" sz="1300" dirty="0">
-                          <a:solidFill>
-                            <a:schemeClr val="tx1"/>
-                          </a:solidFill>
-                        </a:rPr>
-                        <a:t>10.7 × 6.0 mm → 가운데 6.0 × 6.0 mm 사용</a:t>
-                      </a:r>
-                      <a:endParaRPr lang="en-US" sz="1300" dirty="0"/>
-                    </a:p>
-                  </a:txBody>
-                  <a:tcPr marL="91440" marR="91440" marT="45720" marB="45720" anchor="ctr">
-                    <a:lnL w="9525" cap="flat" cmpd="sng" algn="ctr">
-                      <a:solidFill>
-                        <a:srgbClr val="BFD7DE"/>
-                      </a:solidFill>
-                      <a:prstDash val="solid"/>
-                      <a:round/>
-                      <a:headEnd type="none" w="med" len="med"/>
-                      <a:tailEnd type="none" w="med" len="med"/>
-                    </a:lnL>
-                    <a:lnR w="9525" cap="flat" cmpd="sng" algn="ctr">
-                      <a:solidFill>
-                        <a:srgbClr val="BFD7DE"/>
-                      </a:solidFill>
-                      <a:prstDash val="solid"/>
-                      <a:round/>
-                      <a:headEnd type="none" w="med" len="med"/>
-                      <a:tailEnd type="none" w="med" len="med"/>
-                    </a:lnR>
-                    <a:lnT w="9525" cap="flat" cmpd="sng" algn="ctr">
-                      <a:solidFill>
-                        <a:srgbClr val="BFD7DE"/>
-                      </a:solidFill>
-                      <a:prstDash val="solid"/>
-                      <a:round/>
-                      <a:headEnd type="none" w="med" len="med"/>
-                      <a:tailEnd type="none" w="med" len="med"/>
-                    </a:lnT>
-                    <a:lnB w="9525" cap="flat" cmpd="sng" algn="ctr">
-                      <a:solidFill>
-                        <a:srgbClr val="BFD7DE"/>
-                      </a:solidFill>
-                      <a:prstDash val="solid"/>
-                      <a:round/>
-                      <a:headEnd type="none" w="med" len="med"/>
-                      <a:tailEnd type="none" w="med" len="med"/>
-                    </a:lnB>
-                  </a:tcPr>
-                </a:tc>
-              </a:tr>
             </a:tbl>
           </a:graphicData>
         </a:graphic>
       </p:graphicFrame>
       <p:sp>
         <p:nvSpPr>
-          <p:cNvPr id="14" name="calc-note"/>
+          <p:cNvPr id="15" name="b-note"/>
           <p:cNvSpPr txBox="1"/>
           <p:nvPr/>
         </p:nvSpPr>
@@ -5010,7 +7906,7 @@
             <a:pPr algn="r"/>
             <a:fld id="{F7021451-1387-4CA6-816F-3879F97B5CBC}" type="slidenum">
               <a:rPr b="0" lang="en-US"/>
-              <a:t>5</a:t>
+              <a:t>7</a:t>
             </a:fld>
             <a:endParaRPr lang="en-US"/>
           </a:p>
@@ -5024,9 +7920,9 @@
 </p:sld>
 </file>
 
-<file path=ppt/slides/slide6.xml><?xml version="1.0" encoding="utf-8"?>
+<file path=ppt/slides/slide8.xml><?xml version="1.0" encoding="utf-8"?>
 <p:sld xmlns:a="http://schemas.openxmlformats.org/drawingml/2006/main" xmlns:r="http://schemas.openxmlformats.org/officeDocument/2006/relationships" xmlns:p="http://schemas.openxmlformats.org/presentationml/2006/main">
-  <p:cSld name="Slide 6">
+  <p:cSld name="Slide 8">
     <p:spTree>
       <p:nvGrpSpPr>
         <p:cNvPr id="1" name=""/>
@@ -5073,7 +7969,7 @@
                   <a:schemeClr val="tx2"/>
                 </a:solidFill>
               </a:rPr>
-              <a:t>광학 요구 사양</a:t>
+              <a:t>광학 요구 사양 (A·B안 공통)</a:t>
             </a:r>
             <a:endParaRPr lang="en-US" sz="2600" dirty="0"/>
           </a:p>
@@ -5081,7 +7977,7 @@
       </p:sp>
       <p:graphicFrame>
         <p:nvGraphicFramePr>
-          <p:cNvPr id="7" name="optics-table"/>
+          <p:cNvPr id="9" name="optics-table"/>
           <p:cNvGraphicFramePr>
             <a:graphicFrameLocks noGrp="1"/>
           </p:cNvGraphicFramePr>
@@ -5120,127 +8016,6 @@
                             <a:schemeClr val="tx2"/>
                           </a:solidFill>
                         </a:rPr>
-                        <a:t>방식</a:t>
-                      </a:r>
-                      <a:endParaRPr lang="en-US" sz="1400" dirty="0"/>
-                    </a:p>
-                  </a:txBody>
-                  <a:tcPr marL="91440" marR="91440" marT="45720" marB="45720" anchor="ctr">
-                    <a:lnL w="9525" cap="flat" cmpd="sng" algn="ctr">
-                      <a:solidFill>
-                        <a:srgbClr val="BFD7DE"/>
-                      </a:solidFill>
-                      <a:prstDash val="solid"/>
-                      <a:round/>
-                      <a:headEnd type="none" w="med" len="med"/>
-                      <a:tailEnd type="none" w="med" len="med"/>
-                    </a:lnL>
-                    <a:lnR w="9525" cap="flat" cmpd="sng" algn="ctr">
-                      <a:solidFill>
-                        <a:srgbClr val="BFD7DE"/>
-                      </a:solidFill>
-                      <a:prstDash val="solid"/>
-                      <a:round/>
-                      <a:headEnd type="none" w="med" len="med"/>
-                      <a:tailEnd type="none" w="med" len="med"/>
-                    </a:lnR>
-                    <a:lnT w="9525" cap="flat" cmpd="sng" algn="ctr">
-                      <a:solidFill>
-                        <a:srgbClr val="BFD7DE"/>
-                      </a:solidFill>
-                      <a:prstDash val="solid"/>
-                      <a:round/>
-                      <a:headEnd type="none" w="med" len="med"/>
-                      <a:tailEnd type="none" w="med" len="med"/>
-                    </a:lnT>
-                    <a:lnB w="9525" cap="flat" cmpd="sng" algn="ctr">
-                      <a:solidFill>
-                        <a:srgbClr val="BFD7DE"/>
-                      </a:solidFill>
-                      <a:prstDash val="solid"/>
-                      <a:round/>
-                      <a:headEnd type="none" w="med" len="med"/>
-                      <a:tailEnd type="none" w="med" len="med"/>
-                    </a:lnB>
-                    <a:solidFill>
-                      <a:schemeClr val="bg2"/>
-                    </a:solidFill>
-                  </a:tcPr>
-                </a:tc>
-                <a:tc>
-                  <a:txBody>
-                    <a:bodyPr/>
-                    <a:lstStyle/>
-                    <a:p>
-                      <a:pPr indent="0" marL="0">
-                        <a:buNone/>
-                      </a:pPr>
-                      <a:r>
-                        <a:rPr lang="en-US" sz="1400" dirty="0">
-                          <a:solidFill>
-                            <a:schemeClr val="tx1"/>
-                          </a:solidFill>
-                        </a:rPr>
-                        <a:t>교체형 접사 렌즈 (IMX708 센서에 직접 결상)</a:t>
-                      </a:r>
-                      <a:endParaRPr lang="en-US" sz="1400" dirty="0"/>
-                    </a:p>
-                  </a:txBody>
-                  <a:tcPr marL="91440" marR="91440" marT="45720" marB="45720" anchor="ctr">
-                    <a:lnL w="9525" cap="flat" cmpd="sng" algn="ctr">
-                      <a:solidFill>
-                        <a:srgbClr val="BFD7DE"/>
-                      </a:solidFill>
-                      <a:prstDash val="solid"/>
-                      <a:round/>
-                      <a:headEnd type="none" w="med" len="med"/>
-                      <a:tailEnd type="none" w="med" len="med"/>
-                    </a:lnL>
-                    <a:lnR w="9525" cap="flat" cmpd="sng" algn="ctr">
-                      <a:solidFill>
-                        <a:srgbClr val="BFD7DE"/>
-                      </a:solidFill>
-                      <a:prstDash val="solid"/>
-                      <a:round/>
-                      <a:headEnd type="none" w="med" len="med"/>
-                      <a:tailEnd type="none" w="med" len="med"/>
-                    </a:lnR>
-                    <a:lnT w="9525" cap="flat" cmpd="sng" algn="ctr">
-                      <a:solidFill>
-                        <a:srgbClr val="BFD7DE"/>
-                      </a:solidFill>
-                      <a:prstDash val="solid"/>
-                      <a:round/>
-                      <a:headEnd type="none" w="med" len="med"/>
-                      <a:tailEnd type="none" w="med" len="med"/>
-                    </a:lnT>
-                    <a:lnB w="9525" cap="flat" cmpd="sng" algn="ctr">
-                      <a:solidFill>
-                        <a:srgbClr val="BFD7DE"/>
-                      </a:solidFill>
-                      <a:prstDash val="solid"/>
-                      <a:round/>
-                      <a:headEnd type="none" w="med" len="med"/>
-                      <a:tailEnd type="none" w="med" len="med"/>
-                    </a:lnB>
-                  </a:tcPr>
-                </a:tc>
-              </a:tr>
-              <a:tr h="420624">
-                <a:tc>
-                  <a:txBody>
-                    <a:bodyPr/>
-                    <a:lstStyle/>
-                    <a:p>
-                      <a:pPr indent="0" marL="0">
-                        <a:buNone/>
-                      </a:pPr>
-                      <a:r>
-                        <a:rPr lang="en-US" sz="1400" b="1" dirty="0">
-                          <a:solidFill>
-                            <a:schemeClr val="tx2"/>
-                          </a:solidFill>
-                        </a:rPr>
                         <a:t>촬영 범위 (FOV)</a:t>
                       </a:r>
                       <a:endParaRPr lang="en-US" sz="1400" dirty="0"/>
@@ -5362,7 +8137,7 @@
                             <a:schemeClr val="tx2"/>
                           </a:solidFill>
                         </a:rPr>
-                        <a:t>작업거리 (WD)</a:t>
+                        <a:t>자동초점</a:t>
                       </a:r>
                       <a:endParaRPr lang="en-US" sz="1400" dirty="0"/>
                     </a:p>
@@ -5423,7 +8198,128 @@
                             <a:schemeClr val="tx1"/>
                           </a:solidFill>
                         </a:rPr>
-                        <a:t>렌즈 앞면 ~ 피사체 20 mm</a:t>
+                        <a:t>필수 (A안: 기존 모듈 AF, B안: 새 VCM)</a:t>
+                      </a:r>
+                      <a:endParaRPr lang="en-US" sz="1400" dirty="0"/>
+                    </a:p>
+                  </a:txBody>
+                  <a:tcPr marL="91440" marR="91440" marT="45720" marB="45720" anchor="ctr">
+                    <a:lnL w="9525" cap="flat" cmpd="sng" algn="ctr">
+                      <a:solidFill>
+                        <a:srgbClr val="BFD7DE"/>
+                      </a:solidFill>
+                      <a:prstDash val="solid"/>
+                      <a:round/>
+                      <a:headEnd type="none" w="med" len="med"/>
+                      <a:tailEnd type="none" w="med" len="med"/>
+                    </a:lnL>
+                    <a:lnR w="9525" cap="flat" cmpd="sng" algn="ctr">
+                      <a:solidFill>
+                        <a:srgbClr val="BFD7DE"/>
+                      </a:solidFill>
+                      <a:prstDash val="solid"/>
+                      <a:round/>
+                      <a:headEnd type="none" w="med" len="med"/>
+                      <a:tailEnd type="none" w="med" len="med"/>
+                    </a:lnR>
+                    <a:lnT w="9525" cap="flat" cmpd="sng" algn="ctr">
+                      <a:solidFill>
+                        <a:srgbClr val="BFD7DE"/>
+                      </a:solidFill>
+                      <a:prstDash val="solid"/>
+                      <a:round/>
+                      <a:headEnd type="none" w="med" len="med"/>
+                      <a:tailEnd type="none" w="med" len="med"/>
+                    </a:lnT>
+                    <a:lnB w="9525" cap="flat" cmpd="sng" algn="ctr">
+                      <a:solidFill>
+                        <a:srgbClr val="BFD7DE"/>
+                      </a:solidFill>
+                      <a:prstDash val="solid"/>
+                      <a:round/>
+                      <a:headEnd type="none" w="med" len="med"/>
+                      <a:tailEnd type="none" w="med" len="med"/>
+                    </a:lnB>
+                  </a:tcPr>
+                </a:tc>
+              </a:tr>
+              <a:tr h="420624">
+                <a:tc>
+                  <a:txBody>
+                    <a:bodyPr/>
+                    <a:lstStyle/>
+                    <a:p>
+                      <a:pPr indent="0" marL="0">
+                        <a:buNone/>
+                      </a:pPr>
+                      <a:r>
+                        <a:rPr lang="en-US" sz="1400" b="1" dirty="0">
+                          <a:solidFill>
+                            <a:schemeClr val="tx2"/>
+                          </a:solidFill>
+                        </a:rPr>
+                        <a:t>작업거리 (WD)</a:t>
+                      </a:r>
+                      <a:endParaRPr lang="en-US" sz="1400" dirty="0"/>
+                    </a:p>
+                  </a:txBody>
+                  <a:tcPr marL="91440" marR="91440" marT="45720" marB="45720" anchor="ctr">
+                    <a:lnL w="9525" cap="flat" cmpd="sng" algn="ctr">
+                      <a:solidFill>
+                        <a:srgbClr val="BFD7DE"/>
+                      </a:solidFill>
+                      <a:prstDash val="solid"/>
+                      <a:round/>
+                      <a:headEnd type="none" w="med" len="med"/>
+                      <a:tailEnd type="none" w="med" len="med"/>
+                    </a:lnL>
+                    <a:lnR w="9525" cap="flat" cmpd="sng" algn="ctr">
+                      <a:solidFill>
+                        <a:srgbClr val="BFD7DE"/>
+                      </a:solidFill>
+                      <a:prstDash val="solid"/>
+                      <a:round/>
+                      <a:headEnd type="none" w="med" len="med"/>
+                      <a:tailEnd type="none" w="med" len="med"/>
+                    </a:lnR>
+                    <a:lnT w="9525" cap="flat" cmpd="sng" algn="ctr">
+                      <a:solidFill>
+                        <a:srgbClr val="BFD7DE"/>
+                      </a:solidFill>
+                      <a:prstDash val="solid"/>
+                      <a:round/>
+                      <a:headEnd type="none" w="med" len="med"/>
+                      <a:tailEnd type="none" w="med" len="med"/>
+                    </a:lnT>
+                    <a:lnB w="9525" cap="flat" cmpd="sng" algn="ctr">
+                      <a:solidFill>
+                        <a:srgbClr val="BFD7DE"/>
+                      </a:solidFill>
+                      <a:prstDash val="solid"/>
+                      <a:round/>
+                      <a:headEnd type="none" w="med" len="med"/>
+                      <a:tailEnd type="none" w="med" len="med"/>
+                    </a:lnB>
+                    <a:solidFill>
+                      <a:schemeClr val="bg2"/>
+                    </a:solidFill>
+                  </a:tcPr>
+                </a:tc>
+                <a:tc>
+                  <a:txBody>
+                    <a:bodyPr/>
+                    <a:lstStyle/>
+                    <a:p>
+                      <a:pPr indent="0" marL="0">
+                        <a:buNone/>
+                      </a:pPr>
+                      <a:r>
+                        <a:rPr lang="en-US" sz="1400" dirty="0">
+                          <a:solidFill>
+                            <a:schemeClr val="tx1"/>
+                          </a:solidFill>
+                        </a:rPr>
+                        <a:t>A안 약 7–8 mm (귀사 제안) / B안 20 mm</a:t>
                       </a:r>
                       <a:endParaRPr lang="en-US" sz="1400" dirty="0"/>
                     </a:p>
@@ -5544,7 +8440,7 @@
                             <a:schemeClr val="tx1"/>
                           </a:solidFill>
                         </a:rPr>
-                        <a:t>7.4 mm 이상 (센서 대각)</a:t>
+                        <a:t>B안 7.4 mm 이상 (센서 대각)</a:t>
                       </a:r>
                       <a:endParaRPr lang="en-US" sz="1400" dirty="0"/>
                     </a:p>
@@ -5786,7 +8682,7 @@
                             <a:schemeClr val="tx1"/>
                           </a:solidFill>
                         </a:rPr>
-                        <a:t>±0.25 mm 이상 희망 (유효 F값 약 F5–6, 귀사 제안)</a:t>
+                        <a:t>±0.25 mm 이상 희망 (귀사 제안)</a:t>
                       </a:r>
                       <a:endParaRPr lang="en-US" sz="1400" dirty="0"/>
                     </a:p>
@@ -6116,7 +9012,7 @@
             <a:pPr algn="r"/>
             <a:fld id="{F7021451-1387-4CA6-816F-3879F97B5CBC}" type="slidenum">
               <a:rPr b="0" lang="en-US"/>
-              <a:t>6</a:t>
+              <a:t>8</a:t>
             </a:fld>
             <a:endParaRPr lang="en-US"/>
           </a:p>
@@ -6130,9 +9026,9 @@
 </p:sld>
 </file>
 
-<file path=ppt/slides/slide7.xml><?xml version="1.0" encoding="utf-8"?>
+<file path=ppt/slides/slide9.xml><?xml version="1.0" encoding="utf-8"?>
 <p:sld xmlns:a="http://schemas.openxmlformats.org/drawingml/2006/main" xmlns:r="http://schemas.openxmlformats.org/officeDocument/2006/relationships" xmlns:p="http://schemas.openxmlformats.org/presentationml/2006/main">
-  <p:cSld name="Slide 7">
+  <p:cSld name="Slide 9">
     <p:spTree>
       <p:nvGrpSpPr>
         <p:cNvPr id="1" name=""/>
@@ -6297,7 +9193,7 @@
                   <a:schemeClr val="tx1"/>
                 </a:solidFill>
               </a:rPr>
-              <a:t>VCM 자동초점</a:t>
+              <a:t>자동초점 필수</a:t>
             </a:r>
             <a:endParaRPr lang="en-US" sz="1400" dirty="0"/>
           </a:p>
@@ -6315,7 +9211,7 @@
                   <a:schemeClr val="tx1"/>
                 </a:solidFill>
               </a:rPr>
-              <a:t>스트로크 0.3 mm 이상</a:t>
+              <a:t>A안: 기존 모듈 AF</a:t>
             </a:r>
             <a:endParaRPr lang="en-US" sz="1400" dirty="0"/>
           </a:p>
@@ -6333,7 +9229,7 @@
                   <a:schemeClr val="tx1"/>
                 </a:solidFill>
               </a:rPr>
-              <a:t>고정 초점 버전도 견적</a:t>
+              <a:t>B안: VCM 0.3 mm↑</a:t>
             </a:r>
             <a:endParaRPr lang="en-US" sz="1400" dirty="0"/>
           </a:p>
@@ -6659,7 +9555,7 @@
                   <a:schemeClr val="tx1"/>
                 </a:solidFill>
               </a:rPr>
-              <a:t>두피~센서 ≤ 35 mm</a:t>
+              <a:t>B안 전장 35 mm 이하</a:t>
             </a:r>
             <a:endParaRPr lang="en-US" sz="1400" dirty="0"/>
           </a:p>
@@ -6722,257 +9618,11 @@
             <a:pPr algn="r"/>
             <a:fld id="{F7021451-1387-4CA6-816F-3879F97B5CBC}" type="slidenum">
               <a:rPr b="0" lang="en-US"/>
-              <a:t>7</a:t>
+              <a:t>9</a:t>
             </a:fld>
             <a:endParaRPr lang="en-US"/>
           </a:p>
         </p:txBody>
-      </p:sp>
-    </p:spTree>
-  </p:cSld>
-  <p:clrMapOvr>
-    <a:masterClrMapping/>
-  </p:clrMapOvr>
-</p:sld>
-</file>
-
-<file path=ppt/slides/slide8.xml><?xml version="1.0" encoding="utf-8"?>
-<p:sld xmlns:a="http://schemas.openxmlformats.org/drawingml/2006/main" xmlns:r="http://schemas.openxmlformats.org/officeDocument/2006/relationships" xmlns:p="http://schemas.openxmlformats.org/presentationml/2006/main">
-  <p:cSld name="Slide 8">
-    <p:spTree>
-      <p:nvGrpSpPr>
-        <p:cNvPr id="1" name=""/>
-        <p:cNvGrpSpPr/>
-        <p:nvPr/>
-      </p:nvGrpSpPr>
-      <p:grpSpPr>
-        <a:xfrm>
-          <a:off x="0" y="0"/>
-          <a:ext cx="0" cy="0"/>
-          <a:chOff x="0" y="0"/>
-          <a:chExt cx="0" cy="0"/>
-        </a:xfrm>
-      </p:grpSpPr>
-      <p:sp>
-        <p:nvSpPr>
-          <p:cNvPr id="2" name="Text 0"/>
-          <p:cNvSpPr/>
-          <p:nvPr>
-            <p:ph idx="100" type="title" hasCustomPrompt="1"/>
-          </p:nvPr>
-        </p:nvSpPr>
-        <p:spPr>
-          <a:xfrm>
-            <a:off x="548640" y="457200"/>
-            <a:ext cx="8046720" cy="731520"/>
-          </a:xfrm>
-          <a:prstGeom prst="rect">
-            <a:avLst/>
-          </a:prstGeom>
-          <a:noFill/>
-          <a:ln/>
-        </p:spPr>
-        <p:txBody>
-          <a:bodyPr wrap="square" lIns="0" tIns="0" rIns="0" bIns="0" rtlCol="0" anchor="ctr"/>
-          <a:lstStyle/>
-          <a:p>
-            <a:pPr algn="l" indent="0" marL="0">
-              <a:buNone/>
-            </a:pPr>
-            <a:r>
-              <a:rPr lang="en-US" sz="3000" b="1" dirty="0">
-                <a:solidFill>
-                  <a:schemeClr val="bg1"/>
-                </a:solidFill>
-              </a:rPr>
-              <a:t>회신 요청 사항</a:t>
-            </a:r>
-            <a:endParaRPr lang="en-US" sz="3000" dirty="0"/>
-          </a:p>
-        </p:txBody>
-      </p:sp>
-      <p:sp>
-        <p:nvSpPr>
-          <p:cNvPr id="3" name="reply-list"/>
-          <p:cNvSpPr txBox="1"/>
-          <p:nvPr/>
-        </p:nvSpPr>
-        <p:spPr>
-          <a:xfrm>
-            <a:off x="548640" y="1417320"/>
-            <a:ext cx="6035040" cy="2926080"/>
-          </a:xfrm>
-          <a:prstGeom prst="rect">
-            <a:avLst/>
-          </a:prstGeom>
-          <a:noFill/>
-          <a:ln/>
-        </p:spPr>
-        <p:txBody>
-          <a:bodyPr wrap="square" lIns="0" tIns="0" rIns="0" bIns="0" rtlCol="0" anchor="t"/>
-          <a:lstStyle/>
-          <a:p>
-            <a:pPr marL="342900" indent="-342900">
-              <a:spcAft>
-                <a:spcPts val="1000"/>
-              </a:spcAft>
-              <a:buSzPct val="100000"/>
-              <a:buFont typeface="+mj-lt"/>
-              <a:buAutoNum type="arabicPeriod" startAt="1"/>
-            </a:pPr>
-            <a:r>
-              <a:rPr lang="en-US" sz="1600" dirty="0">
-                <a:solidFill>
-                  <a:schemeClr val="bg1"/>
-                </a:solidFill>
-              </a:rPr>
-              <a:t>설계 가능 여부와 제안 사양 (F값, MTF, 전장)</a:t>
-            </a:r>
-            <a:endParaRPr lang="en-US" sz="1600" dirty="0"/>
-          </a:p>
-          <a:p>
-            <a:pPr marL="342900" indent="-342900">
-              <a:spcAft>
-                <a:spcPts val="1000"/>
-              </a:spcAft>
-              <a:buSzPct val="100000"/>
-              <a:buFont typeface="+mj-lt"/>
-              <a:buAutoNum type="arabicPeriod" startAt="1"/>
-            </a:pPr>
-            <a:r>
-              <a:rPr lang="en-US" sz="1600" dirty="0">
-                <a:solidFill>
-                  <a:schemeClr val="bg1"/>
-                </a:solidFill>
-              </a:rPr>
-              <a:t>렌즈 데이터시트 및 도면</a:t>
-            </a:r>
-            <a:endParaRPr lang="en-US" sz="1600" dirty="0"/>
-          </a:p>
-          <a:p>
-            <a:pPr marL="342900" indent="-342900">
-              <a:spcAft>
-                <a:spcPts val="1000"/>
-              </a:spcAft>
-              <a:buSzPct val="100000"/>
-              <a:buFont typeface="+mj-lt"/>
-              <a:buAutoNum type="arabicPeriod" startAt="1"/>
-            </a:pPr>
-            <a:r>
-              <a:rPr lang="en-US" sz="1600" dirty="0">
-                <a:solidFill>
-                  <a:schemeClr val="bg1"/>
-                </a:solidFill>
-              </a:rPr>
-              <a:t>샘플: 수량 3–5개, 샘플 비용, 샘플 납기 (한국 배송 포함)</a:t>
-            </a:r>
-            <a:endParaRPr lang="en-US" sz="1600" dirty="0"/>
-          </a:p>
-          <a:p>
-            <a:pPr marL="342900" indent="-342900">
-              <a:spcAft>
-                <a:spcPts val="1000"/>
-              </a:spcAft>
-              <a:buSzPct val="100000"/>
-              <a:buFont typeface="+mj-lt"/>
-              <a:buAutoNum type="arabicPeriod" startAt="1"/>
-            </a:pPr>
-            <a:r>
-              <a:rPr lang="en-US" sz="1600" dirty="0">
-                <a:solidFill>
-                  <a:schemeClr val="bg1"/>
-                </a:solidFill>
-              </a:rPr>
-              <a:t>양산 단가 (1,000개 / 5,000개 기준)</a:t>
-            </a:r>
-            <a:endParaRPr lang="en-US" sz="1600" dirty="0"/>
-          </a:p>
-          <a:p>
-            <a:pPr marL="342900" indent="-342900">
-              <a:spcAft>
-                <a:spcPts val="1000"/>
-              </a:spcAft>
-              <a:buSzPct val="100000"/>
-              <a:buFont typeface="+mj-lt"/>
-              <a:buAutoNum type="arabicPeriod" startAt="1"/>
-            </a:pPr>
-            <a:r>
-              <a:rPr lang="en-US" sz="1600" dirty="0">
-                <a:solidFill>
-                  <a:schemeClr val="bg1"/>
-                </a:solidFill>
-              </a:rPr>
-              <a:t>VCM AF 포함 카메라 모듈 일괄 제작 가능 여부</a:t>
-            </a:r>
-            <a:endParaRPr lang="en-US" sz="1600" dirty="0"/>
-          </a:p>
-        </p:txBody>
-      </p:sp>
-      <p:sp>
-        <p:nvSpPr>
-          <p:cNvPr id="4" name="end-ring0"/>
-          <p:cNvSpPr/>
-          <p:nvPr/>
-        </p:nvSpPr>
-        <p:spPr>
-          <a:xfrm>
-            <a:off x="7132320" y="2148840"/>
-            <a:ext cx="1554480" cy="1554480"/>
-          </a:xfrm>
-          <a:prstGeom prst="ellipse">
-            <a:avLst/>
-          </a:prstGeom>
-          <a:ln w="31750">
-            <a:solidFill>
-              <a:srgbClr val="BFD7DE"/>
-            </a:solidFill>
-            <a:prstDash val="solid"/>
-          </a:ln>
-        </p:spPr>
-      </p:sp>
-      <p:sp>
-        <p:nvSpPr>
-          <p:cNvPr id="5" name="end-ring1"/>
-          <p:cNvSpPr/>
-          <p:nvPr/>
-        </p:nvSpPr>
-        <p:spPr>
-          <a:xfrm>
-            <a:off x="7349947" y="2366467"/>
-            <a:ext cx="1119226" cy="1119226"/>
-          </a:xfrm>
-          <a:prstGeom prst="ellipse">
-            <a:avLst/>
-          </a:prstGeom>
-          <a:ln w="25400">
-            <a:solidFill>
-              <a:srgbClr val="BFD7DE"/>
-            </a:solidFill>
-            <a:prstDash val="solid"/>
-          </a:ln>
-        </p:spPr>
-      </p:sp>
-      <p:sp>
-        <p:nvSpPr>
-          <p:cNvPr id="6" name="end-ring2"/>
-          <p:cNvSpPr/>
-          <p:nvPr/>
-        </p:nvSpPr>
-        <p:spPr>
-          <a:xfrm>
-            <a:off x="7567574" y="2584094"/>
-            <a:ext cx="683971" cy="683971"/>
-          </a:xfrm>
-          <a:prstGeom prst="ellipse">
-            <a:avLst/>
-          </a:prstGeom>
-          <a:ln w="19050">
-            <a:solidFill>
-              <a:srgbClr val="BFD7DE"/>
-            </a:solidFill>
-            <a:prstDash val="solid"/>
-          </a:ln>
-        </p:spPr>
       </p:sp>
     </p:spTree>
   </p:cSld>

--- a/docs/lens-rfq-imx708.pptx
+++ b/docs/lens-rfq-imx708.pptx
@@ -116,32 +116,32 @@
   <p:extLst>
     <p:ext uri="{521415D9-36F7-43E2-AB2F-B90AF26B5E84}">
       <p14:sectionLst xmlns:p14="http://schemas.microsoft.com/office/powerpoint/2010/main">
-        <p14:section name="개요" id="{31ac6f4c-95f7-11e3-7e62-cbabf51b15ba}">
+        <p14:section name="개요" id="{a55d2fce-c463-6b6d-6783-6f9b53778362}">
           <p14:sldIdLst>
             <p14:sldId id="256"/>
             <p14:sldId id="257"/>
           </p14:sldIdLst>
         </p14:section>
-        <p14:section name="참고 자료" id="{fe5cad44-4b1d-e7d8-30eb-28a5b61eb3ab}">
+        <p14:section name="참고 자료" id="{03e7461d-eb19-2e3c-0851-7457ed22526d}">
           <p14:sldIdLst>
             <p14:sldId id="258"/>
             <p14:sldId id="259"/>
           </p14:sldIdLst>
         </p14:section>
-        <p14:section name="개발 방식" id="{ae7fba96-fa76-61f0-1402-d92124bedaca}">
+        <p14:section name="개발 방식" id="{f62bc693-ba46-d52b-f7a3-b1348f60bf21}">
           <p14:sldIdLst>
             <p14:sldId id="260"/>
             <p14:sldId id="261"/>
             <p14:sldId id="262"/>
           </p14:sldIdLst>
         </p14:section>
-        <p14:section name="요구 사양" id="{da2d22a1-62ca-9ac3-fa7b-d8f029ff266c}">
+        <p14:section name="요구 사양" id="{c9832335-b01c-d447-9489-919e92c63e0a}">
           <p14:sldIdLst>
             <p14:sldId id="263"/>
             <p14:sldId id="264"/>
           </p14:sldIdLst>
         </p14:section>
-        <p14:section name="회신 요청" id="{6b9a53c6-f7d5-20b6-a545-2261725f39a0}">
+        <p14:section name="회신 요청" id="{15a8a1e5-0308-9df3-f6d8-9d2b82739315}">
           <p14:sldIdLst>
             <p14:sldId id="265"/>
           </p14:sldIdLst>
@@ -1416,11 +1416,11 @@
 
 <file path=ppt/slideLayouts/slideLayout2.xml><?xml version="1.0" encoding="utf-8"?>
 <p:sldLayout xmlns:a="http://schemas.openxmlformats.org/drawingml/2006/main" xmlns:r="http://schemas.openxmlformats.org/officeDocument/2006/relationships" xmlns:p="http://schemas.openxmlformats.org/presentationml/2006/main" preserve="1">
-  <p:cSld name="TITLE_DARK">
+  <p:cSld name="TITLE_LIGHT">
     <p:bg>
       <p:bgPr>
         <a:solidFill>
-          <a:schemeClr val="tx2"/>
+          <a:schemeClr val="bg1"/>
         </a:solidFill>
       </p:bgPr>
     </p:bg>
@@ -1464,7 +1464,7 @@
               <a:buNone/>
               <a:defRPr lang="en-US" sz="3200" b="1" dirty="0">
                 <a:solidFill>
-                  <a:schemeClr val="bg1"/>
+                  <a:schemeClr val="tx2"/>
                 </a:solidFill>
               </a:defRPr>
             </a:lvl1pPr>
@@ -1503,7 +1503,7 @@
               <a:buNone/>
               <a:defRPr lang="en-US" sz="1600" dirty="0">
                 <a:solidFill>
-                  <a:schemeClr val="accent6"/>
+                  <a:schemeClr val="accent5"/>
                 </a:solidFill>
               </a:defRPr>
             </a:lvl1pPr>
@@ -1678,11 +1678,11 @@
 
 <file path=ppt/slideLayouts/slideLayout4.xml><?xml version="1.0" encoding="utf-8"?>
 <p:sldLayout xmlns:a="http://schemas.openxmlformats.org/drawingml/2006/main" xmlns:r="http://schemas.openxmlformats.org/officeDocument/2006/relationships" xmlns:p="http://schemas.openxmlformats.org/presentationml/2006/main" preserve="1">
-  <p:cSld name="END_DARK">
+  <p:cSld name="END_LIGHT">
     <p:bg>
       <p:bgPr>
         <a:solidFill>
-          <a:schemeClr val="tx2"/>
+          <a:schemeClr val="bg1"/>
         </a:solidFill>
       </p:bgPr>
     </p:bg>
@@ -1726,7 +1726,7 @@
               <a:buNone/>
               <a:defRPr lang="en-US" sz="3000" b="1" dirty="0">
                 <a:solidFill>
-                  <a:schemeClr val="bg1"/>
+                  <a:schemeClr val="tx2"/>
                 </a:solidFill>
               </a:defRPr>
             </a:lvl1pPr>
@@ -2118,7 +2118,7 @@
             <a:r>
               <a:rPr lang="en-US" sz="3200" b="1" dirty="0">
                 <a:solidFill>
-                  <a:schemeClr val="bg1"/>
+                  <a:schemeClr val="tx2"/>
                 </a:solidFill>
               </a:rPr>
               <a:t>두피 스캐너용 자동초점 접사 렌즈 제작 요청</a:t>
@@ -2156,7 +2156,7 @@
             <a:r>
               <a:rPr lang="en-US" sz="1600" dirty="0">
                 <a:solidFill>
-                  <a:schemeClr val="accent6"/>
+                  <a:schemeClr val="accent5"/>
                 </a:solidFill>
               </a:rPr>
               <a:t>IMX708 센서 · 촬영 범위 6.0 × 6.0 mm</a:t>
@@ -2170,10 +2170,10 @@
             <a:r>
               <a:rPr lang="en-US" sz="1600" dirty="0">
                 <a:solidFill>
-                  <a:schemeClr val="accent6"/>
+                  <a:schemeClr val="accent5"/>
                 </a:solidFill>
               </a:rPr>
-              <a:t>A안 덧대기 / B안 렌즈 교체</a:t>
+              <a:t>카메라 모듈 ~ 피사체 20 mm</a:t>
             </a:r>
             <a:endParaRPr lang="en-US" sz="1600" dirty="0"/>
           </a:p>
@@ -2184,10 +2184,10 @@
             <a:r>
               <a:rPr lang="en-US" sz="1600" dirty="0">
                 <a:solidFill>
-                  <a:schemeClr val="accent6"/>
+                  <a:schemeClr val="accent5"/>
                 </a:solidFill>
               </a:rPr>
-              <a:t>2026. 10</a:t>
+              <a:t>A안 덧대기 / B안 렌즈 교체 · 2026. 10</a:t>
             </a:r>
             <a:endParaRPr lang="en-US" sz="1600" dirty="0"/>
           </a:p>
@@ -2209,7 +2209,7 @@
           </a:prstGeom>
           <a:ln w="31750">
             <a:solidFill>
-              <a:srgbClr val="BFD7DE"/>
+              <a:srgbClr val="1F7A8C"/>
             </a:solidFill>
             <a:prstDash val="solid"/>
           </a:ln>
@@ -2231,7 +2231,7 @@
           </a:prstGeom>
           <a:ln w="25400">
             <a:solidFill>
-              <a:srgbClr val="BFD7DE"/>
+              <a:srgbClr val="1F7A8C"/>
             </a:solidFill>
             <a:prstDash val="solid"/>
           </a:ln>
@@ -2253,7 +2253,7 @@
           </a:prstGeom>
           <a:ln w="19050">
             <a:solidFill>
-              <a:srgbClr val="BFD7DE"/>
+              <a:srgbClr val="1F7A8C"/>
             </a:solidFill>
             <a:prstDash val="solid"/>
           </a:ln>
@@ -2333,7 +2333,7 @@
             <a:r>
               <a:rPr lang="en-US" sz="3000" b="1" dirty="0">
                 <a:solidFill>
-                  <a:schemeClr val="bg1"/>
+                  <a:schemeClr val="tx2"/>
                 </a:solidFill>
               </a:rPr>
               <a:t>회신 요청 사항 (A·B안 각각)</a:t>
@@ -2374,7 +2374,7 @@
             <a:r>
               <a:rPr lang="en-US" sz="1600" dirty="0">
                 <a:solidFill>
-                  <a:schemeClr val="bg1"/>
+                  <a:schemeClr val="tx1"/>
                 </a:solidFill>
               </a:rPr>
               <a:t>설계 가능 여부와 제안 사양 (F값, MTF, 전장)</a:t>
@@ -2393,7 +2393,7 @@
             <a:r>
               <a:rPr lang="en-US" sz="1600" dirty="0">
                 <a:solidFill>
-                  <a:schemeClr val="bg1"/>
+                  <a:schemeClr val="tx1"/>
                 </a:solidFill>
               </a:rPr>
               <a:t>렌즈 데이터시트 및 도면</a:t>
@@ -2412,7 +2412,7 @@
             <a:r>
               <a:rPr lang="en-US" sz="1600" dirty="0">
                 <a:solidFill>
-                  <a:schemeClr val="bg1"/>
+                  <a:schemeClr val="tx1"/>
                 </a:solidFill>
               </a:rPr>
               <a:t>샘플: 수량 3–5개, 샘플 비용, 샘플 납기 (한국 배송 포함)</a:t>
@@ -2431,7 +2431,7 @@
             <a:r>
               <a:rPr lang="en-US" sz="1600" dirty="0">
                 <a:solidFill>
-                  <a:schemeClr val="bg1"/>
+                  <a:schemeClr val="tx1"/>
                 </a:solidFill>
               </a:rPr>
               <a:t>양산 단가 (1,000개 / 5,000개 기준)</a:t>
@@ -2450,7 +2450,7 @@
             <a:r>
               <a:rPr lang="en-US" sz="1600" dirty="0">
                 <a:solidFill>
-                  <a:schemeClr val="bg1"/>
+                  <a:schemeClr val="tx1"/>
                 </a:solidFill>
               </a:rPr>
               <a:t>개발 기간과 개발비 (B안은 VCM 카메라 모듈 포함)</a:t>
@@ -2469,7 +2469,7 @@
             <a:r>
               <a:rPr lang="en-US" sz="1600" dirty="0">
                 <a:solidFill>
-                  <a:schemeClr val="bg1"/>
+                  <a:schemeClr val="tx1"/>
                 </a:solidFill>
               </a:rPr>
               <a:t>귀사가 추천하는 방식과 그 이유</a:t>
@@ -2494,7 +2494,7 @@
           </a:prstGeom>
           <a:ln w="31750">
             <a:solidFill>
-              <a:srgbClr val="BFD7DE"/>
+              <a:srgbClr val="1F7A8C"/>
             </a:solidFill>
             <a:prstDash val="solid"/>
           </a:ln>
@@ -2516,7 +2516,7 @@
           </a:prstGeom>
           <a:ln w="25400">
             <a:solidFill>
-              <a:srgbClr val="BFD7DE"/>
+              <a:srgbClr val="1F7A8C"/>
             </a:solidFill>
             <a:prstDash val="solid"/>
           </a:ln>
@@ -2538,7 +2538,7 @@
           </a:prstGeom>
           <a:ln w="19050">
             <a:solidFill>
-              <a:srgbClr val="BFD7DE"/>
+              <a:srgbClr val="1F7A8C"/>
             </a:solidFill>
             <a:prstDash val="solid"/>
           </a:ln>
@@ -2616,7 +2616,7 @@
         <p:spPr>
           <a:xfrm>
             <a:off x="457200" y="1051560"/>
-            <a:ext cx="2560320" cy="1554480"/>
+            <a:ext cx="1920240" cy="1554480"/>
           </a:xfrm>
           <a:prstGeom prst="roundRect">
             <a:avLst>
@@ -2637,8 +2637,8 @@
         </p:nvSpPr>
         <p:spPr>
           <a:xfrm>
-            <a:off x="640080" y="1234440"/>
-            <a:ext cx="2194560" cy="731520"/>
+            <a:off x="566928" y="1234440"/>
+            <a:ext cx="1737360" cy="731520"/>
           </a:xfrm>
           <a:prstGeom prst="rect">
             <a:avLst/>
@@ -2654,14 +2654,14 @@
               <a:buNone/>
             </a:pPr>
             <a:r>
-              <a:rPr lang="en-US" sz="2400" b="1" dirty="0">
+              <a:rPr lang="en-US" sz="2000" b="1" dirty="0">
                 <a:solidFill>
                   <a:schemeClr val="tx2"/>
                 </a:solidFill>
               </a:rPr>
               <a:t>6.0×6.0 mm</a:t>
             </a:r>
-            <a:endParaRPr lang="en-US" sz="2400" dirty="0"/>
+            <a:endParaRPr lang="en-US" sz="2000" dirty="0"/>
           </a:p>
         </p:txBody>
       </p:sp>
@@ -2673,8 +2673,8 @@
         </p:nvSpPr>
         <p:spPr>
           <a:xfrm>
-            <a:off x="640080" y="2011680"/>
-            <a:ext cx="2194560" cy="411480"/>
+            <a:off x="566928" y="2011680"/>
+            <a:ext cx="1737360" cy="457200"/>
           </a:xfrm>
           <a:prstGeom prst="rect">
             <a:avLst/>
@@ -2690,14 +2690,14 @@
               <a:buNone/>
             </a:pPr>
             <a:r>
-              <a:rPr lang="en-US" sz="1300" dirty="0">
+              <a:rPr lang="en-US" sz="1200" dirty="0">
                 <a:solidFill>
                   <a:schemeClr val="accent5"/>
                 </a:solidFill>
               </a:rPr>
               <a:t>두피 촬영 범위 (이상)</a:t>
             </a:r>
-            <a:endParaRPr lang="en-US" sz="1300" dirty="0"/>
+            <a:endParaRPr lang="en-US" sz="1200" dirty="0"/>
           </a:p>
         </p:txBody>
       </p:sp>
@@ -2709,8 +2709,8 @@
         </p:nvSpPr>
         <p:spPr>
           <a:xfrm>
-            <a:off x="3291840" y="1051560"/>
-            <a:ext cx="2560320" cy="1554480"/>
+            <a:off x="2560320" y="1051560"/>
+            <a:ext cx="1920240" cy="1554480"/>
           </a:xfrm>
           <a:prstGeom prst="roundRect">
             <a:avLst>
@@ -2731,8 +2731,8 @@
         </p:nvSpPr>
         <p:spPr>
           <a:xfrm>
-            <a:off x="3474720" y="1234440"/>
-            <a:ext cx="2194560" cy="731520"/>
+            <a:off x="2670048" y="1234440"/>
+            <a:ext cx="1737360" cy="731520"/>
           </a:xfrm>
           <a:prstGeom prst="rect">
             <a:avLst/>
@@ -2748,14 +2748,14 @@
               <a:buNone/>
             </a:pPr>
             <a:r>
-              <a:rPr lang="en-US" sz="2400" b="1" dirty="0">
+              <a:rPr lang="en-US" sz="2000" b="1" dirty="0">
                 <a:solidFill>
                   <a:schemeClr val="tx2"/>
                 </a:solidFill>
               </a:rPr>
-              <a:t>자동초점</a:t>
+              <a:t>20 mm</a:t>
             </a:r>
-            <a:endParaRPr lang="en-US" sz="2400" dirty="0"/>
+            <a:endParaRPr lang="en-US" sz="2000" dirty="0"/>
           </a:p>
         </p:txBody>
       </p:sp>
@@ -2767,8 +2767,8 @@
         </p:nvSpPr>
         <p:spPr>
           <a:xfrm>
-            <a:off x="3474720" y="2011680"/>
-            <a:ext cx="2194560" cy="411480"/>
+            <a:off x="2670048" y="2011680"/>
+            <a:ext cx="1737360" cy="457200"/>
           </a:xfrm>
           <a:prstGeom prst="rect">
             <a:avLst/>
@@ -2784,14 +2784,14 @@
               <a:buNone/>
             </a:pPr>
             <a:r>
-              <a:rPr lang="en-US" sz="1300" dirty="0">
+              <a:rPr lang="en-US" sz="1200" dirty="0">
                 <a:solidFill>
                   <a:schemeClr val="accent5"/>
                 </a:solidFill>
               </a:rPr>
-              <a:t>AF 필수 (두 방식 모두)</a:t>
+              <a:t>카메라 모듈 ~ 피사체</a:t>
             </a:r>
-            <a:endParaRPr lang="en-US" sz="1300" dirty="0"/>
+            <a:endParaRPr lang="en-US" sz="1200" dirty="0"/>
           </a:p>
         </p:txBody>
       </p:sp>
@@ -2803,8 +2803,8 @@
         </p:nvSpPr>
         <p:spPr>
           <a:xfrm>
-            <a:off x="6126480" y="1051560"/>
-            <a:ext cx="2560320" cy="1554480"/>
+            <a:off x="4663440" y="1051560"/>
+            <a:ext cx="1920240" cy="1554480"/>
           </a:xfrm>
           <a:prstGeom prst="roundRect">
             <a:avLst>
@@ -2825,8 +2825,8 @@
         </p:nvSpPr>
         <p:spPr>
           <a:xfrm>
-            <a:off x="6309360" y="1234440"/>
-            <a:ext cx="2194560" cy="731520"/>
+            <a:off x="4773168" y="1234440"/>
+            <a:ext cx="1737360" cy="731520"/>
           </a:xfrm>
           <a:prstGeom prst="rect">
             <a:avLst/>
@@ -2842,14 +2842,14 @@
               <a:buNone/>
             </a:pPr>
             <a:r>
-              <a:rPr lang="en-US" sz="2400" b="1" dirty="0">
+              <a:rPr lang="en-US" sz="2000" b="1" dirty="0">
                 <a:solidFill>
                   <a:schemeClr val="tx2"/>
                 </a:solidFill>
               </a:rPr>
-              <a:t>IMX708</a:t>
+              <a:t>자동초점</a:t>
             </a:r>
-            <a:endParaRPr lang="en-US" sz="2400" dirty="0"/>
+            <a:endParaRPr lang="en-US" sz="2000" dirty="0"/>
           </a:p>
         </p:txBody>
       </p:sp>
@@ -2861,8 +2861,8 @@
         </p:nvSpPr>
         <p:spPr>
           <a:xfrm>
-            <a:off x="6309360" y="2011680"/>
-            <a:ext cx="2194560" cy="411480"/>
+            <a:off x="4773168" y="2011680"/>
+            <a:ext cx="1737360" cy="457200"/>
           </a:xfrm>
           <a:prstGeom prst="rect">
             <a:avLst/>
@@ -2878,20 +2878,114 @@
               <a:buNone/>
             </a:pPr>
             <a:r>
-              <a:rPr lang="en-US" sz="1300" dirty="0">
+              <a:rPr lang="en-US" sz="1200" dirty="0">
+                <a:solidFill>
+                  <a:schemeClr val="accent5"/>
+                </a:solidFill>
+              </a:rPr>
+              <a:t>A·B안 모두 필수</a:t>
+            </a:r>
+            <a:endParaRPr lang="en-US" sz="1200" dirty="0"/>
+          </a:p>
+        </p:txBody>
+      </p:sp>
+      <p:sp>
+        <p:nvSpPr>
+          <p:cNvPr id="12" name="stat-card-3"/>
+          <p:cNvSpPr/>
+          <p:nvPr/>
+        </p:nvSpPr>
+        <p:spPr>
+          <a:xfrm>
+            <a:off x="6766560" y="1051560"/>
+            <a:ext cx="1920240" cy="1554480"/>
+          </a:xfrm>
+          <a:prstGeom prst="roundRect">
+            <a:avLst>
+              <a:gd name="adj" fmla="val 7059"/>
+            </a:avLst>
+          </a:prstGeom>
+          <a:solidFill>
+            <a:schemeClr val="bg2"/>
+          </a:solidFill>
+          <a:ln/>
+        </p:spPr>
+      </p:sp>
+      <p:sp>
+        <p:nvSpPr>
+          <p:cNvPr id="13" name="stat-big-3"/>
+          <p:cNvSpPr txBox="1"/>
+          <p:nvPr/>
+        </p:nvSpPr>
+        <p:spPr>
+          <a:xfrm>
+            <a:off x="6876288" y="1234440"/>
+            <a:ext cx="1737360" cy="731520"/>
+          </a:xfrm>
+          <a:prstGeom prst="rect">
+            <a:avLst/>
+          </a:prstGeom>
+          <a:noFill/>
+          <a:ln/>
+        </p:spPr>
+        <p:txBody>
+          <a:bodyPr wrap="square" lIns="0" tIns="0" rIns="0" bIns="0" rtlCol="0" anchor="ctr"/>
+          <a:lstStyle/>
+          <a:p>
+            <a:pPr indent="0" marL="0">
+              <a:buNone/>
+            </a:pPr>
+            <a:r>
+              <a:rPr lang="en-US" sz="2000" b="1" dirty="0">
+                <a:solidFill>
+                  <a:schemeClr val="tx2"/>
+                </a:solidFill>
+              </a:rPr>
+              <a:t>IMX708</a:t>
+            </a:r>
+            <a:endParaRPr lang="en-US" sz="2000" dirty="0"/>
+          </a:p>
+        </p:txBody>
+      </p:sp>
+      <p:sp>
+        <p:nvSpPr>
+          <p:cNvPr id="14" name="stat-label-3"/>
+          <p:cNvSpPr txBox="1"/>
+          <p:nvPr/>
+        </p:nvSpPr>
+        <p:spPr>
+          <a:xfrm>
+            <a:off x="6876288" y="2011680"/>
+            <a:ext cx="1737360" cy="457200"/>
+          </a:xfrm>
+          <a:prstGeom prst="rect">
+            <a:avLst/>
+          </a:prstGeom>
+          <a:noFill/>
+          <a:ln/>
+        </p:spPr>
+        <p:txBody>
+          <a:bodyPr wrap="square" lIns="0" tIns="0" rIns="0" bIns="0" rtlCol="0" anchor="ctr"/>
+          <a:lstStyle/>
+          <a:p>
+            <a:pPr indent="0" marL="0">
+              <a:buNone/>
+            </a:pPr>
+            <a:r>
+              <a:rPr lang="en-US" sz="1200" dirty="0">
                 <a:solidFill>
                   <a:schemeClr val="accent5"/>
                 </a:solidFill>
               </a:rPr>
               <a:t>적용 센서 (1/2.43")</a:t>
             </a:r>
-            <a:endParaRPr lang="en-US" sz="1300" dirty="0"/>
+            <a:endParaRPr lang="en-US" sz="1200" dirty="0"/>
           </a:p>
         </p:txBody>
       </p:sp>
       <p:sp>
         <p:nvSpPr>
-          <p:cNvPr id="12" name="summary-text"/>
+          <p:cNvPr id="15" name="summary-text"/>
           <p:cNvSpPr txBox="1"/>
           <p:nvPr/>
         </p:nvSpPr>
@@ -4616,7 +4710,7 @@
                 <a:gridCol w="3108960"/>
                 <a:gridCol w="3108960"/>
               </a:tblGrid>
-              <a:tr h="402336">
+              <a:tr h="365760">
                 <a:tc>
                   <a:txBody>
                     <a:bodyPr/>
@@ -4793,7 +4887,7 @@
                   </a:tcPr>
                 </a:tc>
               </a:tr>
-              <a:tr h="402336">
+              <a:tr h="365760">
                 <a:tc>
                   <a:txBody>
                     <a:bodyPr/>
@@ -4972,7 +5066,7 @@
                   </a:tcPr>
                 </a:tc>
               </a:tr>
-              <a:tr h="402336">
+              <a:tr h="365760">
                 <a:tc>
                   <a:txBody>
                     <a:bodyPr/>
@@ -5151,7 +5245,7 @@
                   </a:tcPr>
                 </a:tc>
               </a:tr>
-              <a:tr h="402336">
+              <a:tr h="365760">
                 <a:tc>
                   <a:txBody>
                     <a:bodyPr/>
@@ -5166,7 +5260,7 @@
                             <a:schemeClr val="tx2"/>
                           </a:solidFill>
                         </a:rPr>
-                        <a:t>작업거리</a:t>
+                        <a:t>모듈 ~ 피사체</a:t>
                       </a:r>
                       <a:endParaRPr lang="en-US" sz="1300" dirty="0"/>
                     </a:p>
@@ -5227,7 +5321,7 @@
                             <a:schemeClr val="tx1"/>
                           </a:solidFill>
                         </a:rPr>
-                        <a:t>약 7–8 mm</a:t>
+                        <a:t>20 mm</a:t>
                       </a:r>
                       <a:endParaRPr lang="en-US" sz="1300" dirty="0"/>
                     </a:p>
@@ -5330,7 +5424,186 @@
                   </a:tcPr>
                 </a:tc>
               </a:tr>
-              <a:tr h="402336">
+              <a:tr h="365760">
+                <a:tc>
+                  <a:txBody>
+                    <a:bodyPr/>
+                    <a:lstStyle/>
+                    <a:p>
+                      <a:pPr indent="0" marL="0">
+                        <a:buNone/>
+                      </a:pPr>
+                      <a:r>
+                        <a:rPr lang="en-US" sz="1300" b="1" dirty="0">
+                          <a:solidFill>
+                            <a:schemeClr val="tx2"/>
+                          </a:solidFill>
+                        </a:rPr>
+                        <a:t>렌즈 앞 작업거리</a:t>
+                      </a:r>
+                      <a:endParaRPr lang="en-US" sz="1300" dirty="0"/>
+                    </a:p>
+                  </a:txBody>
+                  <a:tcPr marL="91440" marR="91440" marT="45720" marB="45720" anchor="ctr">
+                    <a:lnL w="9525" cap="flat" cmpd="sng" algn="ctr">
+                      <a:solidFill>
+                        <a:srgbClr val="BFD7DE"/>
+                      </a:solidFill>
+                      <a:prstDash val="solid"/>
+                      <a:round/>
+                      <a:headEnd type="none" w="med" len="med"/>
+                      <a:tailEnd type="none" w="med" len="med"/>
+                    </a:lnL>
+                    <a:lnR w="9525" cap="flat" cmpd="sng" algn="ctr">
+                      <a:solidFill>
+                        <a:srgbClr val="BFD7DE"/>
+                      </a:solidFill>
+                      <a:prstDash val="solid"/>
+                      <a:round/>
+                      <a:headEnd type="none" w="med" len="med"/>
+                      <a:tailEnd type="none" w="med" len="med"/>
+                    </a:lnR>
+                    <a:lnT w="9525" cap="flat" cmpd="sng" algn="ctr">
+                      <a:solidFill>
+                        <a:srgbClr val="BFD7DE"/>
+                      </a:solidFill>
+                      <a:prstDash val="solid"/>
+                      <a:round/>
+                      <a:headEnd type="none" w="med" len="med"/>
+                      <a:tailEnd type="none" w="med" len="med"/>
+                    </a:lnT>
+                    <a:lnB w="9525" cap="flat" cmpd="sng" algn="ctr">
+                      <a:solidFill>
+                        <a:srgbClr val="BFD7DE"/>
+                      </a:solidFill>
+                      <a:prstDash val="solid"/>
+                      <a:round/>
+                      <a:headEnd type="none" w="med" len="med"/>
+                      <a:tailEnd type="none" w="med" len="med"/>
+                    </a:lnB>
+                    <a:solidFill>
+                      <a:schemeClr val="bg2"/>
+                    </a:solidFill>
+                  </a:tcPr>
+                </a:tc>
+                <a:tc>
+                  <a:txBody>
+                    <a:bodyPr/>
+                    <a:lstStyle/>
+                    <a:p>
+                      <a:pPr indent="0" marL="0">
+                        <a:buNone/>
+                      </a:pPr>
+                      <a:r>
+                        <a:rPr lang="en-US" sz="1300" dirty="0">
+                          <a:solidFill>
+                            <a:schemeClr val="tx1"/>
+                          </a:solidFill>
+                        </a:rPr>
+                        <a:t>약 7.5 mm (덧대는 렌즈 앞)</a:t>
+                      </a:r>
+                      <a:endParaRPr lang="en-US" sz="1300" dirty="0"/>
+                    </a:p>
+                  </a:txBody>
+                  <a:tcPr marL="91440" marR="91440" marT="45720" marB="45720" anchor="ctr">
+                    <a:lnL w="9525" cap="flat" cmpd="sng" algn="ctr">
+                      <a:solidFill>
+                        <a:srgbClr val="BFD7DE"/>
+                      </a:solidFill>
+                      <a:prstDash val="solid"/>
+                      <a:round/>
+                      <a:headEnd type="none" w="med" len="med"/>
+                      <a:tailEnd type="none" w="med" len="med"/>
+                    </a:lnL>
+                    <a:lnR w="9525" cap="flat" cmpd="sng" algn="ctr">
+                      <a:solidFill>
+                        <a:srgbClr val="BFD7DE"/>
+                      </a:solidFill>
+                      <a:prstDash val="solid"/>
+                      <a:round/>
+                      <a:headEnd type="none" w="med" len="med"/>
+                      <a:tailEnd type="none" w="med" len="med"/>
+                    </a:lnR>
+                    <a:lnT w="9525" cap="flat" cmpd="sng" algn="ctr">
+                      <a:solidFill>
+                        <a:srgbClr val="BFD7DE"/>
+                      </a:solidFill>
+                      <a:prstDash val="solid"/>
+                      <a:round/>
+                      <a:headEnd type="none" w="med" len="med"/>
+                      <a:tailEnd type="none" w="med" len="med"/>
+                    </a:lnT>
+                    <a:lnB w="9525" cap="flat" cmpd="sng" algn="ctr">
+                      <a:solidFill>
+                        <a:srgbClr val="BFD7DE"/>
+                      </a:solidFill>
+                      <a:prstDash val="solid"/>
+                      <a:round/>
+                      <a:headEnd type="none" w="med" len="med"/>
+                      <a:tailEnd type="none" w="med" len="med"/>
+                    </a:lnB>
+                  </a:tcPr>
+                </a:tc>
+                <a:tc>
+                  <a:txBody>
+                    <a:bodyPr/>
+                    <a:lstStyle/>
+                    <a:p>
+                      <a:pPr indent="0" marL="0">
+                        <a:buNone/>
+                      </a:pPr>
+                      <a:r>
+                        <a:rPr lang="en-US" sz="1300" dirty="0">
+                          <a:solidFill>
+                            <a:schemeClr val="tx1"/>
+                          </a:solidFill>
+                        </a:rPr>
+                        <a:t>20 mm (모듈 앞면 = 렌즈 앞)</a:t>
+                      </a:r>
+                      <a:endParaRPr lang="en-US" sz="1300" dirty="0"/>
+                    </a:p>
+                  </a:txBody>
+                  <a:tcPr marL="91440" marR="91440" marT="45720" marB="45720" anchor="ctr">
+                    <a:lnL w="9525" cap="flat" cmpd="sng" algn="ctr">
+                      <a:solidFill>
+                        <a:srgbClr val="BFD7DE"/>
+                      </a:solidFill>
+                      <a:prstDash val="solid"/>
+                      <a:round/>
+                      <a:headEnd type="none" w="med" len="med"/>
+                      <a:tailEnd type="none" w="med" len="med"/>
+                    </a:lnL>
+                    <a:lnR w="9525" cap="flat" cmpd="sng" algn="ctr">
+                      <a:solidFill>
+                        <a:srgbClr val="BFD7DE"/>
+                      </a:solidFill>
+                      <a:prstDash val="solid"/>
+                      <a:round/>
+                      <a:headEnd type="none" w="med" len="med"/>
+                      <a:tailEnd type="none" w="med" len="med"/>
+                    </a:lnR>
+                    <a:lnT w="9525" cap="flat" cmpd="sng" algn="ctr">
+                      <a:solidFill>
+                        <a:srgbClr val="BFD7DE"/>
+                      </a:solidFill>
+                      <a:prstDash val="solid"/>
+                      <a:round/>
+                      <a:headEnd type="none" w="med" len="med"/>
+                      <a:tailEnd type="none" w="med" len="med"/>
+                    </a:lnT>
+                    <a:lnB w="9525" cap="flat" cmpd="sng" algn="ctr">
+                      <a:solidFill>
+                        <a:srgbClr val="BFD7DE"/>
+                      </a:solidFill>
+                      <a:prstDash val="solid"/>
+                      <a:round/>
+                      <a:headEnd type="none" w="med" len="med"/>
+                      <a:tailEnd type="none" w="med" len="med"/>
+                    </a:lnB>
+                  </a:tcPr>
+                </a:tc>
+              </a:tr>
+              <a:tr h="365760">
                 <a:tc>
                   <a:txBody>
                     <a:bodyPr/>
@@ -5509,7 +5782,7 @@
                   </a:tcPr>
                 </a:tc>
               </a:tr>
-              <a:tr h="402336">
+              <a:tr h="365760">
                 <a:tc>
                   <a:txBody>
                     <a:bodyPr/>
@@ -5585,7 +5858,7 @@
                             <a:schemeClr val="tx1"/>
                           </a:solidFill>
                         </a:rPr>
-                        <a:t>기존 모듈 사용, 개발 빠름</a:t>
+                        <a:t>기존 모듈과 AF 그대로, 개발 빠름</a:t>
                       </a:r>
                       <a:endParaRPr lang="en-US" sz="1300" dirty="0"/>
                     </a:p>
@@ -5643,7 +5916,7 @@
                             <a:schemeClr val="tx1"/>
                           </a:solidFill>
                         </a:rPr>
-                        <a:t>작업거리 길어 조명 배치 쉬움</a:t>
+                        <a:t>렌즈 앞 공간 넓어 조명 배치 쉬움</a:t>
                       </a:r>
                       <a:endParaRPr lang="en-US" sz="1300" dirty="0"/>
                     </a:p>
@@ -5688,7 +5961,7 @@
                   </a:tcPr>
                 </a:tc>
               </a:tr>
-              <a:tr h="402336">
+              <a:tr h="365760">
                 <a:tc>
                   <a:txBody>
                     <a:bodyPr/>
@@ -5764,7 +6037,7 @@
                             <a:schemeClr val="tx1"/>
                           </a:solidFill>
                         </a:rPr>
-                        <a:t>작업거리 짧아 조명 공간 좁음</a:t>
+                        <a:t>덧대는 렌즈 지름 약 14 mm 필요</a:t>
                       </a:r>
                       <a:endParaRPr lang="en-US" sz="1300" dirty="0"/>
                     </a:p>
@@ -5901,7 +6174,7 @@
                   <a:schemeClr val="accent5"/>
                 </a:solidFill>
               </a:rPr>
-              <a:t>※ A안은 Camera Module 3 표준형(75°) 기준입니다. Wide(120°)형은 작업거리가 약 4 mm로 짧아져 적합하지 않습니다.</a:t>
+              <a:t>※ A안은 Camera Module 3 표준형(75°) 기준입니다. Wide(120°)형은 덧대는 렌즈가 훨씬 강해져야 해서 적합하지 않습니다.</a:t>
             </a:r>
             <a:endParaRPr lang="en-US" sz="1100" dirty="0"/>
           </a:p>
@@ -6017,14 +6290,75 @@
       </p:sp>
       <p:sp>
         <p:nvSpPr>
-          <p:cNvPr id="3" name="a-scalp"/>
+          <p:cNvPr id="3" name="a-total"/>
           <p:cNvSpPr/>
           <p:nvPr/>
         </p:nvSpPr>
         <p:spPr>
           <a:xfrm>
-            <a:off x="1097280" y="1005840"/>
-            <a:ext cx="0" cy="1188720"/>
+            <a:off x="868680" y="1325880"/>
+            <a:ext cx="4773168" cy="0"/>
+          </a:xfrm>
+          <a:prstGeom prst="line">
+            <a:avLst/>
+          </a:prstGeom>
+          <a:noFill/>
+          <a:ln w="15875">
+            <a:solidFill>
+              <a:schemeClr val="accent5"/>
+            </a:solidFill>
+            <a:prstDash val="solid"/>
+            <a:headEnd type="triangle"/>
+            <a:tailEnd type="triangle"/>
+          </a:ln>
+        </p:spPr>
+      </p:sp>
+      <p:sp>
+        <p:nvSpPr>
+          <p:cNvPr id="4" name="a-total-label"/>
+          <p:cNvSpPr txBox="1"/>
+          <p:nvPr/>
+        </p:nvSpPr>
+        <p:spPr>
+          <a:xfrm>
+            <a:off x="594360" y="941832"/>
+            <a:ext cx="5321808" cy="292608"/>
+          </a:xfrm>
+          <a:prstGeom prst="rect">
+            <a:avLst/>
+          </a:prstGeom>
+          <a:noFill/>
+          <a:ln/>
+        </p:spPr>
+        <p:txBody>
+          <a:bodyPr wrap="square" lIns="0" tIns="0" rIns="0" bIns="0" rtlCol="0" anchor="ctr"/>
+          <a:lstStyle/>
+          <a:p>
+            <a:pPr algn="ctr" indent="0" marL="0">
+              <a:buNone/>
+            </a:pPr>
+            <a:r>
+              <a:rPr lang="en-US" sz="1300" b="1" dirty="0">
+                <a:solidFill>
+                  <a:schemeClr val="tx1"/>
+                </a:solidFill>
+              </a:rPr>
+              <a:t>카메라 모듈 ~ 피사체 20 mm</a:t>
+            </a:r>
+            <a:endParaRPr lang="en-US" sz="1300" dirty="0"/>
+          </a:p>
+        </p:txBody>
+      </p:sp>
+      <p:sp>
+        <p:nvSpPr>
+          <p:cNvPr id="5" name="a-scalp"/>
+          <p:cNvSpPr/>
+          <p:nvPr/>
+        </p:nvSpPr>
+        <p:spPr>
+          <a:xfrm>
+            <a:off x="822960" y="1371600"/>
+            <a:ext cx="0" cy="1097280"/>
           </a:xfrm>
           <a:prstGeom prst="line">
             <a:avLst/>
@@ -6040,13 +6374,13 @@
       </p:sp>
       <p:sp>
         <p:nvSpPr>
-          <p:cNvPr id="4" name="a-scalp-label"/>
+          <p:cNvPr id="6" name="a-scalp-label"/>
           <p:cNvSpPr txBox="1"/>
           <p:nvPr/>
         </p:nvSpPr>
         <p:spPr>
           <a:xfrm>
-            <a:off x="731520" y="2240280"/>
+            <a:off x="457200" y="2487168"/>
             <a:ext cx="731520" cy="274320"/>
           </a:xfrm>
           <a:prstGeom prst="rect">
@@ -6076,14 +6410,14 @@
       </p:sp>
       <p:sp>
         <p:nvSpPr>
-          <p:cNvPr id="5" name="a-addon"/>
+          <p:cNvPr id="7" name="a-addon"/>
           <p:cNvSpPr/>
           <p:nvPr/>
         </p:nvSpPr>
         <p:spPr>
           <a:xfrm>
-            <a:off x="4206240" y="1051560"/>
-            <a:ext cx="329184" cy="1097280"/>
+            <a:off x="2743200" y="1417320"/>
+            <a:ext cx="365760" cy="1005840"/>
           </a:xfrm>
           <a:prstGeom prst="ellipse">
             <a:avLst/>
@@ -6103,13 +6437,13 @@
       </p:sp>
       <p:sp>
         <p:nvSpPr>
-          <p:cNvPr id="6" name="a-addon-label"/>
+          <p:cNvPr id="8" name="a-addon-label"/>
           <p:cNvSpPr txBox="1"/>
           <p:nvPr/>
         </p:nvSpPr>
         <p:spPr>
           <a:xfrm>
-            <a:off x="3685032" y="2240280"/>
+            <a:off x="2240280" y="2487168"/>
             <a:ext cx="1371600" cy="274320"/>
           </a:xfrm>
           <a:prstGeom prst="rect">
@@ -6139,18 +6473,18 @@
       </p:sp>
       <p:sp>
         <p:nvSpPr>
-          <p:cNvPr id="7" name="a-module"/>
+          <p:cNvPr id="9" name="a-module"/>
           <p:cNvSpPr/>
           <p:nvPr/>
         </p:nvSpPr>
         <p:spPr>
           <a:xfrm>
-            <a:off x="5669280" y="960120"/>
-            <a:ext cx="2377440" cy="1280160"/>
+            <a:off x="5669280" y="1371600"/>
+            <a:ext cx="2377440" cy="1097280"/>
           </a:xfrm>
           <a:prstGeom prst="roundRect">
             <a:avLst>
-              <a:gd name="adj" fmla="val 7143"/>
+              <a:gd name="adj" fmla="val 8333"/>
             </a:avLst>
           </a:prstGeom>
           <a:solidFill>
@@ -6166,14 +6500,14 @@
       </p:sp>
       <p:sp>
         <p:nvSpPr>
-          <p:cNvPr id="8" name="a-module-label"/>
+          <p:cNvPr id="10" name="a-module-label"/>
           <p:cNvSpPr txBox="1"/>
           <p:nvPr/>
         </p:nvSpPr>
         <p:spPr>
           <a:xfrm>
-            <a:off x="5669280" y="960120"/>
-            <a:ext cx="2377440" cy="1280160"/>
+            <a:off x="5669280" y="1371600"/>
+            <a:ext cx="2377440" cy="1097280"/>
           </a:xfrm>
           <a:prstGeom prst="rect">
             <a:avLst/>
@@ -6216,14 +6550,14 @@
       </p:sp>
       <p:sp>
         <p:nvSpPr>
-          <p:cNvPr id="9" name="a-wd"/>
+          <p:cNvPr id="11" name="a-wd"/>
           <p:cNvSpPr/>
           <p:nvPr/>
         </p:nvSpPr>
         <p:spPr>
           <a:xfrm>
-            <a:off x="1143000" y="1600200"/>
-            <a:ext cx="3035808" cy="0"/>
+            <a:off x="868680" y="1920240"/>
+            <a:ext cx="1847088" cy="0"/>
           </a:xfrm>
           <a:prstGeom prst="line">
             <a:avLst/>
@@ -6241,14 +6575,14 @@
       </p:sp>
       <p:sp>
         <p:nvSpPr>
-          <p:cNvPr id="10" name="a-wd-label"/>
+          <p:cNvPr id="12" name="a-wd-label"/>
           <p:cNvSpPr txBox="1"/>
           <p:nvPr/>
         </p:nvSpPr>
         <p:spPr>
           <a:xfrm>
-            <a:off x="868680" y="1216152"/>
-            <a:ext cx="3584448" cy="292608"/>
+            <a:off x="594360" y="1536192"/>
+            <a:ext cx="2395728" cy="292608"/>
           </a:xfrm>
           <a:prstGeom prst="rect">
             <a:avLst/>
@@ -6269,7 +6603,7 @@
                   <a:schemeClr val="tx1"/>
                 </a:solidFill>
               </a:rPr>
-              <a:t>작업거리 약 7–8 mm</a:t>
+              <a:t>약 7.5 mm</a:t>
             </a:r>
             <a:endParaRPr lang="en-US" sz="1300" dirty="0"/>
           </a:p>
@@ -6277,14 +6611,14 @@
       </p:sp>
       <p:sp>
         <p:nvSpPr>
-          <p:cNvPr id="11" name="a-gap"/>
+          <p:cNvPr id="13" name="a-gap"/>
           <p:cNvSpPr/>
           <p:nvPr/>
         </p:nvSpPr>
         <p:spPr>
           <a:xfrm>
-            <a:off x="4562856" y="1600200"/>
-            <a:ext cx="1078992" cy="0"/>
+            <a:off x="3136392" y="1920240"/>
+            <a:ext cx="2505456" cy="0"/>
           </a:xfrm>
           <a:prstGeom prst="line">
             <a:avLst/>
@@ -6302,14 +6636,14 @@
       </p:sp>
       <p:sp>
         <p:nvSpPr>
-          <p:cNvPr id="12" name="a-gap-label"/>
+          <p:cNvPr id="14" name="a-gap-label"/>
           <p:cNvSpPr txBox="1"/>
           <p:nvPr/>
         </p:nvSpPr>
         <p:spPr>
           <a:xfrm>
-            <a:off x="4288536" y="1216152"/>
-            <a:ext cx="1627632" cy="292608"/>
+            <a:off x="2862072" y="1536192"/>
+            <a:ext cx="3054096" cy="292608"/>
           </a:xfrm>
           <a:prstGeom prst="rect">
             <a:avLst/>
@@ -6330,7 +6664,7 @@
                   <a:schemeClr val="tx1"/>
                 </a:solidFill>
               </a:rPr>
-              <a:t>1–2 mm</a:t>
+              <a:t>약 10 mm</a:t>
             </a:r>
             <a:endParaRPr lang="en-US" sz="1300" dirty="0"/>
           </a:p>
@@ -6351,7 +6685,7 @@
           </p:nvPr>
         </p:nvGraphicFramePr>
         <p:xfrm>
-          <a:off x="457200" y="2697480"/>
+          <a:off x="457200" y="2816352"/>
           <a:ext cx="8229600" cy="914400"/>
         </p:xfrm>
         <a:graphic>
@@ -6359,10 +6693,10 @@
             <a:tbl>
               <a:tblPr/>
               <a:tblGrid>
-                <a:gridCol w="2377440"/>
-                <a:gridCol w="5852160"/>
+                <a:gridCol w="2194560"/>
+                <a:gridCol w="6035040"/>
               </a:tblGrid>
-              <a:tr h="365760">
+              <a:tr h="347472">
                 <a:tc>
                   <a:txBody>
                     <a:bodyPr/>
@@ -6438,7 +6772,7 @@
                             <a:schemeClr val="tx1"/>
                           </a:solidFill>
                         </a:rPr>
-                        <a:t>약 7.8 mm (기존 렌즈 초점거리 4.74 mm 기준)</a:t>
+                        <a:t>약 7.8 mm (기존 렌즈 4.74 mm 기준), 1매/2매 구성은 귀사 제안</a:t>
                       </a:r>
                       <a:endParaRPr lang="en-US" sz="1300" dirty="0"/>
                     </a:p>
@@ -6483,7 +6817,128 @@
                   </a:tcPr>
                 </a:tc>
               </a:tr>
-              <a:tr h="365760">
+              <a:tr h="347472">
+                <a:tc>
+                  <a:txBody>
+                    <a:bodyPr/>
+                    <a:lstStyle/>
+                    <a:p>
+                      <a:pPr indent="0" marL="0">
+                        <a:buNone/>
+                      </a:pPr>
+                      <a:r>
+                        <a:rPr lang="en-US" sz="1300" b="1" dirty="0">
+                          <a:solidFill>
+                            <a:schemeClr val="tx2"/>
+                          </a:solidFill>
+                        </a:rPr>
+                        <a:t>거리 배분</a:t>
+                      </a:r>
+                      <a:endParaRPr lang="en-US" sz="1300" dirty="0"/>
+                    </a:p>
+                  </a:txBody>
+                  <a:tcPr marL="91440" marR="91440" marT="45720" marB="45720" anchor="ctr">
+                    <a:lnL w="9525" cap="flat" cmpd="sng" algn="ctr">
+                      <a:solidFill>
+                        <a:srgbClr val="BFD7DE"/>
+                      </a:solidFill>
+                      <a:prstDash val="solid"/>
+                      <a:round/>
+                      <a:headEnd type="none" w="med" len="med"/>
+                      <a:tailEnd type="none" w="med" len="med"/>
+                    </a:lnL>
+                    <a:lnR w="9525" cap="flat" cmpd="sng" algn="ctr">
+                      <a:solidFill>
+                        <a:srgbClr val="BFD7DE"/>
+                      </a:solidFill>
+                      <a:prstDash val="solid"/>
+                      <a:round/>
+                      <a:headEnd type="none" w="med" len="med"/>
+                      <a:tailEnd type="none" w="med" len="med"/>
+                    </a:lnR>
+                    <a:lnT w="9525" cap="flat" cmpd="sng" algn="ctr">
+                      <a:solidFill>
+                        <a:srgbClr val="BFD7DE"/>
+                      </a:solidFill>
+                      <a:prstDash val="solid"/>
+                      <a:round/>
+                      <a:headEnd type="none" w="med" len="med"/>
+                      <a:tailEnd type="none" w="med" len="med"/>
+                    </a:lnT>
+                    <a:lnB w="9525" cap="flat" cmpd="sng" algn="ctr">
+                      <a:solidFill>
+                        <a:srgbClr val="BFD7DE"/>
+                      </a:solidFill>
+                      <a:prstDash val="solid"/>
+                      <a:round/>
+                      <a:headEnd type="none" w="med" len="med"/>
+                      <a:tailEnd type="none" w="med" len="med"/>
+                    </a:lnB>
+                    <a:solidFill>
+                      <a:schemeClr val="bg2"/>
+                    </a:solidFill>
+                  </a:tcPr>
+                </a:tc>
+                <a:tc>
+                  <a:txBody>
+                    <a:bodyPr/>
+                    <a:lstStyle/>
+                    <a:p>
+                      <a:pPr indent="0" marL="0">
+                        <a:buNone/>
+                      </a:pPr>
+                      <a:r>
+                        <a:rPr lang="en-US" sz="1300" dirty="0">
+                          <a:solidFill>
+                            <a:schemeClr val="tx1"/>
+                          </a:solidFill>
+                        </a:rPr>
+                        <a:t>모듈~렌즈 약 10 mm + 렌즈 두께 약 2.5 mm + 작업거리 약 7.5 mm</a:t>
+                      </a:r>
+                      <a:endParaRPr lang="en-US" sz="1300" dirty="0"/>
+                    </a:p>
+                  </a:txBody>
+                  <a:tcPr marL="91440" marR="91440" marT="45720" marB="45720" anchor="ctr">
+                    <a:lnL w="9525" cap="flat" cmpd="sng" algn="ctr">
+                      <a:solidFill>
+                        <a:srgbClr val="BFD7DE"/>
+                      </a:solidFill>
+                      <a:prstDash val="solid"/>
+                      <a:round/>
+                      <a:headEnd type="none" w="med" len="med"/>
+                      <a:tailEnd type="none" w="med" len="med"/>
+                    </a:lnL>
+                    <a:lnR w="9525" cap="flat" cmpd="sng" algn="ctr">
+                      <a:solidFill>
+                        <a:srgbClr val="BFD7DE"/>
+                      </a:solidFill>
+                      <a:prstDash val="solid"/>
+                      <a:round/>
+                      <a:headEnd type="none" w="med" len="med"/>
+                      <a:tailEnd type="none" w="med" len="med"/>
+                    </a:lnR>
+                    <a:lnT w="9525" cap="flat" cmpd="sng" algn="ctr">
+                      <a:solidFill>
+                        <a:srgbClr val="BFD7DE"/>
+                      </a:solidFill>
+                      <a:prstDash val="solid"/>
+                      <a:round/>
+                      <a:headEnd type="none" w="med" len="med"/>
+                      <a:tailEnd type="none" w="med" len="med"/>
+                    </a:lnT>
+                    <a:lnB w="9525" cap="flat" cmpd="sng" algn="ctr">
+                      <a:solidFill>
+                        <a:srgbClr val="BFD7DE"/>
+                      </a:solidFill>
+                      <a:prstDash val="solid"/>
+                      <a:round/>
+                      <a:headEnd type="none" w="med" len="med"/>
+                      <a:tailEnd type="none" w="med" len="med"/>
+                    </a:lnB>
+                  </a:tcPr>
+                </a:tc>
+              </a:tr>
+              <a:tr h="347472">
                 <a:tc>
                   <a:txBody>
                     <a:bodyPr/>
@@ -6559,7 +7014,7 @@
                             <a:schemeClr val="tx1"/>
                           </a:solidFill>
                         </a:rPr>
-                        <a:t>6 mm 이상 (기존 렌즈 화각 광선이 잘리지 않도록)</a:t>
+                        <a:t>약 14 mm 이상 (모듈과 10 mm 떨어져 광선이 퍼짐)</a:t>
                       </a:r>
                       <a:endParaRPr lang="en-US" sz="1300" dirty="0"/>
                     </a:p>
@@ -6604,7 +7059,7 @@
                   </a:tcPr>
                 </a:tc>
               </a:tr>
-              <a:tr h="365760">
+              <a:tr h="347472">
                 <a:tc>
                   <a:txBody>
                     <a:bodyPr/>
@@ -6725,134 +7180,13 @@
                   </a:tcPr>
                 </a:tc>
               </a:tr>
-              <a:tr h="365760">
-                <a:tc>
-                  <a:txBody>
-                    <a:bodyPr/>
-                    <a:lstStyle/>
-                    <a:p>
-                      <a:pPr indent="0" marL="0">
-                        <a:buNone/>
-                      </a:pPr>
-                      <a:r>
-                        <a:rPr lang="en-US" sz="1300" b="1" dirty="0">
-                          <a:solidFill>
-                            <a:schemeClr val="tx2"/>
-                          </a:solidFill>
-                        </a:rPr>
-                        <a:t>전체 촬영 범위</a:t>
-                      </a:r>
-                      <a:endParaRPr lang="en-US" sz="1300" dirty="0"/>
-                    </a:p>
-                  </a:txBody>
-                  <a:tcPr marL="91440" marR="91440" marT="45720" marB="45720" anchor="ctr">
-                    <a:lnL w="9525" cap="flat" cmpd="sng" algn="ctr">
-                      <a:solidFill>
-                        <a:srgbClr val="BFD7DE"/>
-                      </a:solidFill>
-                      <a:prstDash val="solid"/>
-                      <a:round/>
-                      <a:headEnd type="none" w="med" len="med"/>
-                      <a:tailEnd type="none" w="med" len="med"/>
-                    </a:lnL>
-                    <a:lnR w="9525" cap="flat" cmpd="sng" algn="ctr">
-                      <a:solidFill>
-                        <a:srgbClr val="BFD7DE"/>
-                      </a:solidFill>
-                      <a:prstDash val="solid"/>
-                      <a:round/>
-                      <a:headEnd type="none" w="med" len="med"/>
-                      <a:tailEnd type="none" w="med" len="med"/>
-                    </a:lnR>
-                    <a:lnT w="9525" cap="flat" cmpd="sng" algn="ctr">
-                      <a:solidFill>
-                        <a:srgbClr val="BFD7DE"/>
-                      </a:solidFill>
-                      <a:prstDash val="solid"/>
-                      <a:round/>
-                      <a:headEnd type="none" w="med" len="med"/>
-                      <a:tailEnd type="none" w="med" len="med"/>
-                    </a:lnT>
-                    <a:lnB w="9525" cap="flat" cmpd="sng" algn="ctr">
-                      <a:solidFill>
-                        <a:srgbClr val="BFD7DE"/>
-                      </a:solidFill>
-                      <a:prstDash val="solid"/>
-                      <a:round/>
-                      <a:headEnd type="none" w="med" len="med"/>
-                      <a:tailEnd type="none" w="med" len="med"/>
-                    </a:lnB>
-                    <a:solidFill>
-                      <a:schemeClr val="bg2"/>
-                    </a:solidFill>
-                  </a:tcPr>
-                </a:tc>
-                <a:tc>
-                  <a:txBody>
-                    <a:bodyPr/>
-                    <a:lstStyle/>
-                    <a:p>
-                      <a:pPr indent="0" marL="0">
-                        <a:buNone/>
-                      </a:pPr>
-                      <a:r>
-                        <a:rPr lang="en-US" sz="1300" dirty="0">
-                          <a:solidFill>
-                            <a:schemeClr val="tx1"/>
-                          </a:solidFill>
-                        </a:rPr>
-                        <a:t>10.6 × 6.0 mm → 가운데 6.0 × 6.0 mm 사용</a:t>
-                      </a:r>
-                      <a:endParaRPr lang="en-US" sz="1300" dirty="0"/>
-                    </a:p>
-                  </a:txBody>
-                  <a:tcPr marL="91440" marR="91440" marT="45720" marB="45720" anchor="ctr">
-                    <a:lnL w="9525" cap="flat" cmpd="sng" algn="ctr">
-                      <a:solidFill>
-                        <a:srgbClr val="BFD7DE"/>
-                      </a:solidFill>
-                      <a:prstDash val="solid"/>
-                      <a:round/>
-                      <a:headEnd type="none" w="med" len="med"/>
-                      <a:tailEnd type="none" w="med" len="med"/>
-                    </a:lnL>
-                    <a:lnR w="9525" cap="flat" cmpd="sng" algn="ctr">
-                      <a:solidFill>
-                        <a:srgbClr val="BFD7DE"/>
-                      </a:solidFill>
-                      <a:prstDash val="solid"/>
-                      <a:round/>
-                      <a:headEnd type="none" w="med" len="med"/>
-                      <a:tailEnd type="none" w="med" len="med"/>
-                    </a:lnR>
-                    <a:lnT w="9525" cap="flat" cmpd="sng" algn="ctr">
-                      <a:solidFill>
-                        <a:srgbClr val="BFD7DE"/>
-                      </a:solidFill>
-                      <a:prstDash val="solid"/>
-                      <a:round/>
-                      <a:headEnd type="none" w="med" len="med"/>
-                      <a:tailEnd type="none" w="med" len="med"/>
-                    </a:lnT>
-                    <a:lnB w="9525" cap="flat" cmpd="sng" algn="ctr">
-                      <a:solidFill>
-                        <a:srgbClr val="BFD7DE"/>
-                      </a:solidFill>
-                      <a:prstDash val="solid"/>
-                      <a:round/>
-                      <a:headEnd type="none" w="med" len="med"/>
-                      <a:tailEnd type="none" w="med" len="med"/>
-                    </a:lnB>
-                  </a:tcPr>
-                </a:tc>
-              </a:tr>
             </a:tbl>
           </a:graphicData>
         </a:graphic>
       </p:graphicFrame>
       <p:sp>
         <p:nvSpPr>
-          <p:cNvPr id="14" name="a-note"/>
+          <p:cNvPr id="16" name="a-note"/>
           <p:cNvSpPr txBox="1"/>
           <p:nvPr/>
         </p:nvSpPr>
@@ -6880,7 +7214,7 @@
                   <a:schemeClr val="accent5"/>
                 </a:solidFill>
               </a:rPr>
-              <a:t>※ 얇은 렌즈 근사값입니다. 덧대는 렌즈를 모듈에 고정하는 홀더도 함께 제안 바랍니다.</a:t>
+              <a:t>※ 얇은 렌즈 근사값입니다. 렌즈 위치·구성과 모듈 고정 홀더는 귀사 제안을 따릅니다.</a:t>
             </a:r>
             <a:endParaRPr lang="en-US" sz="1000" dirty="0"/>
           </a:p>
@@ -7002,8 +7336,8 @@
         </p:nvSpPr>
         <p:spPr>
           <a:xfrm>
-            <a:off x="822960" y="1005840"/>
-            <a:ext cx="0" cy="1188720"/>
+            <a:off x="822960" y="1280160"/>
+            <a:ext cx="0" cy="1097280"/>
           </a:xfrm>
           <a:prstGeom prst="line">
             <a:avLst/>
@@ -7025,7 +7359,7 @@
         </p:nvSpPr>
         <p:spPr>
           <a:xfrm>
-            <a:off x="457200" y="2240280"/>
+            <a:off x="457200" y="2450592"/>
             <a:ext cx="731520" cy="274320"/>
           </a:xfrm>
           <a:prstGeom prst="rect">
@@ -7055,20 +7389,83 @@
       </p:sp>
       <p:sp>
         <p:nvSpPr>
-          <p:cNvPr id="5" name="b-vcm"/>
+          <p:cNvPr id="5" name="b-module"/>
           <p:cNvSpPr/>
           <p:nvPr/>
         </p:nvSpPr>
         <p:spPr>
           <a:xfrm>
-            <a:off x="4160520" y="914400"/>
-            <a:ext cx="731520" cy="1371600"/>
+            <a:off x="4206240" y="1051560"/>
+            <a:ext cx="3840480" cy="1554480"/>
+          </a:xfrm>
+          <a:prstGeom prst="roundRect">
+            <a:avLst>
+              <a:gd name="adj" fmla="val 5882"/>
+            </a:avLst>
+          </a:prstGeom>
+          <a:solidFill>
+            <a:schemeClr val="bg2"/>
+          </a:solidFill>
+          <a:ln w="19050">
+            <a:solidFill>
+              <a:schemeClr val="accent2"/>
+            </a:solidFill>
+            <a:prstDash val="solid"/>
+          </a:ln>
+        </p:spPr>
+      </p:sp>
+      <p:sp>
+        <p:nvSpPr>
+          <p:cNvPr id="6" name="b-module-label"/>
+          <p:cNvSpPr txBox="1"/>
+          <p:nvPr/>
+        </p:nvSpPr>
+        <p:spPr>
+          <a:xfrm>
+            <a:off x="5212080" y="1097280"/>
+            <a:ext cx="1828800" cy="274320"/>
+          </a:xfrm>
+          <a:prstGeom prst="rect">
+            <a:avLst/>
+          </a:prstGeom>
+          <a:noFill/>
+          <a:ln/>
+        </p:spPr>
+        <p:txBody>
+          <a:bodyPr wrap="square" lIns="0" tIns="0" rIns="0" bIns="0" rtlCol="0" anchor="ctr"/>
+          <a:lstStyle/>
+          <a:p>
+            <a:pPr algn="ctr" indent="0" marL="0">
+              <a:buNone/>
+            </a:pPr>
+            <a:r>
+              <a:rPr lang="en-US" sz="1200" b="1" dirty="0">
+                <a:solidFill>
+                  <a:schemeClr val="accent2"/>
+                </a:solidFill>
+              </a:rPr>
+              <a:t>새 카메라 모듈</a:t>
+            </a:r>
+            <a:endParaRPr lang="en-US" sz="1200" dirty="0"/>
+          </a:p>
+        </p:txBody>
+      </p:sp>
+      <p:sp>
+        <p:nvSpPr>
+          <p:cNvPr id="7" name="b-vcm"/>
+          <p:cNvSpPr/>
+          <p:nvPr/>
+        </p:nvSpPr>
+        <p:spPr>
+          <a:xfrm>
+            <a:off x="4343400" y="1234440"/>
+            <a:ext cx="640080" cy="1188720"/>
           </a:xfrm>
           <a:prstGeom prst="rect">
             <a:avLst/>
           </a:prstGeom>
           <a:solidFill>
-            <a:schemeClr val="bg2"/>
+            <a:schemeClr val="bg1"/>
           </a:solidFill>
           <a:ln w="12700">
             <a:solidFill>
@@ -7080,14 +7477,14 @@
       </p:sp>
       <p:sp>
         <p:nvSpPr>
-          <p:cNvPr id="6" name="b-lens"/>
+          <p:cNvPr id="8" name="b-lens"/>
           <p:cNvSpPr/>
           <p:nvPr/>
         </p:nvSpPr>
         <p:spPr>
           <a:xfrm>
-            <a:off x="4343400" y="1051560"/>
-            <a:ext cx="365760" cy="1097280"/>
+            <a:off x="4480560" y="1371600"/>
+            <a:ext cx="365760" cy="914400"/>
           </a:xfrm>
           <a:prstGeom prst="ellipse">
             <a:avLst/>
@@ -7105,14 +7502,14 @@
       </p:sp>
       <p:sp>
         <p:nvSpPr>
-          <p:cNvPr id="7" name="b-lens-label"/>
+          <p:cNvPr id="9" name="b-lens-label"/>
           <p:cNvSpPr txBox="1"/>
           <p:nvPr/>
         </p:nvSpPr>
         <p:spPr>
           <a:xfrm>
-            <a:off x="3840480" y="2377440"/>
-            <a:ext cx="1371600" cy="274320"/>
+            <a:off x="4206240" y="1078992"/>
+            <a:ext cx="914400" cy="182880"/>
           </a:xfrm>
           <a:prstGeom prst="rect">
             <a:avLst/>
@@ -7128,26 +7525,26 @@
               <a:buNone/>
             </a:pPr>
             <a:r>
-              <a:rPr lang="en-US" sz="1200" b="1" dirty="0">
+              <a:rPr lang="en-US" sz="900" dirty="0">
                 <a:solidFill>
-                  <a:schemeClr val="accent2"/>
+                  <a:schemeClr val="accent5"/>
                 </a:solidFill>
               </a:rPr>
-              <a:t>렌즈 + VCM</a:t>
+              <a:t>렌즈+VCM</a:t>
             </a:r>
-            <a:endParaRPr lang="en-US" sz="1200" dirty="0"/>
+            <a:endParaRPr lang="en-US" sz="900" dirty="0"/>
           </a:p>
         </p:txBody>
       </p:sp>
       <p:sp>
         <p:nvSpPr>
-          <p:cNvPr id="8" name="b-sensor"/>
+          <p:cNvPr id="10" name="b-sensor"/>
           <p:cNvSpPr/>
           <p:nvPr/>
         </p:nvSpPr>
         <p:spPr>
           <a:xfrm>
-            <a:off x="6949440" y="1188720"/>
+            <a:off x="7589520" y="1417320"/>
             <a:ext cx="164592" cy="822960"/>
           </a:xfrm>
           <a:prstGeom prst="rect">
@@ -7161,14 +7558,14 @@
       </p:sp>
       <p:sp>
         <p:nvSpPr>
-          <p:cNvPr id="9" name="b-sensor-label"/>
+          <p:cNvPr id="11" name="b-sensor-label"/>
           <p:cNvSpPr txBox="1"/>
           <p:nvPr/>
         </p:nvSpPr>
         <p:spPr>
           <a:xfrm>
-            <a:off x="6665976" y="2240280"/>
-            <a:ext cx="731520" cy="274320"/>
+            <a:off x="7086600" y="1078992"/>
+            <a:ext cx="914400" cy="182880"/>
           </a:xfrm>
           <a:prstGeom prst="rect">
             <a:avLst/>
@@ -7184,27 +7581,27 @@
               <a:buNone/>
             </a:pPr>
             <a:r>
-              <a:rPr lang="en-US" sz="1200" b="1" dirty="0">
+              <a:rPr lang="en-US" sz="900" dirty="0">
                 <a:solidFill>
-                  <a:schemeClr val="tx2"/>
+                  <a:schemeClr val="accent5"/>
                 </a:solidFill>
               </a:rPr>
               <a:t>IMX708</a:t>
             </a:r>
-            <a:endParaRPr lang="en-US" sz="1200" dirty="0"/>
+            <a:endParaRPr lang="en-US" sz="900" dirty="0"/>
           </a:p>
         </p:txBody>
       </p:sp>
       <p:sp>
         <p:nvSpPr>
-          <p:cNvPr id="10" name="b-wd"/>
+          <p:cNvPr id="12" name="b-wd"/>
           <p:cNvSpPr/>
           <p:nvPr/>
         </p:nvSpPr>
         <p:spPr>
           <a:xfrm>
-            <a:off x="868680" y="1600200"/>
-            <a:ext cx="3264408" cy="0"/>
+            <a:off x="868680" y="1828800"/>
+            <a:ext cx="3310128" cy="0"/>
           </a:xfrm>
           <a:prstGeom prst="line">
             <a:avLst/>
@@ -7222,14 +7619,14 @@
       </p:sp>
       <p:sp>
         <p:nvSpPr>
-          <p:cNvPr id="11" name="b-wd-label"/>
+          <p:cNvPr id="13" name="b-wd-label"/>
           <p:cNvSpPr txBox="1"/>
           <p:nvPr/>
         </p:nvSpPr>
         <p:spPr>
           <a:xfrm>
-            <a:off x="594360" y="1216152"/>
-            <a:ext cx="3813048" cy="292608"/>
+            <a:off x="594360" y="1444752"/>
+            <a:ext cx="3858768" cy="292608"/>
           </a:xfrm>
           <a:prstGeom prst="rect">
             <a:avLst/>
@@ -7250,7 +7647,7 @@
                   <a:schemeClr val="tx1"/>
                 </a:solidFill>
               </a:rPr>
-              <a:t>작업거리 20 mm</a:t>
+              <a:t>카메라 모듈 ~ 피사체 20 mm</a:t>
             </a:r>
             <a:endParaRPr lang="en-US" sz="1300" dirty="0"/>
           </a:p>
@@ -7258,14 +7655,14 @@
       </p:sp>
       <p:sp>
         <p:nvSpPr>
-          <p:cNvPr id="12" name="b-bf"/>
+          <p:cNvPr id="14" name="b-bf"/>
           <p:cNvSpPr/>
           <p:nvPr/>
         </p:nvSpPr>
         <p:spPr>
           <a:xfrm>
-            <a:off x="4919472" y="1600200"/>
-            <a:ext cx="2002536" cy="0"/>
+            <a:off x="5010912" y="1828800"/>
+            <a:ext cx="2551176" cy="0"/>
           </a:xfrm>
           <a:prstGeom prst="line">
             <a:avLst/>
@@ -7283,14 +7680,14 @@
       </p:sp>
       <p:sp>
         <p:nvSpPr>
-          <p:cNvPr id="13" name="b-bf-label"/>
+          <p:cNvPr id="15" name="b-bf-label"/>
           <p:cNvSpPr txBox="1"/>
           <p:nvPr/>
         </p:nvSpPr>
         <p:spPr>
           <a:xfrm>
-            <a:off x="4645152" y="1216152"/>
-            <a:ext cx="2551176" cy="292608"/>
+            <a:off x="4736592" y="1444752"/>
+            <a:ext cx="3099816" cy="292608"/>
           </a:xfrm>
           <a:prstGeom prst="rect">
             <a:avLst/>
@@ -7332,7 +7729,7 @@
           </p:nvPr>
         </p:nvGraphicFramePr>
         <p:xfrm>
-          <a:off x="457200" y="2697480"/>
+          <a:off x="457200" y="2743200"/>
           <a:ext cx="8229600" cy="914400"/>
         </p:xfrm>
         <a:graphic>
@@ -7340,10 +7737,10 @@
             <a:tbl>
               <a:tblPr/>
               <a:tblGrid>
-                <a:gridCol w="2377440"/>
-                <a:gridCol w="5852160"/>
+                <a:gridCol w="2194560"/>
+                <a:gridCol w="6035040"/>
               </a:tblGrid>
-              <a:tr h="365760">
+              <a:tr h="347472">
                 <a:tc>
                   <a:txBody>
                     <a:bodyPr/>
@@ -7464,7 +7861,7 @@
                   </a:tcPr>
                 </a:tc>
               </a:tr>
-              <a:tr h="365760">
+              <a:tr h="347472">
                 <a:tc>
                   <a:txBody>
                     <a:bodyPr/>
@@ -7585,7 +7982,7 @@
                   </a:tcPr>
                 </a:tc>
               </a:tr>
-              <a:tr h="365760">
+              <a:tr h="347472">
                 <a:tc>
                   <a:txBody>
                     <a:bodyPr/>
@@ -7706,7 +8103,7 @@
                   </a:tcPr>
                 </a:tc>
               </a:tr>
-              <a:tr h="365760">
+              <a:tr h="347472">
                 <a:tc>
                   <a:txBody>
                     <a:bodyPr/>
@@ -7721,7 +8118,7 @@
                             <a:schemeClr val="tx2"/>
                           </a:solidFill>
                         </a:rPr>
-                        <a:t>두피 ~ 센서 총 거리</a:t>
+                        <a:t>모듈 길이 (추정)</a:t>
                       </a:r>
                       <a:endParaRPr lang="en-US" sz="1300" dirty="0"/>
                     </a:p>
@@ -7782,7 +8179,7 @@
                             <a:schemeClr val="tx1"/>
                           </a:solidFill>
                         </a:rPr>
-                        <a:t>약 32 mm + 렌즈 두께</a:t>
+                        <a:t>약 15–17 mm (렌즈~센서 약 12 mm + 렌즈 두께)</a:t>
                       </a:r>
                       <a:endParaRPr lang="en-US" sz="1300" dirty="0"/>
                     </a:p>
@@ -7833,7 +8230,7 @@
       </p:graphicFrame>
       <p:sp>
         <p:nvSpPr>
-          <p:cNvPr id="15" name="b-note"/>
+          <p:cNvPr id="17" name="b-note"/>
           <p:cNvSpPr txBox="1"/>
           <p:nvPr/>
         </p:nvSpPr>
@@ -8258,7 +8655,7 @@
                             <a:schemeClr val="tx2"/>
                           </a:solidFill>
                         </a:rPr>
-                        <a:t>작업거리 (WD)</a:t>
+                        <a:t>모듈 ~ 피사체</a:t>
                       </a:r>
                       <a:endParaRPr lang="en-US" sz="1400" dirty="0"/>
                     </a:p>
@@ -8319,7 +8716,7 @@
                             <a:schemeClr val="tx1"/>
                           </a:solidFill>
                         </a:rPr>
-                        <a:t>A안 약 7–8 mm (귀사 제안) / B안 20 mm</a:t>
+                        <a:t>카메라 모듈 앞면 ~ 피사체 20 mm (A·B안 공통)</a:t>
                       </a:r>
                       <a:endParaRPr lang="en-US" sz="1400" dirty="0"/>
                     </a:p>
@@ -9537,7 +9934,7 @@
                   <a:schemeClr val="tx1"/>
                 </a:solidFill>
               </a:rPr>
-              <a:t>렌즈 외경 12 mm 이하</a:t>
+              <a:t>모듈~피사체 20 mm</a:t>
             </a:r>
             <a:endParaRPr lang="en-US" sz="1400" dirty="0"/>
           </a:p>
@@ -9555,7 +9952,7 @@
                   <a:schemeClr val="tx1"/>
                 </a:solidFill>
               </a:rPr>
-              <a:t>B안 전장 35 mm 이하</a:t>
+              <a:t>B안 모듈 길이 20 mm↓</a:t>
             </a:r>
             <a:endParaRPr lang="en-US" sz="1400" dirty="0"/>
           </a:p>
